--- a/MedJar.pptx
+++ b/MedJar.pptx
@@ -60,7 +60,7 @@
     <p:bg>
       <p:bgPr>
         <a:solidFill>
-          <a:srgbClr val="070B14"/>
+          <a:srgbClr val="F6F4EE"/>
         </a:solidFill>
         <a:effectLst/>
       </p:bgPr>
@@ -94,7 +94,7 @@
     <p:bg>
       <p:bgPr>
         <a:solidFill>
-          <a:srgbClr val="070B14"/>
+          <a:srgbClr val="F6F4EE"/>
         </a:solidFill>
         <a:effectLst/>
       </p:bgPr>
@@ -115,14 +115,14 @@
       </p:grpSpPr>
       <p:sp>
         <p:nvSpPr>
-          <p:cNvPr id="10" name="accent"/>
+          <p:cNvPr id="10" name="rule"/>
           <p:cNvSpPr/>
           <p:nvPr/>
         </p:nvSpPr>
         <p:spPr>
           <a:xfrm>
-            <a:off x="0" y="0"/>
-            <a:ext cx="12192000" cy="68580"/>
+            <a:off x="640000" y="1030000"/>
+            <a:ext cx="620000" cy="34000"/>
           </a:xfrm>
           <a:prstGeom prst="roundRect">
             <a:avLst>
@@ -130,7 +130,7 @@
             </a:avLst>
           </a:prstGeom>
           <a:solidFill>
-            <a:srgbClr val="2FE0C8"/>
+            <a:srgbClr val="8A1524"/>
           </a:solidFill>
           <a:ln>
             <a:noFill/>
@@ -152,8 +152,8 @@
         </p:nvSpPr>
         <p:spPr>
           <a:xfrm>
-            <a:off x="640000" y="520000"/>
-            <a:ext cx="9000000" cy="500000"/>
+            <a:off x="640000" y="540000"/>
+            <a:ext cx="10000000" cy="460000"/>
           </a:xfrm>
           <a:prstGeom prst="rect">
             <a:avLst/>
@@ -171,13 +171,13 @@
               </a:spcBef>
             </a:pPr>
             <a:r>
-              <a:rPr lang="en-US" sz="1300" b="1" dirty="0">
-                <a:solidFill>
-                  <a:srgbClr val="2FE0C8"/>
+              <a:rPr lang="en-US" sz="1150" b="1" dirty="0">
+                <a:solidFill>
+                  <a:srgbClr val="8A1524"/>
                 </a:solidFill>
                 <a:latin typeface="Consolas"/>
               </a:rPr>
-              <a:t>MULTI-AGENT CLINICAL AI</a:t>
+              <a:t>MULTI-AGENT CLINICAL REASONING  ·  RESEARCH SEMINAR</a:t>
             </a:r>
           </a:p>
         </p:txBody>
@@ -192,8 +192,8 @@
         </p:nvSpPr>
         <p:spPr>
           <a:xfrm>
-            <a:off x="640000" y="980000"/>
-            <a:ext cx="10600000" cy="1500000"/>
+            <a:off x="630000" y="1600000"/>
+            <a:ext cx="10800000" cy="1500000"/>
           </a:xfrm>
           <a:prstGeom prst="rect">
             <a:avLst/>
@@ -211,13 +211,13 @@
               </a:spcBef>
             </a:pPr>
             <a:r>
-              <a:rPr lang="en-US" sz="5400" b="1" dirty="0">
-                <a:solidFill>
-                  <a:srgbClr val="2FE0C8"/>
-                </a:solidFill>
-                <a:latin typeface="Segoe UI"/>
-              </a:rPr>
-              <a:t>MedJar</a:t>
+              <a:rPr lang="en-US" sz="5000" b="1" dirty="0">
+                <a:solidFill>
+                  <a:srgbClr val="1B1B22"/>
+                </a:solidFill>
+                <a:latin typeface="Georgia"/>
+              </a:rPr>
+              <a:t>MedJar: Consensus Diagnosis by Debating Specialist Agents</a:t>
             </a:r>
           </a:p>
         </p:txBody>
@@ -232,64 +232,64 @@
         </p:nvSpPr>
         <p:spPr>
           <a:xfrm>
-            <a:off x="700000" y="2500000"/>
-            <a:ext cx="10400000" cy="3600000"/>
-          </a:xfrm>
-          <a:prstGeom prst="rect">
-            <a:avLst/>
-          </a:prstGeom>
-        </p:spPr>
-        <p:txBody>
-          <a:bodyPr wrap="square" rtlCol="0">
-            <a:normAutofit/>
-          </a:bodyPr>
-          <a:lstStyle/>
-          <a:p>
-            <a:pPr>
-              <a:spcBef>
-                <a:spcPts val="700"/>
-              </a:spcBef>
-            </a:pPr>
-            <a:r>
-              <a:rPr lang="en-US" sz="1700" dirty="0">
-                <a:solidFill>
-                  <a:srgbClr val="E9F1FF"/>
-                </a:solidFill>
-                <a:latin typeface="Segoe UI"/>
-              </a:rPr>
-              <a:t>Medical Judgment via Agent Reasoning</a:t>
-            </a:r>
-          </a:p>
-          <a:p>
-            <a:pPr>
-              <a:spcBef>
-                <a:spcPts val="700"/>
-              </a:spcBef>
-            </a:pPr>
-            <a:r>
-              <a:rPr lang="en-US" sz="1700" dirty="0">
-                <a:solidFill>
-                  <a:srgbClr val="E9F1FF"/>
-                </a:solidFill>
-                <a:latin typeface="Segoe UI"/>
-              </a:rPr>
-              <a:t>Specialist LLM agents debate a patient's case, ground reasoning in</a:t>
-            </a:r>
-          </a:p>
-          <a:p>
-            <a:pPr>
-              <a:spcBef>
-                <a:spcPts val="700"/>
-              </a:spcBef>
-            </a:pPr>
-            <a:r>
-              <a:rPr lang="en-US" sz="1700" dirty="0">
-                <a:solidFill>
-                  <a:srgbClr val="E9F1FF"/>
-                </a:solidFill>
-                <a:latin typeface="Segoe UI"/>
-              </a:rPr>
-              <a:t>medical literature (RAG), and converge on one diagnostic report.</a:t>
+            <a:off x="700000" y="2900000"/>
+            <a:ext cx="10600000" cy="3400000"/>
+          </a:xfrm>
+          <a:prstGeom prst="rect">
+            <a:avLst/>
+          </a:prstGeom>
+        </p:spPr>
+        <p:txBody>
+          <a:bodyPr wrap="square" rtlCol="0">
+            <a:normAutofit/>
+          </a:bodyPr>
+          <a:lstStyle/>
+          <a:p>
+            <a:pPr>
+              <a:spcBef>
+                <a:spcPts val="760"/>
+              </a:spcBef>
+            </a:pPr>
+            <a:r>
+              <a:rPr lang="en-US" sz="1600" dirty="0">
+                <a:solidFill>
+                  <a:srgbClr val="3F3F4A"/>
+                </a:solidFill>
+                <a:latin typeface="Georgia"/>
+              </a:rPr>
+              <a:t>Persona-conditioned language-model specialists reason independently over a</a:t>
+            </a:r>
+          </a:p>
+          <a:p>
+            <a:pPr>
+              <a:spcBef>
+                <a:spcPts val="760"/>
+              </a:spcBef>
+            </a:pPr>
+            <a:r>
+              <a:rPr lang="en-US" sz="1600" dirty="0">
+                <a:solidFill>
+                  <a:srgbClr val="3F3F4A"/>
+                </a:solidFill>
+                <a:latin typeface="Georgia"/>
+              </a:rPr>
+              <a:t>patient case, ground every claim in retrieved literature, and are driven toward</a:t>
+            </a:r>
+          </a:p>
+          <a:p>
+            <a:pPr>
+              <a:spcBef>
+                <a:spcPts val="760"/>
+              </a:spcBef>
+            </a:pPr>
+            <a:r>
+              <a:rPr lang="en-US" sz="1600" dirty="0">
+                <a:solidFill>
+                  <a:srgbClr val="3F3F4A"/>
+                </a:solidFill>
+                <a:latin typeface="Georgia"/>
+              </a:rPr>
+              <a:t>a calibrated, auditable diagnosis through structured debate.</a:t>
             </a:r>
           </a:p>
           <a:p>
@@ -302,33 +302,33 @@
           <a:p>
             <a:pPr>
               <a:spcBef>
-                <a:spcPts val="700"/>
-              </a:spcBef>
-            </a:pPr>
-            <a:r>
-              <a:rPr lang="en-US" sz="1700" dirty="0">
-                <a:solidFill>
-                  <a:srgbClr val="E9F1FF"/>
-                </a:solidFill>
-                <a:latin typeface="Segoe UI"/>
-              </a:rPr>
-              <a:t>Radiologist  •  Cardiologist  •  Oncologist  •  + extensible</a:t>
-            </a:r>
-          </a:p>
-          <a:p>
-            <a:pPr>
-              <a:spcBef>
-                <a:spcPts val="700"/>
-              </a:spcBef>
-            </a:pPr>
-            <a:r>
-              <a:rPr lang="en-US" sz="1700" dirty="0">
-                <a:solidFill>
-                  <a:srgbClr val="E9F1FF"/>
-                </a:solidFill>
-                <a:latin typeface="Segoe UI"/>
-              </a:rPr>
-              <a:t>Assistive  •  human-in-the-loop  •  not autonomous</a:t>
+                <a:spcPts val="760"/>
+              </a:spcBef>
+            </a:pPr>
+            <a:r>
+              <a:rPr lang="en-US" sz="1600" dirty="0">
+                <a:solidFill>
+                  <a:srgbClr val="3F3F4A"/>
+                </a:solidFill>
+                <a:latin typeface="Georgia"/>
+              </a:rPr>
+              <a:t>Radiologist   ·   Cardiologist   ·   Oncologist   ·   extensible ensemble</a:t>
+            </a:r>
+          </a:p>
+          <a:p>
+            <a:pPr>
+              <a:spcBef>
+                <a:spcPts val="760"/>
+              </a:spcBef>
+            </a:pPr>
+            <a:r>
+              <a:rPr lang="en-US" sz="1600" dirty="0">
+                <a:solidFill>
+                  <a:srgbClr val="3F3F4A"/>
+                </a:solidFill>
+                <a:latin typeface="Georgia"/>
+              </a:rPr>
+              <a:t>Assistive   ·   human-in-the-loop   ·   not an autonomous diagnostic device</a:t>
             </a:r>
           </a:p>
         </p:txBody>
@@ -343,8 +343,8 @@
         </p:nvSpPr>
         <p:spPr>
           <a:xfrm>
-            <a:off x="640000" y="6400000"/>
-            <a:ext cx="9000000" cy="380000"/>
+            <a:off x="640000" y="6420000"/>
+            <a:ext cx="10000000" cy="360000"/>
           </a:xfrm>
           <a:prstGeom prst="rect">
             <a:avLst/>
@@ -362,13 +362,13 @@
               </a:spcBef>
             </a:pPr>
             <a:r>
-              <a:rPr lang="en-US" sz="1000" dirty="0">
-                <a:solidFill>
-                  <a:srgbClr val="65799A"/>
+              <a:rPr lang="en-US" sz="950" dirty="0">
+                <a:solidFill>
+                  <a:srgbClr val="8A8A96"/>
                 </a:solidFill>
                 <a:latin typeface="Consolas"/>
               </a:rPr>
-              <a:t>MedJar  ·  01 / 18  ·  assistive decision-support — not autonomous</a:t>
+              <a:t>MedJar   ·   01 / 18   ·   assistive decision-support, not an autonomous device</a:t>
             </a:r>
           </a:p>
         </p:txBody>
@@ -387,7 +387,7 @@
     <p:bg>
       <p:bgPr>
         <a:solidFill>
-          <a:srgbClr val="070B14"/>
+          <a:srgbClr val="F6F4EE"/>
         </a:solidFill>
         <a:effectLst/>
       </p:bgPr>
@@ -408,14 +408,14 @@
       </p:grpSpPr>
       <p:sp>
         <p:nvSpPr>
-          <p:cNvPr id="10" name="accent"/>
+          <p:cNvPr id="10" name="rule"/>
           <p:cNvSpPr/>
           <p:nvPr/>
         </p:nvSpPr>
         <p:spPr>
           <a:xfrm>
-            <a:off x="0" y="0"/>
-            <a:ext cx="12192000" cy="68580"/>
+            <a:off x="640000" y="1030000"/>
+            <a:ext cx="620000" cy="34000"/>
           </a:xfrm>
           <a:prstGeom prst="roundRect">
             <a:avLst>
@@ -423,7 +423,7 @@
             </a:avLst>
           </a:prstGeom>
           <a:solidFill>
-            <a:srgbClr val="2FE0C8"/>
+            <a:srgbClr val="8A1524"/>
           </a:solidFill>
           <a:ln>
             <a:noFill/>
@@ -437,45 +437,16 @@
       </p:sp>
       <p:sp>
         <p:nvSpPr>
-          <p:cNvPr id="11" name="sidebar"/>
-          <p:cNvSpPr/>
-          <p:nvPr/>
-        </p:nvSpPr>
-        <p:spPr>
-          <a:xfrm>
-            <a:off x="11330000" y="500000"/>
-            <a:ext cx="45720" cy="5800000"/>
-          </a:xfrm>
-          <a:prstGeom prst="roundRect">
-            <a:avLst>
-              <a:gd name="adj" fmla="val 6000"/>
-            </a:avLst>
-          </a:prstGeom>
-          <a:solidFill>
-            <a:srgbClr val="4C8DFF"/>
-          </a:solidFill>
-          <a:ln>
-            <a:noFill/>
-          </a:ln>
-        </p:spPr>
-        <p:txBody>
-          <a:bodyPr/>
-          <a:lstStyle/>
-          <a:p/>
-        </p:txBody>
-      </p:sp>
-      <p:sp>
-        <p:nvSpPr>
-          <p:cNvPr id="12" name="kicker"/>
-          <p:cNvSpPr>
-            <a:spLocks noGrp="1"/>
-          </p:cNvSpPr>
-          <p:nvPr/>
-        </p:nvSpPr>
-        <p:spPr>
-          <a:xfrm>
-            <a:off x="640000" y="520000"/>
-            <a:ext cx="9000000" cy="500000"/>
+          <p:cNvPr id="11" name="kicker"/>
+          <p:cNvSpPr>
+            <a:spLocks noGrp="1"/>
+          </p:cNvSpPr>
+          <p:nvPr/>
+        </p:nvSpPr>
+        <p:spPr>
+          <a:xfrm>
+            <a:off x="640000" y="540000"/>
+            <a:ext cx="10000000" cy="460000"/>
           </a:xfrm>
           <a:prstGeom prst="rect">
             <a:avLst/>
@@ -493,9 +464,9 @@
               </a:spcBef>
             </a:pPr>
             <a:r>
-              <a:rPr lang="en-US" sz="1300" b="1" dirty="0">
-                <a:solidFill>
-                  <a:srgbClr val="2FE0C8"/>
+              <a:rPr lang="en-US" sz="1150" b="1" dirty="0">
+                <a:solidFill>
+                  <a:srgbClr val="8A1524"/>
                 </a:solidFill>
                 <a:latin typeface="Consolas"/>
               </a:rPr>
@@ -506,16 +477,16 @@
       </p:sp>
       <p:sp>
         <p:nvSpPr>
-          <p:cNvPr id="13" name="title"/>
-          <p:cNvSpPr>
-            <a:spLocks noGrp="1"/>
-          </p:cNvSpPr>
-          <p:nvPr/>
-        </p:nvSpPr>
-        <p:spPr>
-          <a:xfrm>
-            <a:off x="640000" y="980000"/>
-            <a:ext cx="10600000" cy="1300000"/>
+          <p:cNvPr id="12" name="title"/>
+          <p:cNvSpPr>
+            <a:spLocks noGrp="1"/>
+          </p:cNvSpPr>
+          <p:nvPr/>
+        </p:nvSpPr>
+        <p:spPr>
+          <a:xfrm>
+            <a:off x="630000" y="1120000"/>
+            <a:ext cx="10800000" cy="1200000"/>
           </a:xfrm>
           <a:prstGeom prst="rect">
             <a:avLst/>
@@ -533,11 +504,11 @@
               </a:spcBef>
             </a:pPr>
             <a:r>
-              <a:rPr lang="en-US" sz="3200" b="1" dirty="0">
-                <a:solidFill>
-                  <a:srgbClr val="E9F1FF"/>
-                </a:solidFill>
-                <a:latin typeface="Segoe UI"/>
+              <a:rPr lang="en-US" sz="3000" b="1" dirty="0">
+                <a:solidFill>
+                  <a:srgbClr val="1B1B22"/>
+                </a:solidFill>
+                <a:latin typeface="Georgia"/>
               </a:rPr>
               <a:t>A deterministic controller convenes the room</a:t>
             </a:r>
@@ -546,7 +517,7 @@
       </p:sp>
       <p:sp>
         <p:nvSpPr>
-          <p:cNvPr id="14" name="body"/>
+          <p:cNvPr id="13" name="body"/>
           <p:cNvSpPr>
             <a:spLocks noGrp="1"/>
           </p:cNvSpPr>
@@ -555,103 +526,118 @@
         <p:spPr>
           <a:xfrm>
             <a:off x="700000" y="2650000"/>
-            <a:ext cx="10400000" cy="3600000"/>
-          </a:xfrm>
-          <a:prstGeom prst="rect">
-            <a:avLst/>
-          </a:prstGeom>
-        </p:spPr>
-        <p:txBody>
-          <a:bodyPr wrap="square" rtlCol="0">
-            <a:normAutofit/>
-          </a:bodyPr>
-          <a:lstStyle/>
-          <a:p>
-            <a:pPr marL="285750" indent="-285750">
-              <a:spcBef>
-                <a:spcPts val="700"/>
-              </a:spcBef>
-              <a:buFont typeface="Arial"/>
-              <a:buChar char="•"/>
-            </a:pPr>
-            <a:r>
-              <a:rPr lang="en-US" sz="1600" dirty="0">
-                <a:solidFill>
-                  <a:srgbClr val="9FB2CF"/>
-                </a:solidFill>
-                <a:latin typeface="Segoe UI"/>
+            <a:ext cx="10600000" cy="3400000"/>
+          </a:xfrm>
+          <a:prstGeom prst="rect">
+            <a:avLst/>
+          </a:prstGeom>
+        </p:spPr>
+        <p:txBody>
+          <a:bodyPr wrap="square" rtlCol="0">
+            <a:normAutofit/>
+          </a:bodyPr>
+          <a:lstStyle/>
+          <a:p>
+            <a:pPr marL="342900" indent="-342900">
+              <a:spcBef>
+                <a:spcPts val="760"/>
+              </a:spcBef>
+              <a:buClr>
+                <a:srgbClr val="8A1524"/>
+              </a:buClr>
+              <a:buFont typeface="Arial"/>
+              <a:buChar char="–"/>
+            </a:pPr>
+            <a:r>
+              <a:rPr lang="en-US" sz="1500" dirty="0">
+                <a:solidFill>
+                  <a:srgbClr val="3F3F4A"/>
+                </a:solidFill>
+                <a:latin typeface="Georgia"/>
               </a:rPr>
               <a:t>Allocates turns &amp; anonymizes identities during critique</a:t>
             </a:r>
           </a:p>
           <a:p>
-            <a:pPr marL="285750" indent="-285750">
-              <a:spcBef>
-                <a:spcPts val="700"/>
-              </a:spcBef>
-              <a:buFont typeface="Arial"/>
-              <a:buChar char="•"/>
-            </a:pPr>
-            <a:r>
-              <a:rPr lang="en-US" sz="1600" dirty="0">
-                <a:solidFill>
-                  <a:srgbClr val="9FB2CF"/>
-                </a:solidFill>
-                <a:latin typeface="Segoe UI"/>
+            <a:pPr marL="342900" indent="-342900">
+              <a:spcBef>
+                <a:spcPts val="760"/>
+              </a:spcBef>
+              <a:buClr>
+                <a:srgbClr val="8A1524"/>
+              </a:buClr>
+              <a:buFont typeface="Arial"/>
+              <a:buChar char="–"/>
+            </a:pPr>
+            <a:r>
+              <a:rPr lang="en-US" sz="1500" dirty="0">
+                <a:solidFill>
+                  <a:srgbClr val="3F3F4A"/>
+                </a:solidFill>
+                <a:latin typeface="Georgia"/>
               </a:rPr>
               <a:t>Enforces the contract; rejects malformed / ungrounded turns</a:t>
             </a:r>
           </a:p>
           <a:p>
-            <a:pPr marL="285750" indent="-285750">
-              <a:spcBef>
-                <a:spcPts val="700"/>
-              </a:spcBef>
-              <a:buFont typeface="Arial"/>
-              <a:buChar char="•"/>
-            </a:pPr>
-            <a:r>
-              <a:rPr lang="en-US" sz="1600" dirty="0">
-                <a:solidFill>
-                  <a:srgbClr val="9FB2CF"/>
-                </a:solidFill>
-                <a:latin typeface="Segoe UI"/>
+            <a:pPr marL="342900" indent="-342900">
+              <a:spcBef>
+                <a:spcPts val="760"/>
+              </a:spcBef>
+              <a:buClr>
+                <a:srgbClr val="8A1524"/>
+              </a:buClr>
+              <a:buFont typeface="Arial"/>
+              <a:buChar char="–"/>
+            </a:pPr>
+            <a:r>
+              <a:rPr lang="en-US" sz="1500" dirty="0">
+                <a:solidFill>
+                  <a:srgbClr val="3F3F4A"/>
+                </a:solidFill>
+                <a:latin typeface="Georgia"/>
               </a:rPr>
               <a:t>Computes D-bar, evidence scores, applies the stopping rule</a:t>
             </a:r>
           </a:p>
           <a:p>
-            <a:pPr marL="285750" indent="-285750">
-              <a:spcBef>
-                <a:spcPts val="700"/>
-              </a:spcBef>
-              <a:buFont typeface="Arial"/>
-              <a:buChar char="•"/>
-            </a:pPr>
-            <a:r>
-              <a:rPr lang="en-US" sz="1600" dirty="0">
-                <a:solidFill>
-                  <a:srgbClr val="9FB2CF"/>
-                </a:solidFill>
-                <a:latin typeface="Segoe UI"/>
+            <a:pPr marL="342900" indent="-342900">
+              <a:spcBef>
+                <a:spcPts val="760"/>
+              </a:spcBef>
+              <a:buClr>
+                <a:srgbClr val="8A1524"/>
+              </a:buClr>
+              <a:buFont typeface="Arial"/>
+              <a:buChar char="–"/>
+            </a:pPr>
+            <a:r>
+              <a:rPr lang="en-US" sz="1500" dirty="0">
+                <a:solidFill>
+                  <a:srgbClr val="3F3F4A"/>
+                </a:solidFill>
+                <a:latin typeface="Georgia"/>
               </a:rPr>
               <a:t>Manages the Evidence Ledger &amp; immutable audit log</a:t>
             </a:r>
           </a:p>
           <a:p>
-            <a:pPr marL="285750" indent="-285750">
-              <a:spcBef>
-                <a:spcPts val="700"/>
-              </a:spcBef>
-              <a:buFont typeface="Arial"/>
-              <a:buChar char="•"/>
-            </a:pPr>
-            <a:r>
-              <a:rPr lang="en-US" sz="1600" dirty="0">
-                <a:solidFill>
-                  <a:srgbClr val="9FB2CF"/>
-                </a:solidFill>
-                <a:latin typeface="Segoe UI"/>
+            <a:pPr marL="342900" indent="-342900">
+              <a:spcBef>
+                <a:spcPts val="760"/>
+              </a:spcBef>
+              <a:buClr>
+                <a:srgbClr val="8A1524"/>
+              </a:buClr>
+              <a:buFont typeface="Arial"/>
+              <a:buChar char="–"/>
+            </a:pPr>
+            <a:r>
+              <a:rPr lang="en-US" sz="1500" dirty="0">
+                <a:solidFill>
+                  <a:srgbClr val="3F3F4A"/>
+                </a:solidFill>
+                <a:latin typeface="Georgia"/>
               </a:rPr>
               <a:t>Deterministic (not free-form LLM) -&gt; predictable, testable, auditable</a:t>
             </a:r>
@@ -660,16 +646,16 @@
       </p:sp>
       <p:sp>
         <p:nvSpPr>
-          <p:cNvPr id="15" name="footer"/>
-          <p:cNvSpPr>
-            <a:spLocks noGrp="1"/>
-          </p:cNvSpPr>
-          <p:nvPr/>
-        </p:nvSpPr>
-        <p:spPr>
-          <a:xfrm>
-            <a:off x="640000" y="6400000"/>
-            <a:ext cx="9000000" cy="380000"/>
+          <p:cNvPr id="14" name="footer"/>
+          <p:cNvSpPr>
+            <a:spLocks noGrp="1"/>
+          </p:cNvSpPr>
+          <p:nvPr/>
+        </p:nvSpPr>
+        <p:spPr>
+          <a:xfrm>
+            <a:off x="640000" y="6420000"/>
+            <a:ext cx="10000000" cy="360000"/>
           </a:xfrm>
           <a:prstGeom prst="rect">
             <a:avLst/>
@@ -687,13 +673,13 @@
               </a:spcBef>
             </a:pPr>
             <a:r>
-              <a:rPr lang="en-US" sz="1000" dirty="0">
-                <a:solidFill>
-                  <a:srgbClr val="65799A"/>
+              <a:rPr lang="en-US" sz="950" dirty="0">
+                <a:solidFill>
+                  <a:srgbClr val="8A8A96"/>
                 </a:solidFill>
                 <a:latin typeface="Consolas"/>
               </a:rPr>
-              <a:t>MedJar  ·  10 / 18  ·  assistive decision-support — not autonomous</a:t>
+              <a:t>MedJar   ·   10 / 18   ·   assistive decision-support, not an autonomous device</a:t>
             </a:r>
           </a:p>
         </p:txBody>
@@ -712,7 +698,7 @@
     <p:bg>
       <p:bgPr>
         <a:solidFill>
-          <a:srgbClr val="070B14"/>
+          <a:srgbClr val="F6F4EE"/>
         </a:solidFill>
         <a:effectLst/>
       </p:bgPr>
@@ -733,14 +719,14 @@
       </p:grpSpPr>
       <p:sp>
         <p:nvSpPr>
-          <p:cNvPr id="10" name="accent"/>
+          <p:cNvPr id="10" name="rule"/>
           <p:cNvSpPr/>
           <p:nvPr/>
         </p:nvSpPr>
         <p:spPr>
           <a:xfrm>
-            <a:off x="0" y="0"/>
-            <a:ext cx="12192000" cy="68580"/>
+            <a:off x="640000" y="1030000"/>
+            <a:ext cx="620000" cy="34000"/>
           </a:xfrm>
           <a:prstGeom prst="roundRect">
             <a:avLst>
@@ -748,7 +734,7 @@
             </a:avLst>
           </a:prstGeom>
           <a:solidFill>
-            <a:srgbClr val="2FE0C8"/>
+            <a:srgbClr val="8A1524"/>
           </a:solidFill>
           <a:ln>
             <a:noFill/>
@@ -762,45 +748,16 @@
       </p:sp>
       <p:sp>
         <p:nvSpPr>
-          <p:cNvPr id="11" name="sidebar"/>
-          <p:cNvSpPr/>
-          <p:nvPr/>
-        </p:nvSpPr>
-        <p:spPr>
-          <a:xfrm>
-            <a:off x="11330000" y="500000"/>
-            <a:ext cx="45720" cy="5800000"/>
-          </a:xfrm>
-          <a:prstGeom prst="roundRect">
-            <a:avLst>
-              <a:gd name="adj" fmla="val 6000"/>
-            </a:avLst>
-          </a:prstGeom>
-          <a:solidFill>
-            <a:srgbClr val="4C8DFF"/>
-          </a:solidFill>
-          <a:ln>
-            <a:noFill/>
-          </a:ln>
-        </p:spPr>
-        <p:txBody>
-          <a:bodyPr/>
-          <a:lstStyle/>
-          <a:p/>
-        </p:txBody>
-      </p:sp>
-      <p:sp>
-        <p:nvSpPr>
-          <p:cNvPr id="12" name="kicker"/>
-          <p:cNvSpPr>
-            <a:spLocks noGrp="1"/>
-          </p:cNvSpPr>
-          <p:nvPr/>
-        </p:nvSpPr>
-        <p:spPr>
-          <a:xfrm>
-            <a:off x="640000" y="520000"/>
-            <a:ext cx="9000000" cy="500000"/>
+          <p:cNvPr id="11" name="kicker"/>
+          <p:cNvSpPr>
+            <a:spLocks noGrp="1"/>
+          </p:cNvSpPr>
+          <p:nvPr/>
+        </p:nvSpPr>
+        <p:spPr>
+          <a:xfrm>
+            <a:off x="640000" y="540000"/>
+            <a:ext cx="10000000" cy="460000"/>
           </a:xfrm>
           <a:prstGeom prst="rect">
             <a:avLst/>
@@ -818,9 +775,9 @@
               </a:spcBef>
             </a:pPr>
             <a:r>
-              <a:rPr lang="en-US" sz="1300" b="1" dirty="0">
-                <a:solidFill>
-                  <a:srgbClr val="2FE0C8"/>
+              <a:rPr lang="en-US" sz="1150" b="1" dirty="0">
+                <a:solidFill>
+                  <a:srgbClr val="8A1524"/>
                 </a:solidFill>
                 <a:latin typeface="Consolas"/>
               </a:rPr>
@@ -831,16 +788,16 @@
       </p:sp>
       <p:sp>
         <p:nvSpPr>
-          <p:cNvPr id="13" name="title"/>
-          <p:cNvSpPr>
-            <a:spLocks noGrp="1"/>
-          </p:cNvSpPr>
-          <p:nvPr/>
-        </p:nvSpPr>
-        <p:spPr>
-          <a:xfrm>
-            <a:off x="640000" y="980000"/>
-            <a:ext cx="10600000" cy="1300000"/>
+          <p:cNvPr id="12" name="title"/>
+          <p:cNvSpPr>
+            <a:spLocks noGrp="1"/>
+          </p:cNvSpPr>
+          <p:nvPr/>
+        </p:nvSpPr>
+        <p:spPr>
+          <a:xfrm>
+            <a:off x="630000" y="1120000"/>
+            <a:ext cx="10800000" cy="1200000"/>
           </a:xfrm>
           <a:prstGeom prst="rect">
             <a:avLst/>
@@ -858,11 +815,11 @@
               </a:spcBef>
             </a:pPr>
             <a:r>
-              <a:rPr lang="en-US" sz="3200" b="1" dirty="0">
-                <a:solidFill>
-                  <a:srgbClr val="E9F1FF"/>
-                </a:solidFill>
-                <a:latin typeface="Segoe UI"/>
+              <a:rPr lang="en-US" sz="3000" b="1" dirty="0">
+                <a:solidFill>
+                  <a:srgbClr val="1B1B22"/>
+                </a:solidFill>
+                <a:latin typeface="Georgia"/>
               </a:rPr>
               <a:t>The state machine</a:t>
             </a:r>
@@ -871,7 +828,7 @@
       </p:sp>
       <p:sp>
         <p:nvSpPr>
-          <p:cNvPr id="14" name="body"/>
+          <p:cNvPr id="13" name="body"/>
           <p:cNvSpPr>
             <a:spLocks noGrp="1"/>
           </p:cNvSpPr>
@@ -880,103 +837,118 @@
         <p:spPr>
           <a:xfrm>
             <a:off x="700000" y="2650000"/>
-            <a:ext cx="10400000" cy="3600000"/>
-          </a:xfrm>
-          <a:prstGeom prst="rect">
-            <a:avLst/>
-          </a:prstGeom>
-        </p:spPr>
-        <p:txBody>
-          <a:bodyPr wrap="square" rtlCol="0">
-            <a:normAutofit/>
-          </a:bodyPr>
-          <a:lstStyle/>
-          <a:p>
-            <a:pPr marL="285750" indent="-285750">
-              <a:spcBef>
-                <a:spcPts val="700"/>
-              </a:spcBef>
-              <a:buFont typeface="Arial"/>
-              <a:buChar char="•"/>
-            </a:pPr>
-            <a:r>
-              <a:rPr lang="en-US" sz="1600" dirty="0">
-                <a:solidFill>
-                  <a:srgbClr val="9FB2CF"/>
-                </a:solidFill>
-                <a:latin typeface="Segoe UI"/>
+            <a:ext cx="10600000" cy="3400000"/>
+          </a:xfrm>
+          <a:prstGeom prst="rect">
+            <a:avLst/>
+          </a:prstGeom>
+        </p:spPr>
+        <p:txBody>
+          <a:bodyPr wrap="square" rtlCol="0">
+            <a:normAutofit/>
+          </a:bodyPr>
+          <a:lstStyle/>
+          <a:p>
+            <a:pPr marL="342900" indent="-342900">
+              <a:spcBef>
+                <a:spcPts val="760"/>
+              </a:spcBef>
+              <a:buClr>
+                <a:srgbClr val="8A1524"/>
+              </a:buClr>
+              <a:buFont typeface="Arial"/>
+              <a:buChar char="–"/>
+            </a:pPr>
+            <a:r>
+              <a:rPr lang="en-US" sz="1500" dirty="0">
+                <a:solidFill>
+                  <a:srgbClr val="3F3F4A"/>
+                </a:solidFill>
+                <a:latin typeface="Georgia"/>
               </a:rPr>
               <a:t>INTAKE -&gt; PROPOSE -&gt; CRITIQUE -&gt; REBUT -&gt; ASSESS</a:t>
             </a:r>
           </a:p>
           <a:p>
-            <a:pPr marL="285750" indent="-285750">
-              <a:spcBef>
-                <a:spcPts val="700"/>
-              </a:spcBef>
-              <a:buFont typeface="Arial"/>
-              <a:buChar char="•"/>
-            </a:pPr>
-            <a:r>
-              <a:rPr lang="en-US" sz="1600" dirty="0">
-                <a:solidFill>
-                  <a:srgbClr val="9FB2CF"/>
-                </a:solidFill>
-                <a:latin typeface="Segoe UI"/>
+            <a:pPr marL="342900" indent="-342900">
+              <a:spcBef>
+                <a:spcPts val="760"/>
+              </a:spcBef>
+              <a:buClr>
+                <a:srgbClr val="8A1524"/>
+              </a:buClr>
+              <a:buFont typeface="Arial"/>
+              <a:buChar char="–"/>
+            </a:pPr>
+            <a:r>
+              <a:rPr lang="en-US" sz="1500" dirty="0">
+                <a:solidFill>
+                  <a:srgbClr val="3F3F4A"/>
+                </a:solidFill>
+                <a:latin typeface="Georgia"/>
               </a:rPr>
               <a:t>ASSESS: converged        -&gt; CONSENSUS -&gt; REPORT</a:t>
             </a:r>
           </a:p>
           <a:p>
-            <a:pPr marL="285750" indent="-285750">
-              <a:spcBef>
-                <a:spcPts val="700"/>
-              </a:spcBef>
-              <a:buFont typeface="Arial"/>
-              <a:buChar char="•"/>
-            </a:pPr>
-            <a:r>
-              <a:rPr lang="en-US" sz="1600" dirty="0">
-                <a:solidFill>
-                  <a:srgbClr val="9FB2CF"/>
-                </a:solidFill>
-                <a:latin typeface="Segoe UI"/>
+            <a:pPr marL="342900" indent="-342900">
+              <a:spcBef>
+                <a:spcPts val="760"/>
+              </a:spcBef>
+              <a:buClr>
+                <a:srgbClr val="8A1524"/>
+              </a:buClr>
+              <a:buFont typeface="Arial"/>
+              <a:buChar char="–"/>
+            </a:pPr>
+            <a:r>
+              <a:rPr lang="en-US" sz="1500" dirty="0">
+                <a:solidFill>
+                  <a:srgbClr val="3F3F4A"/>
+                </a:solidFill>
+                <a:latin typeface="Georgia"/>
               </a:rPr>
               <a:t>ASSESS: not converged    -&gt; loop PROPOSE (while r &lt; R_max)</a:t>
             </a:r>
           </a:p>
           <a:p>
-            <a:pPr marL="285750" indent="-285750">
-              <a:spcBef>
-                <a:spcPts val="700"/>
-              </a:spcBef>
-              <a:buFont typeface="Arial"/>
-              <a:buChar char="•"/>
-            </a:pPr>
-            <a:r>
-              <a:rPr lang="en-US" sz="1600" dirty="0">
-                <a:solidFill>
-                  <a:srgbClr val="9FB2CF"/>
-                </a:solidFill>
-                <a:latin typeface="Segoe UI"/>
+            <a:pPr marL="342900" indent="-342900">
+              <a:spcBef>
+                <a:spcPts val="760"/>
+              </a:spcBef>
+              <a:buClr>
+                <a:srgbClr val="8A1524"/>
+              </a:buClr>
+              <a:buFont typeface="Arial"/>
+              <a:buChar char="–"/>
+            </a:pPr>
+            <a:r>
+              <a:rPr lang="en-US" sz="1500" dirty="0">
+                <a:solidFill>
+                  <a:srgbClr val="3F3F4A"/>
+                </a:solidFill>
+                <a:latin typeface="Georgia"/>
               </a:rPr>
               <a:t>ASSESS: red-flag / R_max  -&gt; ESCALATE to human + full transcript</a:t>
             </a:r>
           </a:p>
           <a:p>
-            <a:pPr marL="285750" indent="-285750">
-              <a:spcBef>
-                <a:spcPts val="700"/>
-              </a:spcBef>
-              <a:buFont typeface="Arial"/>
-              <a:buChar char="•"/>
-            </a:pPr>
-            <a:r>
-              <a:rPr lang="en-US" sz="1600" dirty="0">
-                <a:solidFill>
-                  <a:srgbClr val="9FB2CF"/>
-                </a:solidFill>
-                <a:latin typeface="Segoe UI"/>
+            <a:pPr marL="342900" indent="-342900">
+              <a:spcBef>
+                <a:spcPts val="760"/>
+              </a:spcBef>
+              <a:buClr>
+                <a:srgbClr val="8A1524"/>
+              </a:buClr>
+              <a:buFont typeface="Arial"/>
+              <a:buChar char="–"/>
+            </a:pPr>
+            <a:r>
+              <a:rPr lang="en-US" sz="1500" dirty="0">
+                <a:solidFill>
+                  <a:srgbClr val="3F3F4A"/>
+                </a:solidFill>
+                <a:latin typeface="Georgia"/>
               </a:rPr>
               <a:t>Bounded compute; every transition logged and replayable</a:t>
             </a:r>
@@ -985,16 +957,16 @@
       </p:sp>
       <p:sp>
         <p:nvSpPr>
-          <p:cNvPr id="15" name="footer"/>
-          <p:cNvSpPr>
-            <a:spLocks noGrp="1"/>
-          </p:cNvSpPr>
-          <p:nvPr/>
-        </p:nvSpPr>
-        <p:spPr>
-          <a:xfrm>
-            <a:off x="640000" y="6400000"/>
-            <a:ext cx="9000000" cy="380000"/>
+          <p:cNvPr id="14" name="footer"/>
+          <p:cNvSpPr>
+            <a:spLocks noGrp="1"/>
+          </p:cNvSpPr>
+          <p:nvPr/>
+        </p:nvSpPr>
+        <p:spPr>
+          <a:xfrm>
+            <a:off x="640000" y="6420000"/>
+            <a:ext cx="10000000" cy="360000"/>
           </a:xfrm>
           <a:prstGeom prst="rect">
             <a:avLst/>
@@ -1012,13 +984,13 @@
               </a:spcBef>
             </a:pPr>
             <a:r>
-              <a:rPr lang="en-US" sz="1000" dirty="0">
-                <a:solidFill>
-                  <a:srgbClr val="65799A"/>
+              <a:rPr lang="en-US" sz="950" dirty="0">
+                <a:solidFill>
+                  <a:srgbClr val="8A8A96"/>
                 </a:solidFill>
                 <a:latin typeface="Consolas"/>
               </a:rPr>
-              <a:t>MedJar  ·  11 / 18  ·  assistive decision-support — not autonomous</a:t>
+              <a:t>MedJar   ·   11 / 18   ·   assistive decision-support, not an autonomous device</a:t>
             </a:r>
           </a:p>
         </p:txBody>
@@ -1037,7 +1009,7 @@
     <p:bg>
       <p:bgPr>
         <a:solidFill>
-          <a:srgbClr val="070B14"/>
+          <a:srgbClr val="F6F4EE"/>
         </a:solidFill>
         <a:effectLst/>
       </p:bgPr>
@@ -1058,14 +1030,14 @@
       </p:grpSpPr>
       <p:sp>
         <p:nvSpPr>
-          <p:cNvPr id="10" name="accent"/>
+          <p:cNvPr id="10" name="rule"/>
           <p:cNvSpPr/>
           <p:nvPr/>
         </p:nvSpPr>
         <p:spPr>
           <a:xfrm>
-            <a:off x="0" y="0"/>
-            <a:ext cx="12192000" cy="68580"/>
+            <a:off x="640000" y="1030000"/>
+            <a:ext cx="620000" cy="34000"/>
           </a:xfrm>
           <a:prstGeom prst="roundRect">
             <a:avLst>
@@ -1073,7 +1045,7 @@
             </a:avLst>
           </a:prstGeom>
           <a:solidFill>
-            <a:srgbClr val="2FE0C8"/>
+            <a:srgbClr val="8A1524"/>
           </a:solidFill>
           <a:ln>
             <a:noFill/>
@@ -1087,45 +1059,16 @@
       </p:sp>
       <p:sp>
         <p:nvSpPr>
-          <p:cNvPr id="11" name="sidebar"/>
-          <p:cNvSpPr/>
-          <p:nvPr/>
-        </p:nvSpPr>
-        <p:spPr>
-          <a:xfrm>
-            <a:off x="11330000" y="500000"/>
-            <a:ext cx="45720" cy="5800000"/>
-          </a:xfrm>
-          <a:prstGeom prst="roundRect">
-            <a:avLst>
-              <a:gd name="adj" fmla="val 6000"/>
-            </a:avLst>
-          </a:prstGeom>
-          <a:solidFill>
-            <a:srgbClr val="4C8DFF"/>
-          </a:solidFill>
-          <a:ln>
-            <a:noFill/>
-          </a:ln>
-        </p:spPr>
-        <p:txBody>
-          <a:bodyPr/>
-          <a:lstStyle/>
-          <a:p/>
-        </p:txBody>
-      </p:sp>
-      <p:sp>
-        <p:nvSpPr>
-          <p:cNvPr id="12" name="kicker"/>
-          <p:cNvSpPr>
-            <a:spLocks noGrp="1"/>
-          </p:cNvSpPr>
-          <p:nvPr/>
-        </p:nvSpPr>
-        <p:spPr>
-          <a:xfrm>
-            <a:off x="640000" y="520000"/>
-            <a:ext cx="9000000" cy="500000"/>
+          <p:cNvPr id="11" name="kicker"/>
+          <p:cNvSpPr>
+            <a:spLocks noGrp="1"/>
+          </p:cNvSpPr>
+          <p:nvPr/>
+        </p:nvSpPr>
+        <p:spPr>
+          <a:xfrm>
+            <a:off x="640000" y="540000"/>
+            <a:ext cx="10000000" cy="460000"/>
           </a:xfrm>
           <a:prstGeom prst="rect">
             <a:avLst/>
@@ -1143,9 +1086,9 @@
               </a:spcBef>
             </a:pPr>
             <a:r>
-              <a:rPr lang="en-US" sz="1300" b="1" dirty="0">
-                <a:solidFill>
-                  <a:srgbClr val="2FE0C8"/>
+              <a:rPr lang="en-US" sz="1150" b="1" dirty="0">
+                <a:solidFill>
+                  <a:srgbClr val="8A1524"/>
                 </a:solidFill>
                 <a:latin typeface="Consolas"/>
               </a:rPr>
@@ -1156,16 +1099,16 @@
       </p:sp>
       <p:sp>
         <p:nvSpPr>
-          <p:cNvPr id="13" name="title"/>
-          <p:cNvSpPr>
-            <a:spLocks noGrp="1"/>
-          </p:cNvSpPr>
-          <p:nvPr/>
-        </p:nvSpPr>
-        <p:spPr>
-          <a:xfrm>
-            <a:off x="640000" y="980000"/>
-            <a:ext cx="10600000" cy="1300000"/>
+          <p:cNvPr id="12" name="title"/>
+          <p:cNvSpPr>
+            <a:spLocks noGrp="1"/>
+          </p:cNvSpPr>
+          <p:nvPr/>
+        </p:nvSpPr>
+        <p:spPr>
+          <a:xfrm>
+            <a:off x="630000" y="1120000"/>
+            <a:ext cx="10800000" cy="1200000"/>
           </a:xfrm>
           <a:prstGeom prst="rect">
             <a:avLst/>
@@ -1183,11 +1126,11 @@
               </a:spcBef>
             </a:pPr>
             <a:r>
-              <a:rPr lang="en-US" sz="3200" b="1" dirty="0">
-                <a:solidFill>
-                  <a:srgbClr val="E9F1FF"/>
-                </a:solidFill>
-                <a:latin typeface="Segoe UI"/>
+              <a:rPr lang="en-US" sz="3000" b="1" dirty="0">
+                <a:solidFill>
+                  <a:srgbClr val="1B1B22"/>
+                </a:solidFill>
+                <a:latin typeface="Georgia"/>
               </a:rPr>
               <a:t>Everything normalizes into the CCO</a:t>
             </a:r>
@@ -1196,7 +1139,7 @@
       </p:sp>
       <p:sp>
         <p:nvSpPr>
-          <p:cNvPr id="14" name="body"/>
+          <p:cNvPr id="13" name="body"/>
           <p:cNvSpPr>
             <a:spLocks noGrp="1"/>
           </p:cNvSpPr>
@@ -1205,103 +1148,118 @@
         <p:spPr>
           <a:xfrm>
             <a:off x="700000" y="2650000"/>
-            <a:ext cx="10400000" cy="3600000"/>
-          </a:xfrm>
-          <a:prstGeom prst="rect">
-            <a:avLst/>
-          </a:prstGeom>
-        </p:spPr>
-        <p:txBody>
-          <a:bodyPr wrap="square" rtlCol="0">
-            <a:normAutofit/>
-          </a:bodyPr>
-          <a:lstStyle/>
-          <a:p>
-            <a:pPr marL="285750" indent="-285750">
-              <a:spcBef>
-                <a:spcPts val="700"/>
-              </a:spcBef>
-              <a:buFont typeface="Arial"/>
-              <a:buChar char="•"/>
-            </a:pPr>
-            <a:r>
-              <a:rPr lang="en-US" sz="1600" dirty="0">
-                <a:solidFill>
-                  <a:srgbClr val="9FB2CF"/>
-                </a:solidFill>
-                <a:latin typeface="Segoe UI"/>
+            <a:ext cx="10600000" cy="3400000"/>
+          </a:xfrm>
+          <a:prstGeom prst="rect">
+            <a:avLst/>
+          </a:prstGeom>
+        </p:spPr>
+        <p:txBody>
+          <a:bodyPr wrap="square" rtlCol="0">
+            <a:normAutofit/>
+          </a:bodyPr>
+          <a:lstStyle/>
+          <a:p>
+            <a:pPr marL="342900" indent="-342900">
+              <a:spcBef>
+                <a:spcPts val="760"/>
+              </a:spcBef>
+              <a:buClr>
+                <a:srgbClr val="8A1524"/>
+              </a:buClr>
+              <a:buFont typeface="Arial"/>
+              <a:buChar char="–"/>
+            </a:pPr>
+            <a:r>
+              <a:rPr lang="en-US" sz="1500" dirty="0">
+                <a:solidFill>
+                  <a:srgbClr val="3F3F4A"/>
+                </a:solidFill>
+                <a:latin typeface="Georgia"/>
               </a:rPr>
               <a:t>Structured EHR (FHIR/HL7) -&gt; labs, meds, problems (coded)</a:t>
             </a:r>
           </a:p>
           <a:p>
-            <a:pPr marL="285750" indent="-285750">
-              <a:spcBef>
-                <a:spcPts val="700"/>
-              </a:spcBef>
-              <a:buFont typeface="Arial"/>
-              <a:buChar char="•"/>
-            </a:pPr>
-            <a:r>
-              <a:rPr lang="en-US" sz="1600" dirty="0">
-                <a:solidFill>
-                  <a:srgbClr val="9FB2CF"/>
-                </a:solidFill>
-                <a:latin typeface="Segoe UI"/>
+            <a:pPr marL="342900" indent="-342900">
+              <a:spcBef>
+                <a:spcPts val="760"/>
+              </a:spcBef>
+              <a:buClr>
+                <a:srgbClr val="8A1524"/>
+              </a:buClr>
+              <a:buFont typeface="Arial"/>
+              <a:buChar char="–"/>
+            </a:pPr>
+            <a:r>
+              <a:rPr lang="en-US" sz="1500" dirty="0">
+                <a:solidFill>
+                  <a:srgbClr val="3F3F4A"/>
+                </a:solidFill>
+                <a:latin typeface="Georgia"/>
               </a:rPr>
               <a:t>Clinical notes -&gt; de-id, section parse, negation extraction</a:t>
             </a:r>
           </a:p>
           <a:p>
-            <a:pPr marL="285750" indent="-285750">
-              <a:spcBef>
-                <a:spcPts val="700"/>
-              </a:spcBef>
-              <a:buFont typeface="Arial"/>
-              <a:buChar char="•"/>
-            </a:pPr>
-            <a:r>
-              <a:rPr lang="en-US" sz="1600" dirty="0">
-                <a:solidFill>
-                  <a:srgbClr val="9FB2CF"/>
-                </a:solidFill>
-                <a:latin typeface="Segoe UI"/>
+            <a:pPr marL="342900" indent="-342900">
+              <a:spcBef>
+                <a:spcPts val="760"/>
+              </a:spcBef>
+              <a:buClr>
+                <a:srgbClr val="8A1524"/>
+              </a:buClr>
+              <a:buFont typeface="Arial"/>
+              <a:buChar char="–"/>
+            </a:pPr>
+            <a:r>
+              <a:rPr lang="en-US" sz="1500" dirty="0">
+                <a:solidFill>
+                  <a:srgbClr val="3F3F4A"/>
+                </a:solidFill>
+                <a:latin typeface="Georgia"/>
               </a:rPr>
               <a:t>Imaging (DICOM) -&gt; vision findings; raw pixels stay in enclave</a:t>
             </a:r>
           </a:p>
           <a:p>
-            <a:pPr marL="285750" indent="-285750">
-              <a:spcBef>
-                <a:spcPts val="700"/>
-              </a:spcBef>
-              <a:buFont typeface="Arial"/>
-              <a:buChar char="•"/>
-            </a:pPr>
-            <a:r>
-              <a:rPr lang="en-US" sz="1600" dirty="0">
-                <a:solidFill>
-                  <a:srgbClr val="9FB2CF"/>
-                </a:solidFill>
-                <a:latin typeface="Segoe UI"/>
+            <a:pPr marL="342900" indent="-342900">
+              <a:spcBef>
+                <a:spcPts val="760"/>
+              </a:spcBef>
+              <a:buClr>
+                <a:srgbClr val="8A1524"/>
+              </a:buClr>
+              <a:buFont typeface="Arial"/>
+              <a:buChar char="–"/>
+            </a:pPr>
+            <a:r>
+              <a:rPr lang="en-US" sz="1500" dirty="0">
+                <a:solidFill>
+                  <a:srgbClr val="3F3F4A"/>
+                </a:solidFill>
+                <a:latin typeface="Georgia"/>
               </a:rPr>
               <a:t>Pathology, genomics (VCF), ECG/waveform features</a:t>
             </a:r>
           </a:p>
           <a:p>
-            <a:pPr marL="285750" indent="-285750">
-              <a:spcBef>
-                <a:spcPts val="700"/>
-              </a:spcBef>
-              <a:buFont typeface="Arial"/>
-              <a:buChar char="•"/>
-            </a:pPr>
-            <a:r>
-              <a:rPr lang="en-US" sz="1600" dirty="0">
-                <a:solidFill>
-                  <a:srgbClr val="9FB2CF"/>
-                </a:solidFill>
-                <a:latin typeface="Segoe UI"/>
+            <a:pPr marL="342900" indent="-342900">
+              <a:spcBef>
+                <a:spcPts val="760"/>
+              </a:spcBef>
+              <a:buClr>
+                <a:srgbClr val="8A1524"/>
+              </a:buClr>
+              <a:buFont typeface="Arial"/>
+              <a:buChar char="–"/>
+            </a:pPr>
+            <a:r>
+              <a:rPr lang="en-US" sz="1500" dirty="0">
+                <a:solidFill>
+                  <a:srgbClr val="3F3F4A"/>
+                </a:solidFill>
+                <a:latin typeface="Georgia"/>
               </a:rPr>
               <a:t>De-identification at the boundary; reasoning never sees identifiers</a:t>
             </a:r>
@@ -1310,16 +1268,16 @@
       </p:sp>
       <p:sp>
         <p:nvSpPr>
-          <p:cNvPr id="15" name="footer"/>
-          <p:cNvSpPr>
-            <a:spLocks noGrp="1"/>
-          </p:cNvSpPr>
-          <p:nvPr/>
-        </p:nvSpPr>
-        <p:spPr>
-          <a:xfrm>
-            <a:off x="640000" y="6400000"/>
-            <a:ext cx="9000000" cy="380000"/>
+          <p:cNvPr id="14" name="footer"/>
+          <p:cNvSpPr>
+            <a:spLocks noGrp="1"/>
+          </p:cNvSpPr>
+          <p:nvPr/>
+        </p:nvSpPr>
+        <p:spPr>
+          <a:xfrm>
+            <a:off x="640000" y="6420000"/>
+            <a:ext cx="10000000" cy="360000"/>
           </a:xfrm>
           <a:prstGeom prst="rect">
             <a:avLst/>
@@ -1337,13 +1295,13 @@
               </a:spcBef>
             </a:pPr>
             <a:r>
-              <a:rPr lang="en-US" sz="1000" dirty="0">
-                <a:solidFill>
-                  <a:srgbClr val="65799A"/>
+              <a:rPr lang="en-US" sz="950" dirty="0">
+                <a:solidFill>
+                  <a:srgbClr val="8A8A96"/>
                 </a:solidFill>
                 <a:latin typeface="Consolas"/>
               </a:rPr>
-              <a:t>MedJar  ·  12 / 18  ·  assistive decision-support — not autonomous</a:t>
+              <a:t>MedJar   ·   12 / 18   ·   assistive decision-support, not an autonomous device</a:t>
             </a:r>
           </a:p>
         </p:txBody>
@@ -1362,7 +1320,7 @@
     <p:bg>
       <p:bgPr>
         <a:solidFill>
-          <a:srgbClr val="070B14"/>
+          <a:srgbClr val="F6F4EE"/>
         </a:solidFill>
         <a:effectLst/>
       </p:bgPr>
@@ -1383,14 +1341,14 @@
       </p:grpSpPr>
       <p:sp>
         <p:nvSpPr>
-          <p:cNvPr id="10" name="accent"/>
+          <p:cNvPr id="10" name="rule"/>
           <p:cNvSpPr/>
           <p:nvPr/>
         </p:nvSpPr>
         <p:spPr>
           <a:xfrm>
-            <a:off x="0" y="0"/>
-            <a:ext cx="12192000" cy="68580"/>
+            <a:off x="640000" y="1030000"/>
+            <a:ext cx="620000" cy="34000"/>
           </a:xfrm>
           <a:prstGeom prst="roundRect">
             <a:avLst>
@@ -1398,7 +1356,7 @@
             </a:avLst>
           </a:prstGeom>
           <a:solidFill>
-            <a:srgbClr val="2FE0C8"/>
+            <a:srgbClr val="8A1524"/>
           </a:solidFill>
           <a:ln>
             <a:noFill/>
@@ -1412,45 +1370,16 @@
       </p:sp>
       <p:sp>
         <p:nvSpPr>
-          <p:cNvPr id="11" name="sidebar"/>
-          <p:cNvSpPr/>
-          <p:nvPr/>
-        </p:nvSpPr>
-        <p:spPr>
-          <a:xfrm>
-            <a:off x="11330000" y="500000"/>
-            <a:ext cx="45720" cy="5800000"/>
-          </a:xfrm>
-          <a:prstGeom prst="roundRect">
-            <a:avLst>
-              <a:gd name="adj" fmla="val 6000"/>
-            </a:avLst>
-          </a:prstGeom>
-          <a:solidFill>
-            <a:srgbClr val="4C8DFF"/>
-          </a:solidFill>
-          <a:ln>
-            <a:noFill/>
-          </a:ln>
-        </p:spPr>
-        <p:txBody>
-          <a:bodyPr/>
-          <a:lstStyle/>
-          <a:p/>
-        </p:txBody>
-      </p:sp>
-      <p:sp>
-        <p:nvSpPr>
-          <p:cNvPr id="12" name="kicker"/>
-          <p:cNvSpPr>
-            <a:spLocks noGrp="1"/>
-          </p:cNvSpPr>
-          <p:nvPr/>
-        </p:nvSpPr>
-        <p:spPr>
-          <a:xfrm>
-            <a:off x="640000" y="520000"/>
-            <a:ext cx="9000000" cy="500000"/>
+          <p:cNvPr id="11" name="kicker"/>
+          <p:cNvSpPr>
+            <a:spLocks noGrp="1"/>
+          </p:cNvSpPr>
+          <p:nvPr/>
+        </p:nvSpPr>
+        <p:spPr>
+          <a:xfrm>
+            <a:off x="640000" y="540000"/>
+            <a:ext cx="10000000" cy="460000"/>
           </a:xfrm>
           <a:prstGeom prst="rect">
             <a:avLst/>
@@ -1468,9 +1397,9 @@
               </a:spcBef>
             </a:pPr>
             <a:r>
-              <a:rPr lang="en-US" sz="1300" b="1" dirty="0">
-                <a:solidFill>
-                  <a:srgbClr val="2FE0C8"/>
+              <a:rPr lang="en-US" sz="1150" b="1" dirty="0">
+                <a:solidFill>
+                  <a:srgbClr val="8A1524"/>
                 </a:solidFill>
                 <a:latin typeface="Consolas"/>
               </a:rPr>
@@ -1481,16 +1410,16 @@
       </p:sp>
       <p:sp>
         <p:nvSpPr>
-          <p:cNvPr id="13" name="title"/>
-          <p:cNvSpPr>
-            <a:spLocks noGrp="1"/>
-          </p:cNvSpPr>
-          <p:nvPr/>
-        </p:nvSpPr>
-        <p:spPr>
-          <a:xfrm>
-            <a:off x="640000" y="980000"/>
-            <a:ext cx="10600000" cy="1300000"/>
+          <p:cNvPr id="12" name="title"/>
+          <p:cNvSpPr>
+            <a:spLocks noGrp="1"/>
+          </p:cNvSpPr>
+          <p:nvPr/>
+        </p:nvSpPr>
+        <p:spPr>
+          <a:xfrm>
+            <a:off x="630000" y="1120000"/>
+            <a:ext cx="10800000" cy="1200000"/>
           </a:xfrm>
           <a:prstGeom prst="rect">
             <a:avLst/>
@@ -1508,11 +1437,11 @@
               </a:spcBef>
             </a:pPr>
             <a:r>
-              <a:rPr lang="en-US" sz="3200" b="1" dirty="0">
-                <a:solidFill>
-                  <a:srgbClr val="E9F1FF"/>
-                </a:solidFill>
-                <a:latin typeface="Segoe UI"/>
+              <a:rPr lang="en-US" sz="3000" b="1" dirty="0">
+                <a:solidFill>
+                  <a:srgbClr val="1B1B22"/>
+                </a:solidFill>
+                <a:latin typeface="Georgia"/>
               </a:rPr>
               <a:t>Leads with uncertainty, not a bare answer</a:t>
             </a:r>
@@ -1521,7 +1450,7 @@
       </p:sp>
       <p:sp>
         <p:nvSpPr>
-          <p:cNvPr id="14" name="body"/>
+          <p:cNvPr id="13" name="body"/>
           <p:cNvSpPr>
             <a:spLocks noGrp="1"/>
           </p:cNvSpPr>
@@ -1530,103 +1459,118 @@
         <p:spPr>
           <a:xfrm>
             <a:off x="700000" y="2650000"/>
-            <a:ext cx="10400000" cy="3600000"/>
-          </a:xfrm>
-          <a:prstGeom prst="rect">
-            <a:avLst/>
-          </a:prstGeom>
-        </p:spPr>
-        <p:txBody>
-          <a:bodyPr wrap="square" rtlCol="0">
-            <a:normAutofit/>
-          </a:bodyPr>
-          <a:lstStyle/>
-          <a:p>
-            <a:pPr marL="285750" indent="-285750">
-              <a:spcBef>
-                <a:spcPts val="700"/>
-              </a:spcBef>
-              <a:buFont typeface="Arial"/>
-              <a:buChar char="•"/>
-            </a:pPr>
-            <a:r>
-              <a:rPr lang="en-US" sz="1600" dirty="0">
-                <a:solidFill>
-                  <a:srgbClr val="9FB2CF"/>
-                </a:solidFill>
-                <a:latin typeface="Segoe UI"/>
+            <a:ext cx="10600000" cy="3400000"/>
+          </a:xfrm>
+          <a:prstGeom prst="rect">
+            <a:avLst/>
+          </a:prstGeom>
+        </p:spPr>
+        <p:txBody>
+          <a:bodyPr wrap="square" rtlCol="0">
+            <a:normAutofit/>
+          </a:bodyPr>
+          <a:lstStyle/>
+          <a:p>
+            <a:pPr marL="342900" indent="-342900">
+              <a:spcBef>
+                <a:spcPts val="760"/>
+              </a:spcBef>
+              <a:buClr>
+                <a:srgbClr val="8A1524"/>
+              </a:buClr>
+              <a:buFont typeface="Arial"/>
+              <a:buChar char="–"/>
+            </a:pPr>
+            <a:r>
+              <a:rPr lang="en-US" sz="1500" dirty="0">
+                <a:solidFill>
+                  <a:srgbClr val="3F3F4A"/>
+                </a:solidFill>
+                <a:latin typeface="Georgia"/>
               </a:rPr>
               <a:t>Ranked differential: calibrated S*(h) + cited for/against evidence</a:t>
             </a:r>
           </a:p>
           <a:p>
-            <a:pPr marL="285750" indent="-285750">
-              <a:spcBef>
-                <a:spcPts val="700"/>
-              </a:spcBef>
-              <a:buFont typeface="Arial"/>
-              <a:buChar char="•"/>
-            </a:pPr>
-            <a:r>
-              <a:rPr lang="en-US" sz="1600" dirty="0">
-                <a:solidFill>
-                  <a:srgbClr val="9FB2CF"/>
-                </a:solidFill>
-                <a:latin typeface="Segoe UI"/>
+            <a:pPr marL="342900" indent="-342900">
+              <a:spcBef>
+                <a:spcPts val="760"/>
+              </a:spcBef>
+              <a:buClr>
+                <a:srgbClr val="8A1524"/>
+              </a:buClr>
+              <a:buFont typeface="Arial"/>
+              <a:buChar char="–"/>
+            </a:pPr>
+            <a:r>
+              <a:rPr lang="en-US" sz="1500" dirty="0">
+                <a:solidFill>
+                  <a:srgbClr val="3F3F4A"/>
+                </a:solidFill>
+                <a:latin typeface="Georgia"/>
               </a:rPr>
               <a:t>Discriminating next test per hypothesis</a:t>
             </a:r>
           </a:p>
           <a:p>
-            <a:pPr marL="285750" indent="-285750">
-              <a:spcBef>
-                <a:spcPts val="700"/>
-              </a:spcBef>
-              <a:buFont typeface="Arial"/>
-              <a:buChar char="•"/>
-            </a:pPr>
-            <a:r>
-              <a:rPr lang="en-US" sz="1600" dirty="0">
-                <a:solidFill>
-                  <a:srgbClr val="9FB2CF"/>
-                </a:solidFill>
-                <a:latin typeface="Segoe UI"/>
+            <a:pPr marL="342900" indent="-342900">
+              <a:spcBef>
+                <a:spcPts val="760"/>
+              </a:spcBef>
+              <a:buClr>
+                <a:srgbClr val="8A1524"/>
+              </a:buClr>
+              <a:buFont typeface="Arial"/>
+              <a:buChar char="–"/>
+            </a:pPr>
+            <a:r>
+              <a:rPr lang="en-US" sz="1500" dirty="0">
+                <a:solidFill>
+                  <a:srgbClr val="3F3F4A"/>
+                </a:solidFill>
+                <a:latin typeface="Georgia"/>
               </a:rPr>
               <a:t>Red-flag panel: excluded / needs work-up</a:t>
             </a:r>
           </a:p>
           <a:p>
-            <a:pPr marL="285750" indent="-285750">
-              <a:spcBef>
-                <a:spcPts val="700"/>
-              </a:spcBef>
-              <a:buFont typeface="Arial"/>
-              <a:buChar char="•"/>
-            </a:pPr>
-            <a:r>
-              <a:rPr lang="en-US" sz="1600" dirty="0">
-                <a:solidFill>
-                  <a:srgbClr val="9FB2CF"/>
-                </a:solidFill>
-                <a:latin typeface="Segoe UI"/>
+            <a:pPr marL="342900" indent="-342900">
+              <a:spcBef>
+                <a:spcPts val="760"/>
+              </a:spcBef>
+              <a:buClr>
+                <a:srgbClr val="8A1524"/>
+              </a:buClr>
+              <a:buFont typeface="Arial"/>
+              <a:buChar char="–"/>
+            </a:pPr>
+            <a:r>
+              <a:rPr lang="en-US" sz="1500" dirty="0">
+                <a:solidFill>
+                  <a:srgbClr val="3F3F4A"/>
+                </a:solidFill>
+                <a:latin typeface="Georgia"/>
               </a:rPr>
               <a:t>Points of disagreement — never hidden</a:t>
             </a:r>
           </a:p>
           <a:p>
-            <a:pPr marL="285750" indent="-285750">
-              <a:spcBef>
-                <a:spcPts val="700"/>
-              </a:spcBef>
-              <a:buFont typeface="Arial"/>
-              <a:buChar char="•"/>
-            </a:pPr>
-            <a:r>
-              <a:rPr lang="en-US" sz="1600" dirty="0">
-                <a:solidFill>
-                  <a:srgbClr val="9FB2CF"/>
-                </a:solidFill>
-                <a:latin typeface="Segoe UI"/>
+            <a:pPr marL="342900" indent="-342900">
+              <a:spcBef>
+                <a:spcPts val="760"/>
+              </a:spcBef>
+              <a:buClr>
+                <a:srgbClr val="8A1524"/>
+              </a:buClr>
+              <a:buFont typeface="Arial"/>
+              <a:buChar char="–"/>
+            </a:pPr>
+            <a:r>
+              <a:rPr lang="en-US" sz="1500" dirty="0">
+                <a:solidFill>
+                  <a:srgbClr val="3F3F4A"/>
+                </a:solidFill>
+                <a:latin typeface="Georgia"/>
               </a:rPr>
               <a:t>Confidence &amp; status (converged vs escalated) + full audit trail</a:t>
             </a:r>
@@ -1635,16 +1579,16 @@
       </p:sp>
       <p:sp>
         <p:nvSpPr>
-          <p:cNvPr id="15" name="footer"/>
-          <p:cNvSpPr>
-            <a:spLocks noGrp="1"/>
-          </p:cNvSpPr>
-          <p:nvPr/>
-        </p:nvSpPr>
-        <p:spPr>
-          <a:xfrm>
-            <a:off x="640000" y="6400000"/>
-            <a:ext cx="9000000" cy="380000"/>
+          <p:cNvPr id="14" name="footer"/>
+          <p:cNvSpPr>
+            <a:spLocks noGrp="1"/>
+          </p:cNvSpPr>
+          <p:nvPr/>
+        </p:nvSpPr>
+        <p:spPr>
+          <a:xfrm>
+            <a:off x="640000" y="6420000"/>
+            <a:ext cx="10000000" cy="360000"/>
           </a:xfrm>
           <a:prstGeom prst="rect">
             <a:avLst/>
@@ -1662,13 +1606,13 @@
               </a:spcBef>
             </a:pPr>
             <a:r>
-              <a:rPr lang="en-US" sz="1000" dirty="0">
-                <a:solidFill>
-                  <a:srgbClr val="65799A"/>
+              <a:rPr lang="en-US" sz="950" dirty="0">
+                <a:solidFill>
+                  <a:srgbClr val="8A8A96"/>
                 </a:solidFill>
                 <a:latin typeface="Consolas"/>
               </a:rPr>
-              <a:t>MedJar  ·  13 / 18  ·  assistive decision-support — not autonomous</a:t>
+              <a:t>MedJar   ·   13 / 18   ·   assistive decision-support, not an autonomous device</a:t>
             </a:r>
           </a:p>
         </p:txBody>
@@ -1687,7 +1631,7 @@
     <p:bg>
       <p:bgPr>
         <a:solidFill>
-          <a:srgbClr val="070B14"/>
+          <a:srgbClr val="F6F4EE"/>
         </a:solidFill>
         <a:effectLst/>
       </p:bgPr>
@@ -1708,14 +1652,14 @@
       </p:grpSpPr>
       <p:sp>
         <p:nvSpPr>
-          <p:cNvPr id="10" name="accent"/>
+          <p:cNvPr id="10" name="rule"/>
           <p:cNvSpPr/>
           <p:nvPr/>
         </p:nvSpPr>
         <p:spPr>
           <a:xfrm>
-            <a:off x="0" y="0"/>
-            <a:ext cx="12192000" cy="68580"/>
+            <a:off x="640000" y="1030000"/>
+            <a:ext cx="620000" cy="34000"/>
           </a:xfrm>
           <a:prstGeom prst="roundRect">
             <a:avLst>
@@ -1723,7 +1667,7 @@
             </a:avLst>
           </a:prstGeom>
           <a:solidFill>
-            <a:srgbClr val="2FE0C8"/>
+            <a:srgbClr val="8A1524"/>
           </a:solidFill>
           <a:ln>
             <a:noFill/>
@@ -1737,45 +1681,16 @@
       </p:sp>
       <p:sp>
         <p:nvSpPr>
-          <p:cNvPr id="11" name="sidebar"/>
-          <p:cNvSpPr/>
-          <p:nvPr/>
-        </p:nvSpPr>
-        <p:spPr>
-          <a:xfrm>
-            <a:off x="11330000" y="500000"/>
-            <a:ext cx="45720" cy="5800000"/>
-          </a:xfrm>
-          <a:prstGeom prst="roundRect">
-            <a:avLst>
-              <a:gd name="adj" fmla="val 6000"/>
-            </a:avLst>
-          </a:prstGeom>
-          <a:solidFill>
-            <a:srgbClr val="4C8DFF"/>
-          </a:solidFill>
-          <a:ln>
-            <a:noFill/>
-          </a:ln>
-        </p:spPr>
-        <p:txBody>
-          <a:bodyPr/>
-          <a:lstStyle/>
-          <a:p/>
-        </p:txBody>
-      </p:sp>
-      <p:sp>
-        <p:nvSpPr>
-          <p:cNvPr id="12" name="kicker"/>
-          <p:cNvSpPr>
-            <a:spLocks noGrp="1"/>
-          </p:cNvSpPr>
-          <p:nvPr/>
-        </p:nvSpPr>
-        <p:spPr>
-          <a:xfrm>
-            <a:off x="640000" y="520000"/>
-            <a:ext cx="9000000" cy="500000"/>
+          <p:cNvPr id="11" name="kicker"/>
+          <p:cNvSpPr>
+            <a:spLocks noGrp="1"/>
+          </p:cNvSpPr>
+          <p:nvPr/>
+        </p:nvSpPr>
+        <p:spPr>
+          <a:xfrm>
+            <a:off x="640000" y="540000"/>
+            <a:ext cx="10000000" cy="460000"/>
           </a:xfrm>
           <a:prstGeom prst="rect">
             <a:avLst/>
@@ -1793,9 +1708,9 @@
               </a:spcBef>
             </a:pPr>
             <a:r>
-              <a:rPr lang="en-US" sz="1300" b="1" dirty="0">
-                <a:solidFill>
-                  <a:srgbClr val="2FE0C8"/>
+              <a:rPr lang="en-US" sz="1150" b="1" dirty="0">
+                <a:solidFill>
+                  <a:srgbClr val="8A1524"/>
                 </a:solidFill>
                 <a:latin typeface="Consolas"/>
               </a:rPr>
@@ -1806,16 +1721,16 @@
       </p:sp>
       <p:sp>
         <p:nvSpPr>
-          <p:cNvPr id="13" name="title"/>
-          <p:cNvSpPr>
-            <a:spLocks noGrp="1"/>
-          </p:cNvSpPr>
-          <p:nvPr/>
-        </p:nvSpPr>
-        <p:spPr>
-          <a:xfrm>
-            <a:off x="640000" y="980000"/>
-            <a:ext cx="10600000" cy="1300000"/>
+          <p:cNvPr id="12" name="title"/>
+          <p:cNvSpPr>
+            <a:spLocks noGrp="1"/>
+          </p:cNvSpPr>
+          <p:nvPr/>
+        </p:nvSpPr>
+        <p:spPr>
+          <a:xfrm>
+            <a:off x="630000" y="1120000"/>
+            <a:ext cx="10800000" cy="1200000"/>
           </a:xfrm>
           <a:prstGeom prst="rect">
             <a:avLst/>
@@ -1833,11 +1748,11 @@
               </a:spcBef>
             </a:pPr>
             <a:r>
-              <a:rPr lang="en-US" sz="3200" b="1" dirty="0">
-                <a:solidFill>
-                  <a:srgbClr val="E9F1FF"/>
-                </a:solidFill>
-                <a:latin typeface="Segoe UI"/>
+              <a:rPr lang="en-US" sz="3000" b="1" dirty="0">
+                <a:solidFill>
+                  <a:srgbClr val="1B1B22"/>
+                </a:solidFill>
+                <a:latin typeface="Georgia"/>
               </a:rPr>
               <a:t>58 y/o: dyspnea, weight loss, RUL nodule, up-troponin, effusion</a:t>
             </a:r>
@@ -1846,7 +1761,7 @@
       </p:sp>
       <p:sp>
         <p:nvSpPr>
-          <p:cNvPr id="14" name="body"/>
+          <p:cNvPr id="13" name="body"/>
           <p:cNvSpPr>
             <a:spLocks noGrp="1"/>
           </p:cNvSpPr>
@@ -1855,103 +1770,118 @@
         <p:spPr>
           <a:xfrm>
             <a:off x="700000" y="2650000"/>
-            <a:ext cx="10400000" cy="3600000"/>
-          </a:xfrm>
-          <a:prstGeom prst="rect">
-            <a:avLst/>
-          </a:prstGeom>
-        </p:spPr>
-        <p:txBody>
-          <a:bodyPr wrap="square" rtlCol="0">
-            <a:normAutofit/>
-          </a:bodyPr>
-          <a:lstStyle/>
-          <a:p>
-            <a:pPr marL="285750" indent="-285750">
-              <a:spcBef>
-                <a:spcPts val="700"/>
-              </a:spcBef>
-              <a:buFont typeface="Arial"/>
-              <a:buChar char="•"/>
-            </a:pPr>
-            <a:r>
-              <a:rPr lang="en-US" sz="1600" dirty="0">
-                <a:solidFill>
-                  <a:srgbClr val="9FB2CF"/>
-                </a:solidFill>
-                <a:latin typeface="Segoe UI"/>
+            <a:ext cx="10600000" cy="3400000"/>
+          </a:xfrm>
+          <a:prstGeom prst="rect">
+            <a:avLst/>
+          </a:prstGeom>
+        </p:spPr>
+        <p:txBody>
+          <a:bodyPr wrap="square" rtlCol="0">
+            <a:normAutofit/>
+          </a:bodyPr>
+          <a:lstStyle/>
+          <a:p>
+            <a:pPr marL="342900" indent="-342900">
+              <a:spcBef>
+                <a:spcPts val="760"/>
+              </a:spcBef>
+              <a:buClr>
+                <a:srgbClr val="8A1524"/>
+              </a:buClr>
+              <a:buFont typeface="Arial"/>
+              <a:buChar char="–"/>
+            </a:pPr>
+            <a:r>
+              <a:rPr lang="en-US" sz="1500" dirty="0">
+                <a:solidFill>
+                  <a:srgbClr val="3F3F4A"/>
+                </a:solidFill>
+                <a:latin typeface="Georgia"/>
               </a:rPr>
               <a:t>Radiologist: spiculated nodule -&gt; primary lung malignancy; PET-CT+biopsy</a:t>
             </a:r>
           </a:p>
           <a:p>
-            <a:pPr marL="285750" indent="-285750">
-              <a:spcBef>
-                <a:spcPts val="700"/>
-              </a:spcBef>
-              <a:buFont typeface="Arial"/>
-              <a:buChar char="•"/>
-            </a:pPr>
-            <a:r>
-              <a:rPr lang="en-US" sz="1600" dirty="0">
-                <a:solidFill>
-                  <a:srgbClr val="9FB2CF"/>
-                </a:solidFill>
-                <a:latin typeface="Segoe UI"/>
+            <a:pPr marL="342900" indent="-342900">
+              <a:spcBef>
+                <a:spcPts val="760"/>
+              </a:spcBef>
+              <a:buClr>
+                <a:srgbClr val="8A1524"/>
+              </a:buClr>
+              <a:buFont typeface="Arial"/>
+              <a:buChar char="–"/>
+            </a:pPr>
+            <a:r>
+              <a:rPr lang="en-US" sz="1500" dirty="0">
+                <a:solidFill>
+                  <a:srgbClr val="3F3F4A"/>
+                </a:solidFill>
+                <a:latin typeface="Georgia"/>
               </a:rPr>
               <a:t>Cardiologist: up-troponin + effusion -&gt; exclude ACS &amp; tamponade</a:t>
             </a:r>
           </a:p>
           <a:p>
-            <a:pPr marL="285750" indent="-285750">
-              <a:spcBef>
-                <a:spcPts val="700"/>
-              </a:spcBef>
-              <a:buFont typeface="Arial"/>
-              <a:buChar char="•"/>
-            </a:pPr>
-            <a:r>
-              <a:rPr lang="en-US" sz="1600" dirty="0">
-                <a:solidFill>
-                  <a:srgbClr val="9FB2CF"/>
-                </a:solidFill>
-                <a:latin typeface="Segoe UI"/>
+            <a:pPr marL="342900" indent="-342900">
+              <a:spcBef>
+                <a:spcPts val="760"/>
+              </a:spcBef>
+              <a:buClr>
+                <a:srgbClr val="8A1524"/>
+              </a:buClr>
+              <a:buFont typeface="Arial"/>
+              <a:buChar char="–"/>
+            </a:pPr>
+            <a:r>
+              <a:rPr lang="en-US" sz="1500" dirty="0">
+                <a:solidFill>
+                  <a:srgbClr val="3F3F4A"/>
+                </a:solidFill>
+                <a:latin typeface="Georgia"/>
               </a:rPr>
               <a:t>Oncologist: malignant effusion would upstage — needs cytology</a:t>
             </a:r>
           </a:p>
           <a:p>
-            <a:pPr marL="285750" indent="-285750">
-              <a:spcBef>
-                <a:spcPts val="700"/>
-              </a:spcBef>
-              <a:buFont typeface="Arial"/>
-              <a:buChar char="•"/>
-            </a:pPr>
-            <a:r>
-              <a:rPr lang="en-US" sz="1600" dirty="0">
-                <a:solidFill>
-                  <a:srgbClr val="9FB2CF"/>
-                </a:solidFill>
-                <a:latin typeface="Segoe UI"/>
+            <a:pPr marL="342900" indent="-342900">
+              <a:spcBef>
+                <a:spcPts val="760"/>
+              </a:spcBef>
+              <a:buClr>
+                <a:srgbClr val="8A1524"/>
+              </a:buClr>
+              <a:buFont typeface="Arial"/>
+              <a:buChar char="–"/>
+            </a:pPr>
+            <a:r>
+              <a:rPr lang="en-US" sz="1500" dirty="0">
+                <a:solidFill>
+                  <a:srgbClr val="3F3F4A"/>
+                </a:solidFill>
+                <a:latin typeface="Georgia"/>
               </a:rPr>
               <a:t>Resolves: tissue + effusion cytology are the discriminating tests</a:t>
             </a:r>
           </a:p>
           <a:p>
-            <a:pPr marL="285750" indent="-285750">
-              <a:spcBef>
-                <a:spcPts val="700"/>
-              </a:spcBef>
-              <a:buFont typeface="Arial"/>
-              <a:buChar char="•"/>
-            </a:pPr>
-            <a:r>
-              <a:rPr lang="en-US" sz="1600" dirty="0">
-                <a:solidFill>
-                  <a:srgbClr val="9FB2CF"/>
-                </a:solidFill>
-                <a:latin typeface="Segoe UI"/>
+            <a:pPr marL="342900" indent="-342900">
+              <a:spcBef>
+                <a:spcPts val="760"/>
+              </a:spcBef>
+              <a:buClr>
+                <a:srgbClr val="8A1524"/>
+              </a:buClr>
+              <a:buFont typeface="Arial"/>
+              <a:buChar char="–"/>
+            </a:pPr>
+            <a:r>
+              <a:rPr lang="en-US" sz="1500" dirty="0">
+                <a:solidFill>
+                  <a:srgbClr val="3F3F4A"/>
+                </a:solidFill>
+                <a:latin typeface="Georgia"/>
               </a:rPr>
               <a:t>RED-FLAG: tamponade -&gt; escalate with explicit open question</a:t>
             </a:r>
@@ -1960,16 +1890,16 @@
       </p:sp>
       <p:sp>
         <p:nvSpPr>
-          <p:cNvPr id="15" name="footer"/>
-          <p:cNvSpPr>
-            <a:spLocks noGrp="1"/>
-          </p:cNvSpPr>
-          <p:nvPr/>
-        </p:nvSpPr>
-        <p:spPr>
-          <a:xfrm>
-            <a:off x="640000" y="6400000"/>
-            <a:ext cx="9000000" cy="380000"/>
+          <p:cNvPr id="14" name="footer"/>
+          <p:cNvSpPr>
+            <a:spLocks noGrp="1"/>
+          </p:cNvSpPr>
+          <p:nvPr/>
+        </p:nvSpPr>
+        <p:spPr>
+          <a:xfrm>
+            <a:off x="640000" y="6420000"/>
+            <a:ext cx="10000000" cy="360000"/>
           </a:xfrm>
           <a:prstGeom prst="rect">
             <a:avLst/>
@@ -1987,13 +1917,13 @@
               </a:spcBef>
             </a:pPr>
             <a:r>
-              <a:rPr lang="en-US" sz="1000" dirty="0">
-                <a:solidFill>
-                  <a:srgbClr val="65799A"/>
+              <a:rPr lang="en-US" sz="950" dirty="0">
+                <a:solidFill>
+                  <a:srgbClr val="8A8A96"/>
                 </a:solidFill>
                 <a:latin typeface="Consolas"/>
               </a:rPr>
-              <a:t>MedJar  ·  14 / 18  ·  assistive decision-support — not autonomous</a:t>
+              <a:t>MedJar   ·   14 / 18   ·   assistive decision-support, not an autonomous device</a:t>
             </a:r>
           </a:p>
         </p:txBody>
@@ -2012,7 +1942,7 @@
     <p:bg>
       <p:bgPr>
         <a:solidFill>
-          <a:srgbClr val="070B14"/>
+          <a:srgbClr val="F6F4EE"/>
         </a:solidFill>
         <a:effectLst/>
       </p:bgPr>
@@ -2033,14 +1963,14 @@
       </p:grpSpPr>
       <p:sp>
         <p:nvSpPr>
-          <p:cNvPr id="10" name="accent"/>
+          <p:cNvPr id="10" name="rule"/>
           <p:cNvSpPr/>
           <p:nvPr/>
         </p:nvSpPr>
         <p:spPr>
           <a:xfrm>
-            <a:off x="0" y="0"/>
-            <a:ext cx="12192000" cy="68580"/>
+            <a:off x="640000" y="1030000"/>
+            <a:ext cx="620000" cy="34000"/>
           </a:xfrm>
           <a:prstGeom prst="roundRect">
             <a:avLst>
@@ -2048,7 +1978,7 @@
             </a:avLst>
           </a:prstGeom>
           <a:solidFill>
-            <a:srgbClr val="2FE0C8"/>
+            <a:srgbClr val="8A1524"/>
           </a:solidFill>
           <a:ln>
             <a:noFill/>
@@ -2062,45 +1992,16 @@
       </p:sp>
       <p:sp>
         <p:nvSpPr>
-          <p:cNvPr id="11" name="sidebar"/>
-          <p:cNvSpPr/>
-          <p:nvPr/>
-        </p:nvSpPr>
-        <p:spPr>
-          <a:xfrm>
-            <a:off x="11330000" y="500000"/>
-            <a:ext cx="45720" cy="5800000"/>
-          </a:xfrm>
-          <a:prstGeom prst="roundRect">
-            <a:avLst>
-              <a:gd name="adj" fmla="val 6000"/>
-            </a:avLst>
-          </a:prstGeom>
-          <a:solidFill>
-            <a:srgbClr val="4C8DFF"/>
-          </a:solidFill>
-          <a:ln>
-            <a:noFill/>
-          </a:ln>
-        </p:spPr>
-        <p:txBody>
-          <a:bodyPr/>
-          <a:lstStyle/>
-          <a:p/>
-        </p:txBody>
-      </p:sp>
-      <p:sp>
-        <p:nvSpPr>
-          <p:cNvPr id="12" name="kicker"/>
-          <p:cNvSpPr>
-            <a:spLocks noGrp="1"/>
-          </p:cNvSpPr>
-          <p:nvPr/>
-        </p:nvSpPr>
-        <p:spPr>
-          <a:xfrm>
-            <a:off x="640000" y="520000"/>
-            <a:ext cx="9000000" cy="500000"/>
+          <p:cNvPr id="11" name="kicker"/>
+          <p:cNvSpPr>
+            <a:spLocks noGrp="1"/>
+          </p:cNvSpPr>
+          <p:nvPr/>
+        </p:nvSpPr>
+        <p:spPr>
+          <a:xfrm>
+            <a:off x="640000" y="540000"/>
+            <a:ext cx="10000000" cy="460000"/>
           </a:xfrm>
           <a:prstGeom prst="rect">
             <a:avLst/>
@@ -2118,9 +2019,9 @@
               </a:spcBef>
             </a:pPr>
             <a:r>
-              <a:rPr lang="en-US" sz="1300" b="1" dirty="0">
-                <a:solidFill>
-                  <a:srgbClr val="2FE0C8"/>
+              <a:rPr lang="en-US" sz="1150" b="1" dirty="0">
+                <a:solidFill>
+                  <a:srgbClr val="8A1524"/>
                 </a:solidFill>
                 <a:latin typeface="Consolas"/>
               </a:rPr>
@@ -2131,16 +2032,16 @@
       </p:sp>
       <p:sp>
         <p:nvSpPr>
-          <p:cNvPr id="13" name="title"/>
-          <p:cNvSpPr>
-            <a:spLocks noGrp="1"/>
-          </p:cNvSpPr>
-          <p:nvPr/>
-        </p:nvSpPr>
-        <p:spPr>
-          <a:xfrm>
-            <a:off x="640000" y="980000"/>
-            <a:ext cx="10600000" cy="1300000"/>
+          <p:cNvPr id="12" name="title"/>
+          <p:cNvSpPr>
+            <a:spLocks noGrp="1"/>
+          </p:cNvSpPr>
+          <p:nvPr/>
+        </p:nvSpPr>
+        <p:spPr>
+          <a:xfrm>
+            <a:off x="630000" y="1120000"/>
+            <a:ext cx="10800000" cy="1200000"/>
           </a:xfrm>
           <a:prstGeom prst="rect">
             <a:avLst/>
@@ -2158,11 +2059,11 @@
               </a:spcBef>
             </a:pPr>
             <a:r>
-              <a:rPr lang="en-US" sz="3200" b="1" dirty="0">
-                <a:solidFill>
-                  <a:srgbClr val="E9F1FF"/>
-                </a:solidFill>
-                <a:latin typeface="Segoe UI"/>
+              <a:rPr lang="en-US" sz="3000" b="1" dirty="0">
+                <a:solidFill>
+                  <a:srgbClr val="1B1B22"/>
+                </a:solidFill>
+                <a:latin typeface="Georgia"/>
               </a:rPr>
               <a:t>Judged as decision-support, not a quiz-taker</a:t>
             </a:r>
@@ -2171,7 +2072,7 @@
       </p:sp>
       <p:sp>
         <p:nvSpPr>
-          <p:cNvPr id="14" name="body"/>
+          <p:cNvPr id="13" name="body"/>
           <p:cNvSpPr>
             <a:spLocks noGrp="1"/>
           </p:cNvSpPr>
@@ -2180,103 +2081,118 @@
         <p:spPr>
           <a:xfrm>
             <a:off x="700000" y="2650000"/>
-            <a:ext cx="10400000" cy="3600000"/>
-          </a:xfrm>
-          <a:prstGeom prst="rect">
-            <a:avLst/>
-          </a:prstGeom>
-        </p:spPr>
-        <p:txBody>
-          <a:bodyPr wrap="square" rtlCol="0">
-            <a:normAutofit/>
-          </a:bodyPr>
-          <a:lstStyle/>
-          <a:p>
-            <a:pPr marL="285750" indent="-285750">
-              <a:spcBef>
-                <a:spcPts val="700"/>
-              </a:spcBef>
-              <a:buFont typeface="Arial"/>
-              <a:buChar char="•"/>
-            </a:pPr>
-            <a:r>
-              <a:rPr lang="en-US" sz="1600" dirty="0">
-                <a:solidFill>
-                  <a:srgbClr val="9FB2CF"/>
-                </a:solidFill>
-                <a:latin typeface="Segoe UI"/>
+            <a:ext cx="10600000" cy="3400000"/>
+          </a:xfrm>
+          <a:prstGeom prst="rect">
+            <a:avLst/>
+          </a:prstGeom>
+        </p:spPr>
+        <p:txBody>
+          <a:bodyPr wrap="square" rtlCol="0">
+            <a:normAutofit/>
+          </a:bodyPr>
+          <a:lstStyle/>
+          <a:p>
+            <a:pPr marL="342900" indent="-342900">
+              <a:spcBef>
+                <a:spcPts val="760"/>
+              </a:spcBef>
+              <a:buClr>
+                <a:srgbClr val="8A1524"/>
+              </a:buClr>
+              <a:buFont typeface="Arial"/>
+              <a:buChar char="–"/>
+            </a:pPr>
+            <a:r>
+              <a:rPr lang="en-US" sz="1500" dirty="0">
+                <a:solidFill>
+                  <a:srgbClr val="3F3F4A"/>
+                </a:solidFill>
+                <a:latin typeface="Georgia"/>
               </a:rPr>
               <a:t>Accuracy: Top-1 / Top-3 differential hit rate vs gold diagnosis</a:t>
             </a:r>
           </a:p>
           <a:p>
-            <a:pPr marL="285750" indent="-285750">
-              <a:spcBef>
-                <a:spcPts val="700"/>
-              </a:spcBef>
-              <a:buFont typeface="Arial"/>
-              <a:buChar char="•"/>
-            </a:pPr>
-            <a:r>
-              <a:rPr lang="en-US" sz="1600" dirty="0">
-                <a:solidFill>
-                  <a:srgbClr val="9FB2CF"/>
-                </a:solidFill>
-                <a:latin typeface="Segoe UI"/>
+            <a:pPr marL="342900" indent="-342900">
+              <a:spcBef>
+                <a:spcPts val="760"/>
+              </a:spcBef>
+              <a:buClr>
+                <a:srgbClr val="8A1524"/>
+              </a:buClr>
+              <a:buFont typeface="Arial"/>
+              <a:buChar char="–"/>
+            </a:pPr>
+            <a:r>
+              <a:rPr lang="en-US" sz="1500" dirty="0">
+                <a:solidFill>
+                  <a:srgbClr val="3F3F4A"/>
+                </a:solidFill>
+                <a:latin typeface="Georgia"/>
               </a:rPr>
               <a:t>Calibration: ECE, Brier score, reliability diagrams</a:t>
             </a:r>
           </a:p>
           <a:p>
-            <a:pPr marL="285750" indent="-285750">
-              <a:spcBef>
-                <a:spcPts val="700"/>
-              </a:spcBef>
-              <a:buFont typeface="Arial"/>
-              <a:buChar char="•"/>
-            </a:pPr>
-            <a:r>
-              <a:rPr lang="en-US" sz="1600" dirty="0">
-                <a:solidFill>
-                  <a:srgbClr val="9FB2CF"/>
-                </a:solidFill>
-                <a:latin typeface="Segoe UI"/>
+            <a:pPr marL="342900" indent="-342900">
+              <a:spcBef>
+                <a:spcPts val="760"/>
+              </a:spcBef>
+              <a:buClr>
+                <a:srgbClr val="8A1524"/>
+              </a:buClr>
+              <a:buFont typeface="Arial"/>
+              <a:buChar char="–"/>
+            </a:pPr>
+            <a:r>
+              <a:rPr lang="en-US" sz="1500" dirty="0">
+                <a:solidFill>
+                  <a:srgbClr val="3F3F4A"/>
+                </a:solidFill>
+                <a:latin typeface="Georgia"/>
               </a:rPr>
               <a:t>Safety: can't-miss recall + FALSE-REASSURANCE rate (primary endpoint)</a:t>
             </a:r>
           </a:p>
           <a:p>
-            <a:pPr marL="285750" indent="-285750">
-              <a:spcBef>
-                <a:spcPts val="700"/>
-              </a:spcBef>
-              <a:buFont typeface="Arial"/>
-              <a:buChar char="•"/>
-            </a:pPr>
-            <a:r>
-              <a:rPr lang="en-US" sz="1600" dirty="0">
-                <a:solidFill>
-                  <a:srgbClr val="9FB2CF"/>
-                </a:solidFill>
-                <a:latin typeface="Segoe UI"/>
+            <a:pPr marL="342900" indent="-342900">
+              <a:spcBef>
+                <a:spcPts val="760"/>
+              </a:spcBef>
+              <a:buClr>
+                <a:srgbClr val="8A1524"/>
+              </a:buClr>
+              <a:buFont typeface="Arial"/>
+              <a:buChar char="–"/>
+            </a:pPr>
+            <a:r>
+              <a:rPr lang="en-US" sz="1500" dirty="0">
+                <a:solidFill>
+                  <a:srgbClr val="3F3F4A"/>
+                </a:solidFill>
+                <a:latin typeface="Georgia"/>
               </a:rPr>
               <a:t>Groundedness: % of claims entailed by their citation</a:t>
             </a:r>
           </a:p>
           <a:p>
-            <a:pPr marL="285750" indent="-285750">
-              <a:spcBef>
-                <a:spcPts val="700"/>
-              </a:spcBef>
-              <a:buFont typeface="Arial"/>
-              <a:buChar char="•"/>
-            </a:pPr>
-            <a:r>
-              <a:rPr lang="en-US" sz="1600" dirty="0">
-                <a:solidFill>
-                  <a:srgbClr val="9FB2CF"/>
-                </a:solidFill>
-                <a:latin typeface="Segoe UI"/>
+            <a:pPr marL="342900" indent="-342900">
+              <a:spcBef>
+                <a:spcPts val="760"/>
+              </a:spcBef>
+              <a:buClr>
+                <a:srgbClr val="8A1524"/>
+              </a:buClr>
+              <a:buFont typeface="Arial"/>
+              <a:buChar char="–"/>
+            </a:pPr>
+            <a:r>
+              <a:rPr lang="en-US" sz="1500" dirty="0">
+                <a:solidFill>
+                  <a:srgbClr val="3F3F4A"/>
+                </a:solidFill>
+                <a:latin typeface="Georgia"/>
               </a:rPr>
               <a:t>Ablations: single vs ensemble, vote vs debate, +/- RAG; silent trial</a:t>
             </a:r>
@@ -2285,16 +2201,16 @@
       </p:sp>
       <p:sp>
         <p:nvSpPr>
-          <p:cNvPr id="15" name="footer"/>
-          <p:cNvSpPr>
-            <a:spLocks noGrp="1"/>
-          </p:cNvSpPr>
-          <p:nvPr/>
-        </p:nvSpPr>
-        <p:spPr>
-          <a:xfrm>
-            <a:off x="640000" y="6400000"/>
-            <a:ext cx="9000000" cy="380000"/>
+          <p:cNvPr id="14" name="footer"/>
+          <p:cNvSpPr>
+            <a:spLocks noGrp="1"/>
+          </p:cNvSpPr>
+          <p:nvPr/>
+        </p:nvSpPr>
+        <p:spPr>
+          <a:xfrm>
+            <a:off x="640000" y="6420000"/>
+            <a:ext cx="10000000" cy="360000"/>
           </a:xfrm>
           <a:prstGeom prst="rect">
             <a:avLst/>
@@ -2312,13 +2228,13 @@
               </a:spcBef>
             </a:pPr>
             <a:r>
-              <a:rPr lang="en-US" sz="1000" dirty="0">
-                <a:solidFill>
-                  <a:srgbClr val="65799A"/>
+              <a:rPr lang="en-US" sz="950" dirty="0">
+                <a:solidFill>
+                  <a:srgbClr val="8A8A96"/>
                 </a:solidFill>
                 <a:latin typeface="Consolas"/>
               </a:rPr>
-              <a:t>MedJar  ·  15 / 18  ·  assistive decision-support — not autonomous</a:t>
+              <a:t>MedJar   ·   15 / 18   ·   assistive decision-support, not an autonomous device</a:t>
             </a:r>
           </a:p>
         </p:txBody>
@@ -2337,7 +2253,7 @@
     <p:bg>
       <p:bgPr>
         <a:solidFill>
-          <a:srgbClr val="070B14"/>
+          <a:srgbClr val="F6F4EE"/>
         </a:solidFill>
         <a:effectLst/>
       </p:bgPr>
@@ -2358,14 +2274,14 @@
       </p:grpSpPr>
       <p:sp>
         <p:nvSpPr>
-          <p:cNvPr id="10" name="accent"/>
+          <p:cNvPr id="10" name="rule"/>
           <p:cNvSpPr/>
           <p:nvPr/>
         </p:nvSpPr>
         <p:spPr>
           <a:xfrm>
-            <a:off x="0" y="0"/>
-            <a:ext cx="12192000" cy="68580"/>
+            <a:off x="640000" y="1030000"/>
+            <a:ext cx="620000" cy="34000"/>
           </a:xfrm>
           <a:prstGeom prst="roundRect">
             <a:avLst>
@@ -2373,7 +2289,7 @@
             </a:avLst>
           </a:prstGeom>
           <a:solidFill>
-            <a:srgbClr val="2FE0C8"/>
+            <a:srgbClr val="8A1524"/>
           </a:solidFill>
           <a:ln>
             <a:noFill/>
@@ -2387,45 +2303,16 @@
       </p:sp>
       <p:sp>
         <p:nvSpPr>
-          <p:cNvPr id="11" name="sidebar"/>
-          <p:cNvSpPr/>
-          <p:nvPr/>
-        </p:nvSpPr>
-        <p:spPr>
-          <a:xfrm>
-            <a:off x="11330000" y="500000"/>
-            <a:ext cx="45720" cy="5800000"/>
-          </a:xfrm>
-          <a:prstGeom prst="roundRect">
-            <a:avLst>
-              <a:gd name="adj" fmla="val 6000"/>
-            </a:avLst>
-          </a:prstGeom>
-          <a:solidFill>
-            <a:srgbClr val="4C8DFF"/>
-          </a:solidFill>
-          <a:ln>
-            <a:noFill/>
-          </a:ln>
-        </p:spPr>
-        <p:txBody>
-          <a:bodyPr/>
-          <a:lstStyle/>
-          <a:p/>
-        </p:txBody>
-      </p:sp>
-      <p:sp>
-        <p:nvSpPr>
-          <p:cNvPr id="12" name="kicker"/>
-          <p:cNvSpPr>
-            <a:spLocks noGrp="1"/>
-          </p:cNvSpPr>
-          <p:nvPr/>
-        </p:nvSpPr>
-        <p:spPr>
-          <a:xfrm>
-            <a:off x="640000" y="520000"/>
-            <a:ext cx="9000000" cy="500000"/>
+          <p:cNvPr id="11" name="kicker"/>
+          <p:cNvSpPr>
+            <a:spLocks noGrp="1"/>
+          </p:cNvSpPr>
+          <p:nvPr/>
+        </p:nvSpPr>
+        <p:spPr>
+          <a:xfrm>
+            <a:off x="640000" y="540000"/>
+            <a:ext cx="10000000" cy="460000"/>
           </a:xfrm>
           <a:prstGeom prst="rect">
             <a:avLst/>
@@ -2443,9 +2330,9 @@
               </a:spcBef>
             </a:pPr>
             <a:r>
-              <a:rPr lang="en-US" sz="1300" b="1" dirty="0">
-                <a:solidFill>
-                  <a:srgbClr val="2FE0C8"/>
+              <a:rPr lang="en-US" sz="1150" b="1" dirty="0">
+                <a:solidFill>
+                  <a:srgbClr val="8A1524"/>
                 </a:solidFill>
                 <a:latin typeface="Consolas"/>
               </a:rPr>
@@ -2456,16 +2343,16 @@
       </p:sp>
       <p:sp>
         <p:nvSpPr>
-          <p:cNvPr id="13" name="title"/>
-          <p:cNvSpPr>
-            <a:spLocks noGrp="1"/>
-          </p:cNvSpPr>
-          <p:nvPr/>
-        </p:nvSpPr>
-        <p:spPr>
-          <a:xfrm>
-            <a:off x="640000" y="980000"/>
-            <a:ext cx="10600000" cy="1300000"/>
+          <p:cNvPr id="12" name="title"/>
+          <p:cNvSpPr>
+            <a:spLocks noGrp="1"/>
+          </p:cNvSpPr>
+          <p:nvPr/>
+        </p:nvSpPr>
+        <p:spPr>
+          <a:xfrm>
+            <a:off x="630000" y="1120000"/>
+            <a:ext cx="10800000" cy="1200000"/>
           </a:xfrm>
           <a:prstGeom prst="rect">
             <a:avLst/>
@@ -2483,11 +2370,11 @@
               </a:spcBef>
             </a:pPr>
             <a:r>
-              <a:rPr lang="en-US" sz="3200" b="1" dirty="0">
-                <a:solidFill>
-                  <a:srgbClr val="E9F1FF"/>
-                </a:solidFill>
-                <a:latin typeface="Segoe UI"/>
+              <a:rPr lang="en-US" sz="3000" b="1" dirty="0">
+                <a:solidFill>
+                  <a:srgbClr val="1B1B22"/>
+                </a:solidFill>
+                <a:latin typeface="Georgia"/>
               </a:rPr>
               <a:t>Assistive by design — the clinician decides</a:t>
             </a:r>
@@ -2496,7 +2383,7 @@
       </p:sp>
       <p:sp>
         <p:nvSpPr>
-          <p:cNvPr id="14" name="body"/>
+          <p:cNvPr id="13" name="body"/>
           <p:cNvSpPr>
             <a:spLocks noGrp="1"/>
           </p:cNvSpPr>
@@ -2505,103 +2392,118 @@
         <p:spPr>
           <a:xfrm>
             <a:off x="700000" y="2650000"/>
-            <a:ext cx="10400000" cy="3600000"/>
-          </a:xfrm>
-          <a:prstGeom prst="rect">
-            <a:avLst/>
-          </a:prstGeom>
-        </p:spPr>
-        <p:txBody>
-          <a:bodyPr wrap="square" rtlCol="0">
-            <a:normAutofit/>
-          </a:bodyPr>
-          <a:lstStyle/>
-          <a:p>
-            <a:pPr marL="285750" indent="-285750">
-              <a:spcBef>
-                <a:spcPts val="700"/>
-              </a:spcBef>
-              <a:buFont typeface="Arial"/>
-              <a:buChar char="•"/>
-            </a:pPr>
-            <a:r>
-              <a:rPr lang="en-US" sz="1600" dirty="0">
-                <a:solidFill>
-                  <a:srgbClr val="9FB2CF"/>
-                </a:solidFill>
-                <a:latin typeface="Segoe UI"/>
+            <a:ext cx="10600000" cy="3400000"/>
+          </a:xfrm>
+          <a:prstGeom prst="rect">
+            <a:avLst/>
+          </a:prstGeom>
+        </p:spPr>
+        <p:txBody>
+          <a:bodyPr wrap="square" rtlCol="0">
+            <a:normAutofit/>
+          </a:bodyPr>
+          <a:lstStyle/>
+          <a:p>
+            <a:pPr marL="342900" indent="-342900">
+              <a:spcBef>
+                <a:spcPts val="760"/>
+              </a:spcBef>
+              <a:buClr>
+                <a:srgbClr val="8A1524"/>
+              </a:buClr>
+              <a:buFont typeface="Arial"/>
+              <a:buChar char="–"/>
+            </a:pPr>
+            <a:r>
+              <a:rPr lang="en-US" sz="1500" dirty="0">
+                <a:solidFill>
+                  <a:srgbClr val="3F3F4A"/>
+                </a:solidFill>
+                <a:latin typeface="Georgia"/>
               </a:rPr>
               <a:t>Mandatory human sign-off before any recommendation informs care</a:t>
             </a:r>
           </a:p>
           <a:p>
-            <a:pPr marL="285750" indent="-285750">
-              <a:spcBef>
-                <a:spcPts val="700"/>
-              </a:spcBef>
-              <a:buFont typeface="Arial"/>
-              <a:buChar char="•"/>
-            </a:pPr>
-            <a:r>
-              <a:rPr lang="en-US" sz="1600" dirty="0">
-                <a:solidFill>
-                  <a:srgbClr val="9FB2CF"/>
-                </a:solidFill>
-                <a:latin typeface="Segoe UI"/>
+            <a:pPr marL="342900" indent="-342900">
+              <a:spcBef>
+                <a:spcPts val="760"/>
+              </a:spcBef>
+              <a:buClr>
+                <a:srgbClr val="8A1524"/>
+              </a:buClr>
+              <a:buFont typeface="Arial"/>
+              <a:buChar char="–"/>
+            </a:pPr>
+            <a:r>
+              <a:rPr lang="en-US" sz="1500" dirty="0">
+                <a:solidFill>
+                  <a:srgbClr val="3F3F4A"/>
+                </a:solidFill>
+                <a:latin typeface="Georgia"/>
               </a:rPr>
               <a:t>Uncertainty &amp; red-flags escalate rather than closing the case</a:t>
             </a:r>
           </a:p>
           <a:p>
-            <a:pPr marL="285750" indent="-285750">
-              <a:spcBef>
-                <a:spcPts val="700"/>
-              </a:spcBef>
-              <a:buFont typeface="Arial"/>
-              <a:buChar char="•"/>
-            </a:pPr>
-            <a:r>
-              <a:rPr lang="en-US" sz="1600" dirty="0">
-                <a:solidFill>
-                  <a:srgbClr val="9FB2CF"/>
-                </a:solidFill>
-                <a:latin typeface="Segoe UI"/>
+            <a:pPr marL="342900" indent="-342900">
+              <a:spcBef>
+                <a:spcPts val="760"/>
+              </a:spcBef>
+              <a:buClr>
+                <a:srgbClr val="8A1524"/>
+              </a:buClr>
+              <a:buFont typeface="Arial"/>
+              <a:buChar char="–"/>
+            </a:pPr>
+            <a:r>
+              <a:rPr lang="en-US" sz="1500" dirty="0">
+                <a:solidFill>
+                  <a:srgbClr val="3F3F4A"/>
+                </a:solidFill>
+                <a:latin typeface="Georgia"/>
               </a:rPr>
               <a:t>HIPAA/GDPR de-id, PHI enclave, encryption, full access audit</a:t>
             </a:r>
           </a:p>
           <a:p>
-            <a:pPr marL="285750" indent="-285750">
-              <a:spcBef>
-                <a:spcPts val="700"/>
-              </a:spcBef>
-              <a:buFont typeface="Arial"/>
-              <a:buChar char="•"/>
-            </a:pPr>
-            <a:r>
-              <a:rPr lang="en-US" sz="1600" dirty="0">
-                <a:solidFill>
-                  <a:srgbClr val="9FB2CF"/>
-                </a:solidFill>
-                <a:latin typeface="Segoe UI"/>
+            <a:pPr marL="342900" indent="-342900">
+              <a:spcBef>
+                <a:spcPts val="760"/>
+              </a:spcBef>
+              <a:buClr>
+                <a:srgbClr val="8A1524"/>
+              </a:buClr>
+              <a:buFont typeface="Arial"/>
+              <a:buChar char="–"/>
+            </a:pPr>
+            <a:r>
+              <a:rPr lang="en-US" sz="1500" dirty="0">
+                <a:solidFill>
+                  <a:srgbClr val="3F3F4A"/>
+                </a:solidFill>
+                <a:latin typeface="Georgia"/>
               </a:rPr>
               <a:t>Likely SaMD (FDA) / MDR (EU); follows Good ML Practice</a:t>
             </a:r>
           </a:p>
           <a:p>
-            <a:pPr marL="285750" indent="-285750">
-              <a:spcBef>
-                <a:spcPts val="700"/>
-              </a:spcBef>
-              <a:buFont typeface="Arial"/>
-              <a:buChar char="•"/>
-            </a:pPr>
-            <a:r>
-              <a:rPr lang="en-US" sz="1600" dirty="0">
-                <a:solidFill>
-                  <a:srgbClr val="9FB2CF"/>
-                </a:solidFill>
-                <a:latin typeface="Segoe UI"/>
+            <a:pPr marL="342900" indent="-342900">
+              <a:spcBef>
+                <a:spcPts val="760"/>
+              </a:spcBef>
+              <a:buClr>
+                <a:srgbClr val="8A1524"/>
+              </a:buClr>
+              <a:buFont typeface="Arial"/>
+              <a:buChar char="–"/>
+            </a:pPr>
+            <a:r>
+              <a:rPr lang="en-US" sz="1500" dirty="0">
+                <a:solidFill>
+                  <a:srgbClr val="3F3F4A"/>
+                </a:solidFill>
+                <a:latin typeface="Georgia"/>
               </a:rPr>
               <a:t>Bias &amp; equity: stratified corpus, per-subgroup calibration monitoring</a:t>
             </a:r>
@@ -2610,16 +2512,16 @@
       </p:sp>
       <p:sp>
         <p:nvSpPr>
-          <p:cNvPr id="15" name="footer"/>
-          <p:cNvSpPr>
-            <a:spLocks noGrp="1"/>
-          </p:cNvSpPr>
-          <p:nvPr/>
-        </p:nvSpPr>
-        <p:spPr>
-          <a:xfrm>
-            <a:off x="640000" y="6400000"/>
-            <a:ext cx="9000000" cy="380000"/>
+          <p:cNvPr id="14" name="footer"/>
+          <p:cNvSpPr>
+            <a:spLocks noGrp="1"/>
+          </p:cNvSpPr>
+          <p:nvPr/>
+        </p:nvSpPr>
+        <p:spPr>
+          <a:xfrm>
+            <a:off x="640000" y="6420000"/>
+            <a:ext cx="10000000" cy="360000"/>
           </a:xfrm>
           <a:prstGeom prst="rect">
             <a:avLst/>
@@ -2637,13 +2539,13 @@
               </a:spcBef>
             </a:pPr>
             <a:r>
-              <a:rPr lang="en-US" sz="1000" dirty="0">
-                <a:solidFill>
-                  <a:srgbClr val="65799A"/>
+              <a:rPr lang="en-US" sz="950" dirty="0">
+                <a:solidFill>
+                  <a:srgbClr val="8A8A96"/>
                 </a:solidFill>
                 <a:latin typeface="Consolas"/>
               </a:rPr>
-              <a:t>MedJar  ·  16 / 18  ·  assistive decision-support — not autonomous</a:t>
+              <a:t>MedJar   ·   16 / 18   ·   assistive decision-support, not an autonomous device</a:t>
             </a:r>
           </a:p>
         </p:txBody>
@@ -2662,7 +2564,7 @@
     <p:bg>
       <p:bgPr>
         <a:solidFill>
-          <a:srgbClr val="070B14"/>
+          <a:srgbClr val="F6F4EE"/>
         </a:solidFill>
         <a:effectLst/>
       </p:bgPr>
@@ -2683,14 +2585,14 @@
       </p:grpSpPr>
       <p:sp>
         <p:nvSpPr>
-          <p:cNvPr id="10" name="accent"/>
+          <p:cNvPr id="10" name="rule"/>
           <p:cNvSpPr/>
           <p:nvPr/>
         </p:nvSpPr>
         <p:spPr>
           <a:xfrm>
-            <a:off x="0" y="0"/>
-            <a:ext cx="12192000" cy="68580"/>
+            <a:off x="640000" y="1030000"/>
+            <a:ext cx="620000" cy="34000"/>
           </a:xfrm>
           <a:prstGeom prst="roundRect">
             <a:avLst>
@@ -2698,7 +2600,7 @@
             </a:avLst>
           </a:prstGeom>
           <a:solidFill>
-            <a:srgbClr val="2FE0C8"/>
+            <a:srgbClr val="8A1524"/>
           </a:solidFill>
           <a:ln>
             <a:noFill/>
@@ -2712,45 +2614,16 @@
       </p:sp>
       <p:sp>
         <p:nvSpPr>
-          <p:cNvPr id="11" name="sidebar"/>
-          <p:cNvSpPr/>
-          <p:nvPr/>
-        </p:nvSpPr>
-        <p:spPr>
-          <a:xfrm>
-            <a:off x="11330000" y="500000"/>
-            <a:ext cx="45720" cy="5800000"/>
-          </a:xfrm>
-          <a:prstGeom prst="roundRect">
-            <a:avLst>
-              <a:gd name="adj" fmla="val 6000"/>
-            </a:avLst>
-          </a:prstGeom>
-          <a:solidFill>
-            <a:srgbClr val="4C8DFF"/>
-          </a:solidFill>
-          <a:ln>
-            <a:noFill/>
-          </a:ln>
-        </p:spPr>
-        <p:txBody>
-          <a:bodyPr/>
-          <a:lstStyle/>
-          <a:p/>
-        </p:txBody>
-      </p:sp>
-      <p:sp>
-        <p:nvSpPr>
-          <p:cNvPr id="12" name="kicker"/>
-          <p:cNvSpPr>
-            <a:spLocks noGrp="1"/>
-          </p:cNvSpPr>
-          <p:nvPr/>
-        </p:nvSpPr>
-        <p:spPr>
-          <a:xfrm>
-            <a:off x="640000" y="520000"/>
-            <a:ext cx="9000000" cy="500000"/>
+          <p:cNvPr id="11" name="kicker"/>
+          <p:cNvSpPr>
+            <a:spLocks noGrp="1"/>
+          </p:cNvSpPr>
+          <p:nvPr/>
+        </p:nvSpPr>
+        <p:spPr>
+          <a:xfrm>
+            <a:off x="640000" y="540000"/>
+            <a:ext cx="10000000" cy="460000"/>
           </a:xfrm>
           <a:prstGeom prst="rect">
             <a:avLst/>
@@ -2768,9 +2641,9 @@
               </a:spcBef>
             </a:pPr>
             <a:r>
-              <a:rPr lang="en-US" sz="1300" b="1" dirty="0">
-                <a:solidFill>
-                  <a:srgbClr val="2FE0C8"/>
+              <a:rPr lang="en-US" sz="1150" b="1" dirty="0">
+                <a:solidFill>
+                  <a:srgbClr val="8A1524"/>
                 </a:solidFill>
                 <a:latin typeface="Consolas"/>
               </a:rPr>
@@ -2781,16 +2654,16 @@
       </p:sp>
       <p:sp>
         <p:nvSpPr>
-          <p:cNvPr id="13" name="title"/>
-          <p:cNvSpPr>
-            <a:spLocks noGrp="1"/>
-          </p:cNvSpPr>
-          <p:nvPr/>
-        </p:nvSpPr>
-        <p:spPr>
-          <a:xfrm>
-            <a:off x="640000" y="980000"/>
-            <a:ext cx="10600000" cy="1300000"/>
+          <p:cNvPr id="12" name="title"/>
+          <p:cNvSpPr>
+            <a:spLocks noGrp="1"/>
+          </p:cNvSpPr>
+          <p:nvPr/>
+        </p:nvSpPr>
+        <p:spPr>
+          <a:xfrm>
+            <a:off x="630000" y="1120000"/>
+            <a:ext cx="10800000" cy="1200000"/>
           </a:xfrm>
           <a:prstGeom prst="rect">
             <a:avLst/>
@@ -2808,11 +2681,11 @@
               </a:spcBef>
             </a:pPr>
             <a:r>
-              <a:rPr lang="en-US" sz="3200" b="1" dirty="0">
-                <a:solidFill>
-                  <a:srgbClr val="E9F1FF"/>
-                </a:solidFill>
-                <a:latin typeface="Segoe UI"/>
+              <a:rPr lang="en-US" sz="3000" b="1" dirty="0">
+                <a:solidFill>
+                  <a:srgbClr val="1B1B22"/>
+                </a:solidFill>
+                <a:latin typeface="Georgia"/>
               </a:rPr>
               <a:t>Where it can fail — and the mitigation</a:t>
             </a:r>
@@ -2821,7 +2694,7 @@
       </p:sp>
       <p:sp>
         <p:nvSpPr>
-          <p:cNvPr id="14" name="body"/>
+          <p:cNvPr id="13" name="body"/>
           <p:cNvSpPr>
             <a:spLocks noGrp="1"/>
           </p:cNvSpPr>
@@ -2830,103 +2703,118 @@
         <p:spPr>
           <a:xfrm>
             <a:off x="700000" y="2650000"/>
-            <a:ext cx="10400000" cy="3600000"/>
-          </a:xfrm>
-          <a:prstGeom prst="rect">
-            <a:avLst/>
-          </a:prstGeom>
-        </p:spPr>
-        <p:txBody>
-          <a:bodyPr wrap="square" rtlCol="0">
-            <a:normAutofit/>
-          </a:bodyPr>
-          <a:lstStyle/>
-          <a:p>
-            <a:pPr marL="285750" indent="-285750">
-              <a:spcBef>
-                <a:spcPts val="700"/>
-              </a:spcBef>
-              <a:buFont typeface="Arial"/>
-              <a:buChar char="•"/>
-            </a:pPr>
-            <a:r>
-              <a:rPr lang="en-US" sz="1600" dirty="0">
-                <a:solidFill>
-                  <a:srgbClr val="9FB2CF"/>
-                </a:solidFill>
-                <a:latin typeface="Segoe UI"/>
+            <a:ext cx="10600000" cy="3400000"/>
+          </a:xfrm>
+          <a:prstGeom prst="rect">
+            <a:avLst/>
+          </a:prstGeom>
+        </p:spPr>
+        <p:txBody>
+          <a:bodyPr wrap="square" rtlCol="0">
+            <a:normAutofit/>
+          </a:bodyPr>
+          <a:lstStyle/>
+          <a:p>
+            <a:pPr marL="342900" indent="-342900">
+              <a:spcBef>
+                <a:spcPts val="760"/>
+              </a:spcBef>
+              <a:buClr>
+                <a:srgbClr val="8A1524"/>
+              </a:buClr>
+              <a:buFont typeface="Arial"/>
+              <a:buChar char="–"/>
+            </a:pPr>
+            <a:r>
+              <a:rPr lang="en-US" sz="1500" dirty="0">
+                <a:solidFill>
+                  <a:srgbClr val="3F3F4A"/>
+                </a:solidFill>
+                <a:latin typeface="Georgia"/>
               </a:rPr>
               <a:t>Garbage-in case files -&gt; escalation gate (can't order missing exam)</a:t>
             </a:r>
           </a:p>
           <a:p>
-            <a:pPr marL="285750" indent="-285750">
-              <a:spcBef>
-                <a:spcPts val="700"/>
-              </a:spcBef>
-              <a:buFont typeface="Arial"/>
-              <a:buChar char="•"/>
-            </a:pPr>
-            <a:r>
-              <a:rPr lang="en-US" sz="1600" dirty="0">
-                <a:solidFill>
-                  <a:srgbClr val="9FB2CF"/>
-                </a:solidFill>
-                <a:latin typeface="Segoe UI"/>
+            <a:pPr marL="342900" indent="-342900">
+              <a:spcBef>
+                <a:spcPts val="760"/>
+              </a:spcBef>
+              <a:buClr>
+                <a:srgbClr val="8A1524"/>
+              </a:buClr>
+              <a:buFont typeface="Arial"/>
+              <a:buChar char="–"/>
+            </a:pPr>
+            <a:r>
+              <a:rPr lang="en-US" sz="1500" dirty="0">
+                <a:solidFill>
+                  <a:srgbClr val="3F3F4A"/>
+                </a:solidFill>
+                <a:latin typeface="Georgia"/>
               </a:rPr>
               <a:t>Correlated errors -&gt; heterogeneous models + devil's-advocate + RAG</a:t>
             </a:r>
           </a:p>
           <a:p>
-            <a:pPr marL="285750" indent="-285750">
-              <a:spcBef>
-                <a:spcPts val="700"/>
-              </a:spcBef>
-              <a:buFont typeface="Arial"/>
-              <a:buChar char="•"/>
-            </a:pPr>
-            <a:r>
-              <a:rPr lang="en-US" sz="1600" dirty="0">
-                <a:solidFill>
-                  <a:srgbClr val="9FB2CF"/>
-                </a:solidFill>
-                <a:latin typeface="Segoe UI"/>
+            <a:pPr marL="342900" indent="-342900">
+              <a:spcBef>
+                <a:spcPts val="760"/>
+              </a:spcBef>
+              <a:buClr>
+                <a:srgbClr val="8A1524"/>
+              </a:buClr>
+              <a:buFont typeface="Arial"/>
+              <a:buChar char="–"/>
+            </a:pPr>
+            <a:r>
+              <a:rPr lang="en-US" sz="1500" dirty="0">
+                <a:solidFill>
+                  <a:srgbClr val="3F3F4A"/>
+                </a:solidFill>
+                <a:latin typeface="Georgia"/>
               </a:rPr>
               <a:t>Corpus staleness -&gt; versioned, evidence-graded curation</a:t>
             </a:r>
           </a:p>
           <a:p>
-            <a:pPr marL="285750" indent="-285750">
-              <a:spcBef>
-                <a:spcPts val="700"/>
-              </a:spcBef>
-              <a:buFont typeface="Arial"/>
-              <a:buChar char="•"/>
-            </a:pPr>
-            <a:r>
-              <a:rPr lang="en-US" sz="1600" dirty="0">
-                <a:solidFill>
-                  <a:srgbClr val="9FB2CF"/>
-                </a:solidFill>
-                <a:latin typeface="Segoe UI"/>
+            <a:pPr marL="342900" indent="-342900">
+              <a:spcBef>
+                <a:spcPts val="760"/>
+              </a:spcBef>
+              <a:buClr>
+                <a:srgbClr val="8A1524"/>
+              </a:buClr>
+              <a:buFont typeface="Arial"/>
+              <a:buChar char="–"/>
+            </a:pPr>
+            <a:r>
+              <a:rPr lang="en-US" sz="1500" dirty="0">
+                <a:solidFill>
+                  <a:srgbClr val="3F3F4A"/>
+                </a:solidFill>
+                <a:latin typeface="Georgia"/>
               </a:rPr>
               <a:t>Persuasive-but-wrong -&gt; evidence-weighted, not rhetoric-weighted</a:t>
             </a:r>
           </a:p>
           <a:p>
-            <a:pPr marL="285750" indent="-285750">
-              <a:spcBef>
-                <a:spcPts val="700"/>
-              </a:spcBef>
-              <a:buFont typeface="Arial"/>
-              <a:buChar char="•"/>
-            </a:pPr>
-            <a:r>
-              <a:rPr lang="en-US" sz="1600" dirty="0">
-                <a:solidFill>
-                  <a:srgbClr val="9FB2CF"/>
-                </a:solidFill>
-                <a:latin typeface="Segoe UI"/>
+            <a:pPr marL="342900" indent="-342900">
+              <a:spcBef>
+                <a:spcPts val="760"/>
+              </a:spcBef>
+              <a:buClr>
+                <a:srgbClr val="8A1524"/>
+              </a:buClr>
+              <a:buFont typeface="Arial"/>
+              <a:buChar char="–"/>
+            </a:pPr>
+            <a:r>
+              <a:rPr lang="en-US" sz="1500" dirty="0">
+                <a:solidFill>
+                  <a:srgbClr val="3F3F4A"/>
+                </a:solidFill>
+                <a:latin typeface="Georgia"/>
               </a:rPr>
               <a:t>Automation bias -&gt; lead with uncertainty; compute -&gt; bounded triage mode</a:t>
             </a:r>
@@ -2935,16 +2823,16 @@
       </p:sp>
       <p:sp>
         <p:nvSpPr>
-          <p:cNvPr id="15" name="footer"/>
-          <p:cNvSpPr>
-            <a:spLocks noGrp="1"/>
-          </p:cNvSpPr>
-          <p:nvPr/>
-        </p:nvSpPr>
-        <p:spPr>
-          <a:xfrm>
-            <a:off x="640000" y="6400000"/>
-            <a:ext cx="9000000" cy="380000"/>
+          <p:cNvPr id="14" name="footer"/>
+          <p:cNvSpPr>
+            <a:spLocks noGrp="1"/>
+          </p:cNvSpPr>
+          <p:nvPr/>
+        </p:nvSpPr>
+        <p:spPr>
+          <a:xfrm>
+            <a:off x="640000" y="6420000"/>
+            <a:ext cx="10000000" cy="360000"/>
           </a:xfrm>
           <a:prstGeom prst="rect">
             <a:avLst/>
@@ -2962,13 +2850,13 @@
               </a:spcBef>
             </a:pPr>
             <a:r>
-              <a:rPr lang="en-US" sz="1000" dirty="0">
-                <a:solidFill>
-                  <a:srgbClr val="65799A"/>
+              <a:rPr lang="en-US" sz="950" dirty="0">
+                <a:solidFill>
+                  <a:srgbClr val="8A8A96"/>
                 </a:solidFill>
                 <a:latin typeface="Consolas"/>
               </a:rPr>
-              <a:t>MedJar  ·  17 / 18  ·  assistive decision-support — not autonomous</a:t>
+              <a:t>MedJar   ·   17 / 18   ·   assistive decision-support, not an autonomous device</a:t>
             </a:r>
           </a:p>
         </p:txBody>
@@ -2987,7 +2875,7 @@
     <p:bg>
       <p:bgPr>
         <a:solidFill>
-          <a:srgbClr val="070B14"/>
+          <a:srgbClr val="F6F4EE"/>
         </a:solidFill>
         <a:effectLst/>
       </p:bgPr>
@@ -3008,14 +2896,14 @@
       </p:grpSpPr>
       <p:sp>
         <p:nvSpPr>
-          <p:cNvPr id="10" name="accent"/>
+          <p:cNvPr id="10" name="rule"/>
           <p:cNvSpPr/>
           <p:nvPr/>
         </p:nvSpPr>
         <p:spPr>
           <a:xfrm>
-            <a:off x="0" y="0"/>
-            <a:ext cx="12192000" cy="68580"/>
+            <a:off x="640000" y="1030000"/>
+            <a:ext cx="620000" cy="34000"/>
           </a:xfrm>
           <a:prstGeom prst="roundRect">
             <a:avLst>
@@ -3023,7 +2911,7 @@
             </a:avLst>
           </a:prstGeom>
           <a:solidFill>
-            <a:srgbClr val="2FE0C8"/>
+            <a:srgbClr val="8A1524"/>
           </a:solidFill>
           <a:ln>
             <a:noFill/>
@@ -3037,45 +2925,16 @@
       </p:sp>
       <p:sp>
         <p:nvSpPr>
-          <p:cNvPr id="11" name="sidebar"/>
-          <p:cNvSpPr/>
-          <p:nvPr/>
-        </p:nvSpPr>
-        <p:spPr>
-          <a:xfrm>
-            <a:off x="11330000" y="500000"/>
-            <a:ext cx="45720" cy="5800000"/>
-          </a:xfrm>
-          <a:prstGeom prst="roundRect">
-            <a:avLst>
-              <a:gd name="adj" fmla="val 6000"/>
-            </a:avLst>
-          </a:prstGeom>
-          <a:solidFill>
-            <a:srgbClr val="4C8DFF"/>
-          </a:solidFill>
-          <a:ln>
-            <a:noFill/>
-          </a:ln>
-        </p:spPr>
-        <p:txBody>
-          <a:bodyPr/>
-          <a:lstStyle/>
-          <a:p/>
-        </p:txBody>
-      </p:sp>
-      <p:sp>
-        <p:nvSpPr>
-          <p:cNvPr id="12" name="kicker"/>
-          <p:cNvSpPr>
-            <a:spLocks noGrp="1"/>
-          </p:cNvSpPr>
-          <p:nvPr/>
-        </p:nvSpPr>
-        <p:spPr>
-          <a:xfrm>
-            <a:off x="640000" y="520000"/>
-            <a:ext cx="9000000" cy="500000"/>
+          <p:cNvPr id="11" name="kicker"/>
+          <p:cNvSpPr>
+            <a:spLocks noGrp="1"/>
+          </p:cNvSpPr>
+          <p:nvPr/>
+        </p:nvSpPr>
+        <p:spPr>
+          <a:xfrm>
+            <a:off x="640000" y="540000"/>
+            <a:ext cx="10000000" cy="460000"/>
           </a:xfrm>
           <a:prstGeom prst="rect">
             <a:avLst/>
@@ -3093,9 +2952,9 @@
               </a:spcBef>
             </a:pPr>
             <a:r>
-              <a:rPr lang="en-US" sz="1300" b="1" dirty="0">
-                <a:solidFill>
-                  <a:srgbClr val="2FE0C8"/>
+              <a:rPr lang="en-US" sz="1150" b="1" dirty="0">
+                <a:solidFill>
+                  <a:srgbClr val="8A1524"/>
                 </a:solidFill>
                 <a:latin typeface="Consolas"/>
               </a:rPr>
@@ -3106,16 +2965,16 @@
       </p:sp>
       <p:sp>
         <p:nvSpPr>
-          <p:cNvPr id="13" name="title"/>
-          <p:cNvSpPr>
-            <a:spLocks noGrp="1"/>
-          </p:cNvSpPr>
-          <p:nvPr/>
-        </p:nvSpPr>
-        <p:spPr>
-          <a:xfrm>
-            <a:off x="640000" y="980000"/>
-            <a:ext cx="10600000" cy="1300000"/>
+          <p:cNvPr id="12" name="title"/>
+          <p:cNvSpPr>
+            <a:spLocks noGrp="1"/>
+          </p:cNvSpPr>
+          <p:nvPr/>
+        </p:nvSpPr>
+        <p:spPr>
+          <a:xfrm>
+            <a:off x="630000" y="1120000"/>
+            <a:ext cx="10800000" cy="1200000"/>
           </a:xfrm>
           <a:prstGeom prst="rect">
             <a:avLst/>
@@ -3133,11 +2992,11 @@
               </a:spcBef>
             </a:pPr>
             <a:r>
-              <a:rPr lang="en-US" sz="3200" b="1" dirty="0">
-                <a:solidFill>
-                  <a:srgbClr val="E9F1FF"/>
-                </a:solidFill>
-                <a:latin typeface="Segoe UI"/>
+              <a:rPr lang="en-US" sz="3000" b="1" dirty="0">
+                <a:solidFill>
+                  <a:srgbClr val="1B1B22"/>
+                </a:solidFill>
+                <a:latin typeface="Georgia"/>
               </a:rPr>
               <a:t>From disagreeing experts to one grounded, auditable report</a:t>
             </a:r>
@@ -3146,7 +3005,7 @@
       </p:sp>
       <p:sp>
         <p:nvSpPr>
-          <p:cNvPr id="14" name="body"/>
+          <p:cNvPr id="13" name="body"/>
           <p:cNvSpPr>
             <a:spLocks noGrp="1"/>
           </p:cNvSpPr>
@@ -3155,103 +3014,118 @@
         <p:spPr>
           <a:xfrm>
             <a:off x="700000" y="2650000"/>
-            <a:ext cx="10400000" cy="3600000"/>
-          </a:xfrm>
-          <a:prstGeom prst="rect">
-            <a:avLst/>
-          </a:prstGeom>
-        </p:spPr>
-        <p:txBody>
-          <a:bodyPr wrap="square" rtlCol="0">
-            <a:normAutofit/>
-          </a:bodyPr>
-          <a:lstStyle/>
-          <a:p>
-            <a:pPr marL="285750" indent="-285750">
-              <a:spcBef>
-                <a:spcPts val="700"/>
-              </a:spcBef>
-              <a:buFont typeface="Arial"/>
-              <a:buChar char="•"/>
-            </a:pPr>
-            <a:r>
-              <a:rPr lang="en-US" sz="1600" dirty="0">
-                <a:solidFill>
-                  <a:srgbClr val="9FB2CF"/>
-                </a:solidFill>
-                <a:latin typeface="Segoe UI"/>
+            <a:ext cx="10600000" cy="3400000"/>
+          </a:xfrm>
+          <a:prstGeom prst="rect">
+            <a:avLst/>
+          </a:prstGeom>
+        </p:spPr>
+        <p:txBody>
+          <a:bodyPr wrap="square" rtlCol="0">
+            <a:normAutofit/>
+          </a:bodyPr>
+          <a:lstStyle/>
+          <a:p>
+            <a:pPr marL="342900" indent="-342900">
+              <a:spcBef>
+                <a:spcPts val="760"/>
+              </a:spcBef>
+              <a:buClr>
+                <a:srgbClr val="8A1524"/>
+              </a:buClr>
+              <a:buFont typeface="Arial"/>
+              <a:buChar char="–"/>
+            </a:pPr>
+            <a:r>
+              <a:rPr lang="en-US" sz="1500" dirty="0">
+                <a:solidFill>
+                  <a:srgbClr val="3F3F4A"/>
+                </a:solidFill>
+                <a:latin typeface="Georgia"/>
               </a:rPr>
               <a:t>Phase 0: 3 agents, text cases, retrospective validation</a:t>
             </a:r>
           </a:p>
           <a:p>
-            <a:pPr marL="285750" indent="-285750">
-              <a:spcBef>
-                <a:spcPts val="700"/>
-              </a:spcBef>
-              <a:buFont typeface="Arial"/>
-              <a:buChar char="•"/>
-            </a:pPr>
-            <a:r>
-              <a:rPr lang="en-US" sz="1600" dirty="0">
-                <a:solidFill>
-                  <a:srgbClr val="9FB2CF"/>
-                </a:solidFill>
-                <a:latin typeface="Segoe UI"/>
+            <a:pPr marL="342900" indent="-342900">
+              <a:spcBef>
+                <a:spcPts val="760"/>
+              </a:spcBef>
+              <a:buClr>
+                <a:srgbClr val="8A1524"/>
+              </a:buClr>
+              <a:buFont typeface="Arial"/>
+              <a:buChar char="–"/>
+            </a:pPr>
+            <a:r>
+              <a:rPr lang="en-US" sz="1500" dirty="0">
+                <a:solidFill>
+                  <a:srgbClr val="3F3F4A"/>
+                </a:solidFill>
+                <a:latin typeface="Georgia"/>
               </a:rPr>
               <a:t>Phase 1: multimodal + calibration + groundedness verifier</a:t>
             </a:r>
           </a:p>
           <a:p>
-            <a:pPr marL="285750" indent="-285750">
-              <a:spcBef>
-                <a:spcPts val="700"/>
-              </a:spcBef>
-              <a:buFont typeface="Arial"/>
-              <a:buChar char="•"/>
-            </a:pPr>
-            <a:r>
-              <a:rPr lang="en-US" sz="1600" dirty="0">
-                <a:solidFill>
-                  <a:srgbClr val="9FB2CF"/>
-                </a:solidFill>
-                <a:latin typeface="Segoe UI"/>
+            <a:pPr marL="342900" indent="-342900">
+              <a:spcBef>
+                <a:spcPts val="760"/>
+              </a:spcBef>
+              <a:buClr>
+                <a:srgbClr val="8A1524"/>
+              </a:buClr>
+              <a:buFont typeface="Arial"/>
+              <a:buChar char="–"/>
+            </a:pPr>
+            <a:r>
+              <a:rPr lang="en-US" sz="1500" dirty="0">
+                <a:solidFill>
+                  <a:srgbClr val="3F3F4A"/>
+                </a:solidFill>
+                <a:latin typeface="Georgia"/>
               </a:rPr>
               <a:t>Phase 2: prospective silent trial (read-only)</a:t>
             </a:r>
           </a:p>
           <a:p>
-            <a:pPr marL="285750" indent="-285750">
-              <a:spcBef>
-                <a:spcPts val="700"/>
-              </a:spcBef>
-              <a:buFont typeface="Arial"/>
-              <a:buChar char="•"/>
-            </a:pPr>
-            <a:r>
-              <a:rPr lang="en-US" sz="1600" dirty="0">
-                <a:solidFill>
-                  <a:srgbClr val="9FB2CF"/>
-                </a:solidFill>
-                <a:latin typeface="Segoe UI"/>
+            <a:pPr marL="342900" indent="-342900">
+              <a:spcBef>
+                <a:spcPts val="760"/>
+              </a:spcBef>
+              <a:buClr>
+                <a:srgbClr val="8A1524"/>
+              </a:buClr>
+              <a:buFont typeface="Arial"/>
+              <a:buChar char="–"/>
+            </a:pPr>
+            <a:r>
+              <a:rPr lang="en-US" sz="1500" dirty="0">
+                <a:solidFill>
+                  <a:srgbClr val="3F3F4A"/>
+                </a:solidFill>
+                <a:latin typeface="Georgia"/>
               </a:rPr>
               <a:t>Phase 3-4: regulated pilot -&gt; scale specialties</a:t>
             </a:r>
           </a:p>
           <a:p>
-            <a:pPr marL="285750" indent="-285750">
-              <a:spcBef>
-                <a:spcPts val="700"/>
-              </a:spcBef>
-              <a:buFont typeface="Arial"/>
-              <a:buChar char="•"/>
-            </a:pPr>
-            <a:r>
-              <a:rPr lang="en-US" sz="1600" dirty="0">
-                <a:solidFill>
-                  <a:srgbClr val="9FB2CF"/>
-                </a:solidFill>
-                <a:latin typeface="Segoe UI"/>
+            <a:pPr marL="342900" indent="-342900">
+              <a:spcBef>
+                <a:spcPts val="760"/>
+              </a:spcBef>
+              <a:buClr>
+                <a:srgbClr val="8A1524"/>
+              </a:buClr>
+              <a:buFont typeface="Arial"/>
+              <a:buChar char="–"/>
+            </a:pPr>
+            <a:r>
+              <a:rPr lang="en-US" sz="1500" dirty="0">
+                <a:solidFill>
+                  <a:srgbClr val="3F3F4A"/>
+                </a:solidFill>
+                <a:latin typeface="Georgia"/>
               </a:rPr>
               <a:t>Grounded · Transparent · Calibrated · Safe · Auditable</a:t>
             </a:r>
@@ -3260,16 +3134,16 @@
       </p:sp>
       <p:sp>
         <p:nvSpPr>
-          <p:cNvPr id="15" name="footer"/>
-          <p:cNvSpPr>
-            <a:spLocks noGrp="1"/>
-          </p:cNvSpPr>
-          <p:nvPr/>
-        </p:nvSpPr>
-        <p:spPr>
-          <a:xfrm>
-            <a:off x="640000" y="6400000"/>
-            <a:ext cx="9000000" cy="380000"/>
+          <p:cNvPr id="14" name="footer"/>
+          <p:cNvSpPr>
+            <a:spLocks noGrp="1"/>
+          </p:cNvSpPr>
+          <p:nvPr/>
+        </p:nvSpPr>
+        <p:spPr>
+          <a:xfrm>
+            <a:off x="640000" y="6420000"/>
+            <a:ext cx="10000000" cy="360000"/>
           </a:xfrm>
           <a:prstGeom prst="rect">
             <a:avLst/>
@@ -3287,13 +3161,13 @@
               </a:spcBef>
             </a:pPr>
             <a:r>
-              <a:rPr lang="en-US" sz="1000" dirty="0">
-                <a:solidFill>
-                  <a:srgbClr val="65799A"/>
+              <a:rPr lang="en-US" sz="950" dirty="0">
+                <a:solidFill>
+                  <a:srgbClr val="8A8A96"/>
                 </a:solidFill>
                 <a:latin typeface="Consolas"/>
               </a:rPr>
-              <a:t>MedJar  ·  18 / 18  ·  assistive decision-support — not autonomous</a:t>
+              <a:t>MedJar   ·   18 / 18   ·   assistive decision-support, not an autonomous device</a:t>
             </a:r>
           </a:p>
         </p:txBody>
@@ -3312,7 +3186,7 @@
     <p:bg>
       <p:bgPr>
         <a:solidFill>
-          <a:srgbClr val="070B14"/>
+          <a:srgbClr val="F6F4EE"/>
         </a:solidFill>
         <a:effectLst/>
       </p:bgPr>
@@ -3333,14 +3207,14 @@
       </p:grpSpPr>
       <p:sp>
         <p:nvSpPr>
-          <p:cNvPr id="10" name="accent"/>
+          <p:cNvPr id="10" name="rule"/>
           <p:cNvSpPr/>
           <p:nvPr/>
         </p:nvSpPr>
         <p:spPr>
           <a:xfrm>
-            <a:off x="0" y="0"/>
-            <a:ext cx="12192000" cy="68580"/>
+            <a:off x="640000" y="1030000"/>
+            <a:ext cx="620000" cy="34000"/>
           </a:xfrm>
           <a:prstGeom prst="roundRect">
             <a:avLst>
@@ -3348,7 +3222,7 @@
             </a:avLst>
           </a:prstGeom>
           <a:solidFill>
-            <a:srgbClr val="2FE0C8"/>
+            <a:srgbClr val="8A1524"/>
           </a:solidFill>
           <a:ln>
             <a:noFill/>
@@ -3362,45 +3236,16 @@
       </p:sp>
       <p:sp>
         <p:nvSpPr>
-          <p:cNvPr id="11" name="sidebar"/>
-          <p:cNvSpPr/>
-          <p:nvPr/>
-        </p:nvSpPr>
-        <p:spPr>
-          <a:xfrm>
-            <a:off x="11330000" y="500000"/>
-            <a:ext cx="45720" cy="5800000"/>
-          </a:xfrm>
-          <a:prstGeom prst="roundRect">
-            <a:avLst>
-              <a:gd name="adj" fmla="val 6000"/>
-            </a:avLst>
-          </a:prstGeom>
-          <a:solidFill>
-            <a:srgbClr val="4C8DFF"/>
-          </a:solidFill>
-          <a:ln>
-            <a:noFill/>
-          </a:ln>
-        </p:spPr>
-        <p:txBody>
-          <a:bodyPr/>
-          <a:lstStyle/>
-          <a:p/>
-        </p:txBody>
-      </p:sp>
-      <p:sp>
-        <p:nvSpPr>
-          <p:cNvPr id="12" name="kicker"/>
-          <p:cNvSpPr>
-            <a:spLocks noGrp="1"/>
-          </p:cNvSpPr>
-          <p:nvPr/>
-        </p:nvSpPr>
-        <p:spPr>
-          <a:xfrm>
-            <a:off x="640000" y="520000"/>
-            <a:ext cx="9000000" cy="500000"/>
+          <p:cNvPr id="11" name="kicker"/>
+          <p:cNvSpPr>
+            <a:spLocks noGrp="1"/>
+          </p:cNvSpPr>
+          <p:nvPr/>
+        </p:nvSpPr>
+        <p:spPr>
+          <a:xfrm>
+            <a:off x="640000" y="540000"/>
+            <a:ext cx="10000000" cy="460000"/>
           </a:xfrm>
           <a:prstGeom prst="rect">
             <a:avLst/>
@@ -3418,9 +3263,9 @@
               </a:spcBef>
             </a:pPr>
             <a:r>
-              <a:rPr lang="en-US" sz="1300" b="1" dirty="0">
-                <a:solidFill>
-                  <a:srgbClr val="2FE0C8"/>
+              <a:rPr lang="en-US" sz="1150" b="1" dirty="0">
+                <a:solidFill>
+                  <a:srgbClr val="8A1524"/>
                 </a:solidFill>
                 <a:latin typeface="Consolas"/>
               </a:rPr>
@@ -3431,16 +3276,16 @@
       </p:sp>
       <p:sp>
         <p:nvSpPr>
-          <p:cNvPr id="13" name="title"/>
-          <p:cNvSpPr>
-            <a:spLocks noGrp="1"/>
-          </p:cNvSpPr>
-          <p:nvPr/>
-        </p:nvSpPr>
-        <p:spPr>
-          <a:xfrm>
-            <a:off x="640000" y="980000"/>
-            <a:ext cx="10600000" cy="1300000"/>
+          <p:cNvPr id="12" name="title"/>
+          <p:cNvSpPr>
+            <a:spLocks noGrp="1"/>
+          </p:cNvSpPr>
+          <p:nvPr/>
+        </p:nvSpPr>
+        <p:spPr>
+          <a:xfrm>
+            <a:off x="630000" y="1120000"/>
+            <a:ext cx="10800000" cy="1200000"/>
           </a:xfrm>
           <a:prstGeom prst="rect">
             <a:avLst/>
@@ -3458,11 +3303,11 @@
               </a:spcBef>
             </a:pPr>
             <a:r>
-              <a:rPr lang="en-US" sz="3200" b="1" dirty="0">
-                <a:solidFill>
-                  <a:srgbClr val="E9F1FF"/>
-                </a:solidFill>
-                <a:latin typeface="Segoe UI"/>
+              <a:rPr lang="en-US" sz="3000" b="1" dirty="0">
+                <a:solidFill>
+                  <a:srgbClr val="1B1B22"/>
+                </a:solidFill>
+                <a:latin typeface="Georgia"/>
               </a:rPr>
               <a:t>Complex diagnosis fails for structural reasons</a:t>
             </a:r>
@@ -3471,7 +3316,7 @@
       </p:sp>
       <p:sp>
         <p:nvSpPr>
-          <p:cNvPr id="14" name="body"/>
+          <p:cNvPr id="13" name="body"/>
           <p:cNvSpPr>
             <a:spLocks noGrp="1"/>
           </p:cNvSpPr>
@@ -3480,103 +3325,118 @@
         <p:spPr>
           <a:xfrm>
             <a:off x="700000" y="2650000"/>
-            <a:ext cx="10400000" cy="3600000"/>
-          </a:xfrm>
-          <a:prstGeom prst="rect">
-            <a:avLst/>
-          </a:prstGeom>
-        </p:spPr>
-        <p:txBody>
-          <a:bodyPr wrap="square" rtlCol="0">
-            <a:normAutofit/>
-          </a:bodyPr>
-          <a:lstStyle/>
-          <a:p>
-            <a:pPr marL="285750" indent="-285750">
-              <a:spcBef>
-                <a:spcPts val="700"/>
-              </a:spcBef>
-              <a:buFont typeface="Arial"/>
-              <a:buChar char="•"/>
-            </a:pPr>
-            <a:r>
-              <a:rPr lang="en-US" sz="1600" dirty="0">
-                <a:solidFill>
-                  <a:srgbClr val="9FB2CF"/>
-                </a:solidFill>
-                <a:latin typeface="Segoe UI"/>
+            <a:ext cx="10600000" cy="3400000"/>
+          </a:xfrm>
+          <a:prstGeom prst="rect">
+            <a:avLst/>
+          </a:prstGeom>
+        </p:spPr>
+        <p:txBody>
+          <a:bodyPr wrap="square" rtlCol="0">
+            <a:normAutofit/>
+          </a:bodyPr>
+          <a:lstStyle/>
+          <a:p>
+            <a:pPr marL="342900" indent="-342900">
+              <a:spcBef>
+                <a:spcPts val="760"/>
+              </a:spcBef>
+              <a:buClr>
+                <a:srgbClr val="8A1524"/>
+              </a:buClr>
+              <a:buFont typeface="Arial"/>
+              <a:buChar char="–"/>
+            </a:pPr>
+            <a:r>
+              <a:rPr lang="en-US" sz="1500" dirty="0">
+                <a:solidFill>
+                  <a:srgbClr val="3F3F4A"/>
+                </a:solidFill>
+                <a:latin typeface="Georgia"/>
               </a:rPr>
               <a:t>~1 in 20 adults hit a diagnostic error — concentrated in complex cases</a:t>
             </a:r>
           </a:p>
           <a:p>
-            <a:pPr marL="285750" indent="-285750">
-              <a:spcBef>
-                <a:spcPts val="700"/>
-              </a:spcBef>
-              <a:buFont typeface="Arial"/>
-              <a:buChar char="•"/>
-            </a:pPr>
-            <a:r>
-              <a:rPr lang="en-US" sz="1600" dirty="0">
-                <a:solidFill>
-                  <a:srgbClr val="9FB2CF"/>
-                </a:solidFill>
-                <a:latin typeface="Segoe UI"/>
+            <a:pPr marL="342900" indent="-342900">
+              <a:spcBef>
+                <a:spcPts val="760"/>
+              </a:spcBef>
+              <a:buClr>
+                <a:srgbClr val="8A1524"/>
+              </a:buClr>
+              <a:buFont typeface="Arial"/>
+              <a:buChar char="–"/>
+            </a:pPr>
+            <a:r>
+              <a:rPr lang="en-US" sz="1500" dirty="0">
+                <a:solidFill>
+                  <a:srgbClr val="3F3F4A"/>
+                </a:solidFill>
+                <a:latin typeface="Georgia"/>
               </a:rPr>
               <a:t>Anchoring bias &amp; premature closure shut down the differential early</a:t>
             </a:r>
           </a:p>
           <a:p>
-            <a:pPr marL="285750" indent="-285750">
-              <a:spcBef>
-                <a:spcPts val="700"/>
-              </a:spcBef>
-              <a:buFont typeface="Arial"/>
-              <a:buChar char="•"/>
-            </a:pPr>
-            <a:r>
-              <a:rPr lang="en-US" sz="1600" dirty="0">
-                <a:solidFill>
-                  <a:srgbClr val="9FB2CF"/>
-                </a:solidFill>
-                <a:latin typeface="Segoe UI"/>
+            <a:pPr marL="342900" indent="-342900">
+              <a:spcBef>
+                <a:spcPts val="760"/>
+              </a:spcBef>
+              <a:buClr>
+                <a:srgbClr val="8A1524"/>
+              </a:buClr>
+              <a:buFont typeface="Arial"/>
+              <a:buChar char="–"/>
+            </a:pPr>
+            <a:r>
+              <a:rPr lang="en-US" sz="1500" dirty="0">
+                <a:solidFill>
+                  <a:srgbClr val="3F3F4A"/>
+                </a:solidFill>
+                <a:latin typeface="Georgia"/>
               </a:rPr>
               <a:t>Specialty silos: cardiologist &amp; oncologist rarely reason together</a:t>
             </a:r>
           </a:p>
           <a:p>
-            <a:pPr marL="285750" indent="-285750">
-              <a:spcBef>
-                <a:spcPts val="700"/>
-              </a:spcBef>
-              <a:buFont typeface="Arial"/>
-              <a:buChar char="•"/>
-            </a:pPr>
-            <a:r>
-              <a:rPr lang="en-US" sz="1600" dirty="0">
-                <a:solidFill>
-                  <a:srgbClr val="9FB2CF"/>
-                </a:solidFill>
-                <a:latin typeface="Segoe UI"/>
+            <a:pPr marL="342900" indent="-342900">
+              <a:spcBef>
+                <a:spcPts val="760"/>
+              </a:spcBef>
+              <a:buClr>
+                <a:srgbClr val="8A1524"/>
+              </a:buClr>
+              <a:buFont typeface="Arial"/>
+              <a:buChar char="–"/>
+            </a:pPr>
+            <a:r>
+              <a:rPr lang="en-US" sz="1500" dirty="0">
+                <a:solidFill>
+                  <a:srgbClr val="3F3F4A"/>
+                </a:solidFill>
+                <a:latin typeface="Georgia"/>
               </a:rPr>
               <a:t>Guidelines go stale; a lone LLM asserts false facts fluently</a:t>
             </a:r>
           </a:p>
           <a:p>
-            <a:pPr marL="285750" indent="-285750">
-              <a:spcBef>
-                <a:spcPts val="700"/>
-              </a:spcBef>
-              <a:buFont typeface="Arial"/>
-              <a:buChar char="•"/>
-            </a:pPr>
-            <a:r>
-              <a:rPr lang="en-US" sz="1600" dirty="0">
-                <a:solidFill>
-                  <a:srgbClr val="9FB2CF"/>
-                </a:solidFill>
-                <a:latin typeface="Segoe UI"/>
+            <a:pPr marL="342900" indent="-342900">
+              <a:spcBef>
+                <a:spcPts val="760"/>
+              </a:spcBef>
+              <a:buClr>
+                <a:srgbClr val="8A1524"/>
+              </a:buClr>
+              <a:buFont typeface="Arial"/>
+              <a:buChar char="–"/>
+            </a:pPr>
+            <a:r>
+              <a:rPr lang="en-US" sz="1500" dirty="0">
+                <a:solidFill>
+                  <a:srgbClr val="3F3F4A"/>
+                </a:solidFill>
+                <a:latin typeface="Georgia"/>
               </a:rPr>
               <a:t>A single 'expert' model collapses the field into one distribution</a:t>
             </a:r>
@@ -3585,16 +3445,16 @@
       </p:sp>
       <p:sp>
         <p:nvSpPr>
-          <p:cNvPr id="15" name="footer"/>
-          <p:cNvSpPr>
-            <a:spLocks noGrp="1"/>
-          </p:cNvSpPr>
-          <p:nvPr/>
-        </p:nvSpPr>
-        <p:spPr>
-          <a:xfrm>
-            <a:off x="640000" y="6400000"/>
-            <a:ext cx="9000000" cy="380000"/>
+          <p:cNvPr id="14" name="footer"/>
+          <p:cNvSpPr>
+            <a:spLocks noGrp="1"/>
+          </p:cNvSpPr>
+          <p:nvPr/>
+        </p:nvSpPr>
+        <p:spPr>
+          <a:xfrm>
+            <a:off x="640000" y="6420000"/>
+            <a:ext cx="10000000" cy="360000"/>
           </a:xfrm>
           <a:prstGeom prst="rect">
             <a:avLst/>
@@ -3612,13 +3472,13 @@
               </a:spcBef>
             </a:pPr>
             <a:r>
-              <a:rPr lang="en-US" sz="1000" dirty="0">
-                <a:solidFill>
-                  <a:srgbClr val="65799A"/>
+              <a:rPr lang="en-US" sz="950" dirty="0">
+                <a:solidFill>
+                  <a:srgbClr val="8A8A96"/>
                 </a:solidFill>
                 <a:latin typeface="Consolas"/>
               </a:rPr>
-              <a:t>MedJar  ·  02 / 18  ·  assistive decision-support — not autonomous</a:t>
+              <a:t>MedJar   ·   02 / 18   ·   assistive decision-support, not an autonomous device</a:t>
             </a:r>
           </a:p>
         </p:txBody>
@@ -3637,7 +3497,7 @@
     <p:bg>
       <p:bgPr>
         <a:solidFill>
-          <a:srgbClr val="070B14"/>
+          <a:srgbClr val="F6F4EE"/>
         </a:solidFill>
         <a:effectLst/>
       </p:bgPr>
@@ -3658,14 +3518,14 @@
       </p:grpSpPr>
       <p:sp>
         <p:nvSpPr>
-          <p:cNvPr id="10" name="accent"/>
+          <p:cNvPr id="10" name="rule"/>
           <p:cNvSpPr/>
           <p:nvPr/>
         </p:nvSpPr>
         <p:spPr>
           <a:xfrm>
-            <a:off x="0" y="0"/>
-            <a:ext cx="12192000" cy="68580"/>
+            <a:off x="640000" y="1030000"/>
+            <a:ext cx="620000" cy="34000"/>
           </a:xfrm>
           <a:prstGeom prst="roundRect">
             <a:avLst>
@@ -3673,7 +3533,7 @@
             </a:avLst>
           </a:prstGeom>
           <a:solidFill>
-            <a:srgbClr val="2FE0C8"/>
+            <a:srgbClr val="8A1524"/>
           </a:solidFill>
           <a:ln>
             <a:noFill/>
@@ -3687,45 +3547,16 @@
       </p:sp>
       <p:sp>
         <p:nvSpPr>
-          <p:cNvPr id="11" name="sidebar"/>
-          <p:cNvSpPr/>
-          <p:nvPr/>
-        </p:nvSpPr>
-        <p:spPr>
-          <a:xfrm>
-            <a:off x="11330000" y="500000"/>
-            <a:ext cx="45720" cy="5800000"/>
-          </a:xfrm>
-          <a:prstGeom prst="roundRect">
-            <a:avLst>
-              <a:gd name="adj" fmla="val 6000"/>
-            </a:avLst>
-          </a:prstGeom>
-          <a:solidFill>
-            <a:srgbClr val="4C8DFF"/>
-          </a:solidFill>
-          <a:ln>
-            <a:noFill/>
-          </a:ln>
-        </p:spPr>
-        <p:txBody>
-          <a:bodyPr/>
-          <a:lstStyle/>
-          <a:p/>
-        </p:txBody>
-      </p:sp>
-      <p:sp>
-        <p:nvSpPr>
-          <p:cNvPr id="12" name="kicker"/>
-          <p:cNvSpPr>
-            <a:spLocks noGrp="1"/>
-          </p:cNvSpPr>
-          <p:nvPr/>
-        </p:nvSpPr>
-        <p:spPr>
-          <a:xfrm>
-            <a:off x="640000" y="520000"/>
-            <a:ext cx="9000000" cy="500000"/>
+          <p:cNvPr id="11" name="kicker"/>
+          <p:cNvSpPr>
+            <a:spLocks noGrp="1"/>
+          </p:cNvSpPr>
+          <p:nvPr/>
+        </p:nvSpPr>
+        <p:spPr>
+          <a:xfrm>
+            <a:off x="640000" y="540000"/>
+            <a:ext cx="10000000" cy="460000"/>
           </a:xfrm>
           <a:prstGeom prst="rect">
             <a:avLst/>
@@ -3743,9 +3574,9 @@
               </a:spcBef>
             </a:pPr>
             <a:r>
-              <a:rPr lang="en-US" sz="1300" b="1" dirty="0">
-                <a:solidFill>
-                  <a:srgbClr val="2FE0C8"/>
+              <a:rPr lang="en-US" sz="1150" b="1" dirty="0">
+                <a:solidFill>
+                  <a:srgbClr val="8A1524"/>
                 </a:solidFill>
                 <a:latin typeface="Consolas"/>
               </a:rPr>
@@ -3756,16 +3587,16 @@
       </p:sp>
       <p:sp>
         <p:nvSpPr>
-          <p:cNvPr id="13" name="title"/>
-          <p:cNvSpPr>
-            <a:spLocks noGrp="1"/>
-          </p:cNvSpPr>
-          <p:nvPr/>
-        </p:nvSpPr>
-        <p:spPr>
-          <a:xfrm>
-            <a:off x="640000" y="980000"/>
-            <a:ext cx="10600000" cy="1300000"/>
+          <p:cNvPr id="12" name="title"/>
+          <p:cNvSpPr>
+            <a:spLocks noGrp="1"/>
+          </p:cNvSpPr>
+          <p:nvPr/>
+        </p:nvSpPr>
+        <p:spPr>
+          <a:xfrm>
+            <a:off x="630000" y="1120000"/>
+            <a:ext cx="10800000" cy="1200000"/>
           </a:xfrm>
           <a:prstGeom prst="rect">
             <a:avLst/>
@@ -3783,11 +3614,11 @@
               </a:spcBef>
             </a:pPr>
             <a:r>
-              <a:rPr lang="en-US" sz="3200" b="1" dirty="0">
-                <a:solidFill>
-                  <a:srgbClr val="E9F1FF"/>
-                </a:solidFill>
-                <a:latin typeface="Segoe UI"/>
+              <a:rPr lang="en-US" sz="3000" b="1" dirty="0">
+                <a:solidFill>
+                  <a:srgbClr val="1B1B22"/>
+                </a:solidFill>
+                <a:latin typeface="Georgia"/>
               </a:rPr>
               <a:t>Disagreeing experts, forced to reconcile evidence</a:t>
             </a:r>
@@ -3796,7 +3627,7 @@
       </p:sp>
       <p:sp>
         <p:nvSpPr>
-          <p:cNvPr id="14" name="body"/>
+          <p:cNvPr id="13" name="body"/>
           <p:cNvSpPr>
             <a:spLocks noGrp="1"/>
           </p:cNvSpPr>
@@ -3805,85 +3636,97 @@
         <p:spPr>
           <a:xfrm>
             <a:off x="700000" y="2650000"/>
-            <a:ext cx="10400000" cy="3600000"/>
-          </a:xfrm>
-          <a:prstGeom prst="rect">
-            <a:avLst/>
-          </a:prstGeom>
-        </p:spPr>
-        <p:txBody>
-          <a:bodyPr wrap="square" rtlCol="0">
-            <a:normAutofit/>
-          </a:bodyPr>
-          <a:lstStyle/>
-          <a:p>
-            <a:pPr marL="285750" indent="-285750">
-              <a:spcBef>
-                <a:spcPts val="700"/>
-              </a:spcBef>
-              <a:buFont typeface="Arial"/>
-              <a:buChar char="•"/>
-            </a:pPr>
-            <a:r>
-              <a:rPr lang="en-US" sz="1600" dirty="0">
-                <a:solidFill>
-                  <a:srgbClr val="9FB2CF"/>
-                </a:solidFill>
-                <a:latin typeface="Segoe UI"/>
+            <a:ext cx="10600000" cy="3400000"/>
+          </a:xfrm>
+          <a:prstGeom prst="rect">
+            <a:avLst/>
+          </a:prstGeom>
+        </p:spPr>
+        <p:txBody>
+          <a:bodyPr wrap="square" rtlCol="0">
+            <a:normAutofit/>
+          </a:bodyPr>
+          <a:lstStyle/>
+          <a:p>
+            <a:pPr marL="342900" indent="-342900">
+              <a:spcBef>
+                <a:spcPts val="760"/>
+              </a:spcBef>
+              <a:buClr>
+                <a:srgbClr val="8A1524"/>
+              </a:buClr>
+              <a:buFont typeface="Arial"/>
+              <a:buChar char="–"/>
+            </a:pPr>
+            <a:r>
+              <a:rPr lang="en-US" sz="1500" dirty="0">
+                <a:solidFill>
+                  <a:srgbClr val="3F3F4A"/>
+                </a:solidFill>
+                <a:latin typeface="Georgia"/>
               </a:rPr>
               <a:t>No single mind holds the whole of medicine</a:t>
             </a:r>
           </a:p>
           <a:p>
-            <a:pPr marL="285750" indent="-285750">
-              <a:spcBef>
-                <a:spcPts val="700"/>
-              </a:spcBef>
-              <a:buFont typeface="Arial"/>
-              <a:buChar char="•"/>
-            </a:pPr>
-            <a:r>
-              <a:rPr lang="en-US" sz="1600" dirty="0">
-                <a:solidFill>
-                  <a:srgbClr val="9FB2CF"/>
-                </a:solidFill>
-                <a:latin typeface="Segoe UI"/>
+            <a:pPr marL="342900" indent="-342900">
+              <a:spcBef>
+                <a:spcPts val="760"/>
+              </a:spcBef>
+              <a:buClr>
+                <a:srgbClr val="8A1524"/>
+              </a:buClr>
+              <a:buFont typeface="Arial"/>
+              <a:buChar char="–"/>
+            </a:pPr>
+            <a:r>
+              <a:rPr lang="en-US" sz="1500" dirty="0">
+                <a:solidFill>
+                  <a:srgbClr val="3F3F4A"/>
+                </a:solidFill>
+                <a:latin typeface="Georgia"/>
               </a:rPr>
               <a:t>Debate  &gt;  Vote     — use the reasons, not just the answers</a:t>
             </a:r>
           </a:p>
           <a:p>
-            <a:pPr marL="285750" indent="-285750">
-              <a:spcBef>
-                <a:spcPts val="700"/>
-              </a:spcBef>
-              <a:buFont typeface="Arial"/>
-              <a:buChar char="•"/>
-            </a:pPr>
-            <a:r>
-              <a:rPr lang="en-US" sz="1600" dirty="0">
-                <a:solidFill>
-                  <a:srgbClr val="9FB2CF"/>
-                </a:solidFill>
-                <a:latin typeface="Segoe UI"/>
+            <a:pPr marL="342900" indent="-342900">
+              <a:spcBef>
+                <a:spcPts val="760"/>
+              </a:spcBef>
+              <a:buClr>
+                <a:srgbClr val="8A1524"/>
+              </a:buClr>
+              <a:buFont typeface="Arial"/>
+              <a:buChar char="–"/>
+            </a:pPr>
+            <a:r>
+              <a:rPr lang="en-US" sz="1500" dirty="0">
+                <a:solidFill>
+                  <a:srgbClr val="3F3F4A"/>
+                </a:solidFill>
+                <a:latin typeface="Georgia"/>
               </a:rPr>
               <a:t>Disagreement = Signal — it drives retrieval &amp; escalation</a:t>
             </a:r>
           </a:p>
           <a:p>
-            <a:pPr marL="285750" indent="-285750">
-              <a:spcBef>
-                <a:spcPts val="700"/>
-              </a:spcBef>
-              <a:buFont typeface="Arial"/>
-              <a:buChar char="•"/>
-            </a:pPr>
-            <a:r>
-              <a:rPr lang="en-US" sz="1600" dirty="0">
-                <a:solidFill>
-                  <a:srgbClr val="9FB2CF"/>
-                </a:solidFill>
-                <a:latin typeface="Segoe UI"/>
+            <a:pPr marL="342900" indent="-342900">
+              <a:spcBef>
+                <a:spcPts val="760"/>
+              </a:spcBef>
+              <a:buClr>
+                <a:srgbClr val="8A1524"/>
+              </a:buClr>
+              <a:buFont typeface="Arial"/>
+              <a:buChar char="–"/>
+            </a:pPr>
+            <a:r>
+              <a:rPr lang="en-US" sz="1500" dirty="0">
+                <a:solidFill>
+                  <a:srgbClr val="3F3F4A"/>
+                </a:solidFill>
+                <a:latin typeface="Georgia"/>
               </a:rPr>
               <a:t>Ground everything   — no clinical claim without a citation</a:t>
             </a:r>
@@ -3892,16 +3735,16 @@
       </p:sp>
       <p:sp>
         <p:nvSpPr>
-          <p:cNvPr id="15" name="footer"/>
-          <p:cNvSpPr>
-            <a:spLocks noGrp="1"/>
-          </p:cNvSpPr>
-          <p:nvPr/>
-        </p:nvSpPr>
-        <p:spPr>
-          <a:xfrm>
-            <a:off x="640000" y="6400000"/>
-            <a:ext cx="9000000" cy="380000"/>
+          <p:cNvPr id="14" name="footer"/>
+          <p:cNvSpPr>
+            <a:spLocks noGrp="1"/>
+          </p:cNvSpPr>
+          <p:nvPr/>
+        </p:nvSpPr>
+        <p:spPr>
+          <a:xfrm>
+            <a:off x="640000" y="6420000"/>
+            <a:ext cx="10000000" cy="360000"/>
           </a:xfrm>
           <a:prstGeom prst="rect">
             <a:avLst/>
@@ -3919,13 +3762,13 @@
               </a:spcBef>
             </a:pPr>
             <a:r>
-              <a:rPr lang="en-US" sz="1000" dirty="0">
-                <a:solidFill>
-                  <a:srgbClr val="65799A"/>
+              <a:rPr lang="en-US" sz="950" dirty="0">
+                <a:solidFill>
+                  <a:srgbClr val="8A8A96"/>
                 </a:solidFill>
                 <a:latin typeface="Consolas"/>
               </a:rPr>
-              <a:t>MedJar  ·  03 / 18  ·  assistive decision-support — not autonomous</a:t>
+              <a:t>MedJar   ·   03 / 18   ·   assistive decision-support, not an autonomous device</a:t>
             </a:r>
           </a:p>
         </p:txBody>
@@ -3944,7 +3787,7 @@
     <p:bg>
       <p:bgPr>
         <a:solidFill>
-          <a:srgbClr val="070B14"/>
+          <a:srgbClr val="F6F4EE"/>
         </a:solidFill>
         <a:effectLst/>
       </p:bgPr>
@@ -3965,14 +3808,14 @@
       </p:grpSpPr>
       <p:sp>
         <p:nvSpPr>
-          <p:cNvPr id="10" name="accent"/>
+          <p:cNvPr id="10" name="rule"/>
           <p:cNvSpPr/>
           <p:nvPr/>
         </p:nvSpPr>
         <p:spPr>
           <a:xfrm>
-            <a:off x="0" y="0"/>
-            <a:ext cx="12192000" cy="68580"/>
+            <a:off x="640000" y="1030000"/>
+            <a:ext cx="620000" cy="34000"/>
           </a:xfrm>
           <a:prstGeom prst="roundRect">
             <a:avLst>
@@ -3980,7 +3823,7 @@
             </a:avLst>
           </a:prstGeom>
           <a:solidFill>
-            <a:srgbClr val="2FE0C8"/>
+            <a:srgbClr val="8A1524"/>
           </a:solidFill>
           <a:ln>
             <a:noFill/>
@@ -3994,45 +3837,16 @@
       </p:sp>
       <p:sp>
         <p:nvSpPr>
-          <p:cNvPr id="11" name="sidebar"/>
-          <p:cNvSpPr/>
-          <p:nvPr/>
-        </p:nvSpPr>
-        <p:spPr>
-          <a:xfrm>
-            <a:off x="11330000" y="500000"/>
-            <a:ext cx="45720" cy="5800000"/>
-          </a:xfrm>
-          <a:prstGeom prst="roundRect">
-            <a:avLst>
-              <a:gd name="adj" fmla="val 6000"/>
-            </a:avLst>
-          </a:prstGeom>
-          <a:solidFill>
-            <a:srgbClr val="4C8DFF"/>
-          </a:solidFill>
-          <a:ln>
-            <a:noFill/>
-          </a:ln>
-        </p:spPr>
-        <p:txBody>
-          <a:bodyPr/>
-          <a:lstStyle/>
-          <a:p/>
-        </p:txBody>
-      </p:sp>
-      <p:sp>
-        <p:nvSpPr>
-          <p:cNvPr id="12" name="kicker"/>
-          <p:cNvSpPr>
-            <a:spLocks noGrp="1"/>
-          </p:cNvSpPr>
-          <p:nvPr/>
-        </p:nvSpPr>
-        <p:spPr>
-          <a:xfrm>
-            <a:off x="640000" y="520000"/>
-            <a:ext cx="9000000" cy="500000"/>
+          <p:cNvPr id="11" name="kicker"/>
+          <p:cNvSpPr>
+            <a:spLocks noGrp="1"/>
+          </p:cNvSpPr>
+          <p:nvPr/>
+        </p:nvSpPr>
+        <p:spPr>
+          <a:xfrm>
+            <a:off x="640000" y="540000"/>
+            <a:ext cx="10000000" cy="460000"/>
           </a:xfrm>
           <a:prstGeom prst="rect">
             <a:avLst/>
@@ -4050,9 +3864,9 @@
               </a:spcBef>
             </a:pPr>
             <a:r>
-              <a:rPr lang="en-US" sz="1300" b="1" dirty="0">
-                <a:solidFill>
-                  <a:srgbClr val="2FE0C8"/>
+              <a:rPr lang="en-US" sz="1150" b="1" dirty="0">
+                <a:solidFill>
+                  <a:srgbClr val="8A1524"/>
                 </a:solidFill>
                 <a:latin typeface="Consolas"/>
               </a:rPr>
@@ -4063,16 +3877,16 @@
       </p:sp>
       <p:sp>
         <p:nvSpPr>
-          <p:cNvPr id="13" name="title"/>
-          <p:cNvSpPr>
-            <a:spLocks noGrp="1"/>
-          </p:cNvSpPr>
-          <p:nvPr/>
-        </p:nvSpPr>
-        <p:spPr>
-          <a:xfrm>
-            <a:off x="640000" y="980000"/>
-            <a:ext cx="10600000" cy="1300000"/>
+          <p:cNvPr id="12" name="title"/>
+          <p:cNvSpPr>
+            <a:spLocks noGrp="1"/>
+          </p:cNvSpPr>
+          <p:nvPr/>
+        </p:nvSpPr>
+        <p:spPr>
+          <a:xfrm>
+            <a:off x="630000" y="1120000"/>
+            <a:ext cx="10800000" cy="1200000"/>
           </a:xfrm>
           <a:prstGeom prst="rect">
             <a:avLst/>
@@ -4090,11 +3904,11 @@
               </a:spcBef>
             </a:pPr>
             <a:r>
-              <a:rPr lang="en-US" sz="3200" b="1" dirty="0">
-                <a:solidFill>
-                  <a:srgbClr val="E9F1FF"/>
-                </a:solidFill>
-                <a:latin typeface="Segoe UI"/>
+              <a:rPr lang="en-US" sz="3000" b="1" dirty="0">
+                <a:solidFill>
+                  <a:srgbClr val="1B1B22"/>
+                </a:solidFill>
+                <a:latin typeface="Georgia"/>
               </a:rPr>
               <a:t>Six layers, one control loop</a:t>
             </a:r>
@@ -4103,7 +3917,7 @@
       </p:sp>
       <p:sp>
         <p:nvSpPr>
-          <p:cNvPr id="14" name="body"/>
+          <p:cNvPr id="13" name="body"/>
           <p:cNvSpPr>
             <a:spLocks noGrp="1"/>
           </p:cNvSpPr>
@@ -4112,121 +3926,139 @@
         <p:spPr>
           <a:xfrm>
             <a:off x="700000" y="2650000"/>
-            <a:ext cx="10400000" cy="3600000"/>
-          </a:xfrm>
-          <a:prstGeom prst="rect">
-            <a:avLst/>
-          </a:prstGeom>
-        </p:spPr>
-        <p:txBody>
-          <a:bodyPr wrap="square" rtlCol="0">
-            <a:normAutofit/>
-          </a:bodyPr>
-          <a:lstStyle/>
-          <a:p>
-            <a:pPr marL="285750" indent="-285750">
-              <a:spcBef>
-                <a:spcPts val="700"/>
-              </a:spcBef>
-              <a:buFont typeface="Arial"/>
-              <a:buChar char="•"/>
-            </a:pPr>
-            <a:r>
-              <a:rPr lang="en-US" sz="1600" dirty="0">
-                <a:solidFill>
-                  <a:srgbClr val="9FB2CF"/>
-                </a:solidFill>
-                <a:latin typeface="Segoe UI"/>
+            <a:ext cx="10600000" cy="3400000"/>
+          </a:xfrm>
+          <a:prstGeom prst="rect">
+            <a:avLst/>
+          </a:prstGeom>
+        </p:spPr>
+        <p:txBody>
+          <a:bodyPr wrap="square" rtlCol="0">
+            <a:normAutofit/>
+          </a:bodyPr>
+          <a:lstStyle/>
+          <a:p>
+            <a:pPr marL="342900" indent="-342900">
+              <a:spcBef>
+                <a:spcPts val="760"/>
+              </a:spcBef>
+              <a:buClr>
+                <a:srgbClr val="8A1524"/>
+              </a:buClr>
+              <a:buFont typeface="Arial"/>
+              <a:buChar char="–"/>
+            </a:pPr>
+            <a:r>
+              <a:rPr lang="en-US" sz="1500" dirty="0">
+                <a:solidFill>
+                  <a:srgbClr val="3F3F4A"/>
+                </a:solidFill>
+                <a:latin typeface="Georgia"/>
               </a:rPr>
               <a:t>0 · Intake — case files -&gt; de-identification -&gt; normalization</a:t>
             </a:r>
           </a:p>
           <a:p>
-            <a:pPr marL="285750" indent="-285750">
-              <a:spcBef>
-                <a:spcPts val="700"/>
-              </a:spcBef>
-              <a:buFont typeface="Arial"/>
-              <a:buChar char="•"/>
-            </a:pPr>
-            <a:r>
-              <a:rPr lang="en-US" sz="1600" dirty="0">
-                <a:solidFill>
-                  <a:srgbClr val="9FB2CF"/>
-                </a:solidFill>
-                <a:latin typeface="Segoe UI"/>
+            <a:pPr marL="342900" indent="-342900">
+              <a:spcBef>
+                <a:spcPts val="760"/>
+              </a:spcBef>
+              <a:buClr>
+                <a:srgbClr val="8A1524"/>
+              </a:buClr>
+              <a:buFont typeface="Arial"/>
+              <a:buChar char="–"/>
+            </a:pPr>
+            <a:r>
+              <a:rPr lang="en-US" sz="1500" dirty="0">
+                <a:solidFill>
+                  <a:srgbClr val="3F3F4A"/>
+                </a:solidFill>
+                <a:latin typeface="Georgia"/>
               </a:rPr>
               <a:t>1 · Representation — multimodal encoders -&gt; Case Context Object (CCO)</a:t>
             </a:r>
           </a:p>
           <a:p>
-            <a:pPr marL="285750" indent="-285750">
-              <a:spcBef>
-                <a:spcPts val="700"/>
-              </a:spcBef>
-              <a:buFont typeface="Arial"/>
-              <a:buChar char="•"/>
-            </a:pPr>
-            <a:r>
-              <a:rPr lang="en-US" sz="1600" dirty="0">
-                <a:solidFill>
-                  <a:srgbClr val="9FB2CF"/>
-                </a:solidFill>
-                <a:latin typeface="Segoe UI"/>
+            <a:pPr marL="342900" indent="-342900">
+              <a:spcBef>
+                <a:spcPts val="760"/>
+              </a:spcBef>
+              <a:buClr>
+                <a:srgbClr val="8A1524"/>
+              </a:buClr>
+              <a:buFont typeface="Arial"/>
+              <a:buChar char="–"/>
+            </a:pPr>
+            <a:r>
+              <a:rPr lang="en-US" sz="1500" dirty="0">
+                <a:solidFill>
+                  <a:srgbClr val="3F3F4A"/>
+                </a:solidFill>
+                <a:latin typeface="Georgia"/>
               </a:rPr>
               <a:t>2 · Knowledge / RAG — hybrid retrieval, per-specialty scopes</a:t>
             </a:r>
           </a:p>
           <a:p>
-            <a:pPr marL="285750" indent="-285750">
-              <a:spcBef>
-                <a:spcPts val="700"/>
-              </a:spcBef>
-              <a:buFont typeface="Arial"/>
-              <a:buChar char="•"/>
-            </a:pPr>
-            <a:r>
-              <a:rPr lang="en-US" sz="1600" dirty="0">
-                <a:solidFill>
-                  <a:srgbClr val="9FB2CF"/>
-                </a:solidFill>
-                <a:latin typeface="Segoe UI"/>
+            <a:pPr marL="342900" indent="-342900">
+              <a:spcBef>
+                <a:spcPts val="760"/>
+              </a:spcBef>
+              <a:buClr>
+                <a:srgbClr val="8A1524"/>
+              </a:buClr>
+              <a:buFont typeface="Arial"/>
+              <a:buChar char="–"/>
+            </a:pPr>
+            <a:r>
+              <a:rPr lang="en-US" sz="1500" dirty="0">
+                <a:solidFill>
+                  <a:srgbClr val="3F3F4A"/>
+                </a:solidFill>
+                <a:latin typeface="Georgia"/>
               </a:rPr>
               <a:t>3 · Reasoning — the debate loop (specialists + orchestrator)</a:t>
             </a:r>
           </a:p>
           <a:p>
-            <a:pPr marL="285750" indent="-285750">
-              <a:spcBef>
-                <a:spcPts val="700"/>
-              </a:spcBef>
-              <a:buFont typeface="Arial"/>
-              <a:buChar char="•"/>
-            </a:pPr>
-            <a:r>
-              <a:rPr lang="en-US" sz="1600" dirty="0">
-                <a:solidFill>
-                  <a:srgbClr val="9FB2CF"/>
-                </a:solidFill>
-                <a:latin typeface="Segoe UI"/>
+            <a:pPr marL="342900" indent="-342900">
+              <a:spcBef>
+                <a:spcPts val="760"/>
+              </a:spcBef>
+              <a:buClr>
+                <a:srgbClr val="8A1524"/>
+              </a:buClr>
+              <a:buFont typeface="Arial"/>
+              <a:buChar char="–"/>
+            </a:pPr>
+            <a:r>
+              <a:rPr lang="en-US" sz="1500" dirty="0">
+                <a:solidFill>
+                  <a:srgbClr val="3F3F4A"/>
+                </a:solidFill>
+                <a:latin typeface="Georgia"/>
               </a:rPr>
               <a:t>4 · Consensus &amp; Calibration — weighting, uncertainty, red-flags</a:t>
             </a:r>
           </a:p>
           <a:p>
-            <a:pPr marL="285750" indent="-285750">
-              <a:spcBef>
-                <a:spcPts val="700"/>
-              </a:spcBef>
-              <a:buFont typeface="Arial"/>
-              <a:buChar char="•"/>
-            </a:pPr>
-            <a:r>
-              <a:rPr lang="en-US" sz="1600" dirty="0">
-                <a:solidFill>
-                  <a:srgbClr val="9FB2CF"/>
-                </a:solidFill>
-                <a:latin typeface="Segoe UI"/>
+            <a:pPr marL="342900" indent="-342900">
+              <a:spcBef>
+                <a:spcPts val="760"/>
+              </a:spcBef>
+              <a:buClr>
+                <a:srgbClr val="8A1524"/>
+              </a:buClr>
+              <a:buFont typeface="Arial"/>
+              <a:buChar char="–"/>
+            </a:pPr>
+            <a:r>
+              <a:rPr lang="en-US" sz="1500" dirty="0">
+                <a:solidFill>
+                  <a:srgbClr val="3F3F4A"/>
+                </a:solidFill>
+                <a:latin typeface="Georgia"/>
               </a:rPr>
               <a:t>5 · Reporting — unified report + provenance + replayable audit log</a:t>
             </a:r>
@@ -4235,16 +4067,16 @@
       </p:sp>
       <p:sp>
         <p:nvSpPr>
-          <p:cNvPr id="15" name="footer"/>
-          <p:cNvSpPr>
-            <a:spLocks noGrp="1"/>
-          </p:cNvSpPr>
-          <p:nvPr/>
-        </p:nvSpPr>
-        <p:spPr>
-          <a:xfrm>
-            <a:off x="640000" y="6400000"/>
-            <a:ext cx="9000000" cy="380000"/>
+          <p:cNvPr id="14" name="footer"/>
+          <p:cNvSpPr>
+            <a:spLocks noGrp="1"/>
+          </p:cNvSpPr>
+          <p:nvPr/>
+        </p:nvSpPr>
+        <p:spPr>
+          <a:xfrm>
+            <a:off x="640000" y="6420000"/>
+            <a:ext cx="10000000" cy="360000"/>
           </a:xfrm>
           <a:prstGeom prst="rect">
             <a:avLst/>
@@ -4262,13 +4094,13 @@
               </a:spcBef>
             </a:pPr>
             <a:r>
-              <a:rPr lang="en-US" sz="1000" dirty="0">
-                <a:solidFill>
-                  <a:srgbClr val="65799A"/>
+              <a:rPr lang="en-US" sz="950" dirty="0">
+                <a:solidFill>
+                  <a:srgbClr val="8A8A96"/>
                 </a:solidFill>
                 <a:latin typeface="Consolas"/>
               </a:rPr>
-              <a:t>MedJar  ·  04 / 18  ·  assistive decision-support — not autonomous</a:t>
+              <a:t>MedJar   ·   04 / 18   ·   assistive decision-support, not an autonomous device</a:t>
             </a:r>
           </a:p>
         </p:txBody>
@@ -4287,7 +4119,7 @@
     <p:bg>
       <p:bgPr>
         <a:solidFill>
-          <a:srgbClr val="070B14"/>
+          <a:srgbClr val="F6F4EE"/>
         </a:solidFill>
         <a:effectLst/>
       </p:bgPr>
@@ -4308,14 +4140,14 @@
       </p:grpSpPr>
       <p:sp>
         <p:nvSpPr>
-          <p:cNvPr id="10" name="accent"/>
+          <p:cNvPr id="10" name="rule"/>
           <p:cNvSpPr/>
           <p:nvPr/>
         </p:nvSpPr>
         <p:spPr>
           <a:xfrm>
-            <a:off x="0" y="0"/>
-            <a:ext cx="12192000" cy="68580"/>
+            <a:off x="640000" y="1030000"/>
+            <a:ext cx="620000" cy="34000"/>
           </a:xfrm>
           <a:prstGeom prst="roundRect">
             <a:avLst>
@@ -4323,7 +4155,7 @@
             </a:avLst>
           </a:prstGeom>
           <a:solidFill>
-            <a:srgbClr val="2FE0C8"/>
+            <a:srgbClr val="8A1524"/>
           </a:solidFill>
           <a:ln>
             <a:noFill/>
@@ -4337,45 +4169,16 @@
       </p:sp>
       <p:sp>
         <p:nvSpPr>
-          <p:cNvPr id="11" name="sidebar"/>
-          <p:cNvSpPr/>
-          <p:nvPr/>
-        </p:nvSpPr>
-        <p:spPr>
-          <a:xfrm>
-            <a:off x="11330000" y="500000"/>
-            <a:ext cx="45720" cy="5800000"/>
-          </a:xfrm>
-          <a:prstGeom prst="roundRect">
-            <a:avLst>
-              <a:gd name="adj" fmla="val 6000"/>
-            </a:avLst>
-          </a:prstGeom>
-          <a:solidFill>
-            <a:srgbClr val="4C8DFF"/>
-          </a:solidFill>
-          <a:ln>
-            <a:noFill/>
-          </a:ln>
-        </p:spPr>
-        <p:txBody>
-          <a:bodyPr/>
-          <a:lstStyle/>
-          <a:p/>
-        </p:txBody>
-      </p:sp>
-      <p:sp>
-        <p:nvSpPr>
-          <p:cNvPr id="12" name="kicker"/>
-          <p:cNvSpPr>
-            <a:spLocks noGrp="1"/>
-          </p:cNvSpPr>
-          <p:nvPr/>
-        </p:nvSpPr>
-        <p:spPr>
-          <a:xfrm>
-            <a:off x="640000" y="520000"/>
-            <a:ext cx="9000000" cy="500000"/>
+          <p:cNvPr id="11" name="kicker"/>
+          <p:cNvSpPr>
+            <a:spLocks noGrp="1"/>
+          </p:cNvSpPr>
+          <p:nvPr/>
+        </p:nvSpPr>
+        <p:spPr>
+          <a:xfrm>
+            <a:off x="640000" y="540000"/>
+            <a:ext cx="10000000" cy="460000"/>
           </a:xfrm>
           <a:prstGeom prst="rect">
             <a:avLst/>
@@ -4393,9 +4196,9 @@
               </a:spcBef>
             </a:pPr>
             <a:r>
-              <a:rPr lang="en-US" sz="1300" b="1" dirty="0">
-                <a:solidFill>
-                  <a:srgbClr val="2FE0C8"/>
+              <a:rPr lang="en-US" sz="1150" b="1" dirty="0">
+                <a:solidFill>
+                  <a:srgbClr val="8A1524"/>
                 </a:solidFill>
                 <a:latin typeface="Consolas"/>
               </a:rPr>
@@ -4406,16 +4209,16 @@
       </p:sp>
       <p:sp>
         <p:nvSpPr>
-          <p:cNvPr id="13" name="title"/>
-          <p:cNvSpPr>
-            <a:spLocks noGrp="1"/>
-          </p:cNvSpPr>
-          <p:nvPr/>
-        </p:nvSpPr>
-        <p:spPr>
-          <a:xfrm>
-            <a:off x="640000" y="980000"/>
-            <a:ext cx="10600000" cy="1300000"/>
+          <p:cNvPr id="12" name="title"/>
+          <p:cNvSpPr>
+            <a:spLocks noGrp="1"/>
+          </p:cNvSpPr>
+          <p:nvPr/>
+        </p:nvSpPr>
+        <p:spPr>
+          <a:xfrm>
+            <a:off x="630000" y="1120000"/>
+            <a:ext cx="10800000" cy="1200000"/>
           </a:xfrm>
           <a:prstGeom prst="rect">
             <a:avLst/>
@@ -4433,11 +4236,11 @@
               </a:spcBef>
             </a:pPr>
             <a:r>
-              <a:rPr lang="en-US" sz="3200" b="1" dirty="0">
-                <a:solidFill>
-                  <a:srgbClr val="E9F1FF"/>
-                </a:solidFill>
-                <a:latin typeface="Segoe UI"/>
+              <a:rPr lang="en-US" sz="3000" b="1" dirty="0">
+                <a:solidFill>
+                  <a:srgbClr val="1B1B22"/>
+                </a:solidFill>
+                <a:latin typeface="Georgia"/>
               </a:rPr>
               <a:t>Each specialist = &lt;persona, tools, retrieval scope&gt;</a:t>
             </a:r>
@@ -4446,7 +4249,7 @@
       </p:sp>
       <p:sp>
         <p:nvSpPr>
-          <p:cNvPr id="14" name="body"/>
+          <p:cNvPr id="13" name="body"/>
           <p:cNvSpPr>
             <a:spLocks noGrp="1"/>
           </p:cNvSpPr>
@@ -4455,103 +4258,118 @@
         <p:spPr>
           <a:xfrm>
             <a:off x="700000" y="2650000"/>
-            <a:ext cx="10400000" cy="3600000"/>
-          </a:xfrm>
-          <a:prstGeom prst="rect">
-            <a:avLst/>
-          </a:prstGeom>
-        </p:spPr>
-        <p:txBody>
-          <a:bodyPr wrap="square" rtlCol="0">
-            <a:normAutofit/>
-          </a:bodyPr>
-          <a:lstStyle/>
-          <a:p>
-            <a:pPr marL="285750" indent="-285750">
-              <a:spcBef>
-                <a:spcPts val="700"/>
-              </a:spcBef>
-              <a:buFont typeface="Arial"/>
-              <a:buChar char="•"/>
-            </a:pPr>
-            <a:r>
-              <a:rPr lang="en-US" sz="1600" dirty="0">
-                <a:solidFill>
-                  <a:srgbClr val="9FB2CF"/>
-                </a:solidFill>
-                <a:latin typeface="Segoe UI"/>
+            <a:ext cx="10600000" cy="3400000"/>
+          </a:xfrm>
+          <a:prstGeom prst="rect">
+            <a:avLst/>
+          </a:prstGeom>
+        </p:spPr>
+        <p:txBody>
+          <a:bodyPr wrap="square" rtlCol="0">
+            <a:normAutofit/>
+          </a:bodyPr>
+          <a:lstStyle/>
+          <a:p>
+            <a:pPr marL="342900" indent="-342900">
+              <a:spcBef>
+                <a:spcPts val="760"/>
+              </a:spcBef>
+              <a:buClr>
+                <a:srgbClr val="8A1524"/>
+              </a:buClr>
+              <a:buFont typeface="Arial"/>
+              <a:buChar char="–"/>
+            </a:pPr>
+            <a:r>
+              <a:rPr lang="en-US" sz="1500" dirty="0">
+                <a:solidFill>
+                  <a:srgbClr val="3F3F4A"/>
+                </a:solidFill>
+                <a:latin typeface="Georgia"/>
               </a:rPr>
               <a:t>Radiologist — morphology -&gt; localization -&gt; imaging differential</a:t>
             </a:r>
           </a:p>
           <a:p>
-            <a:pPr marL="285750" indent="-285750">
-              <a:spcBef>
-                <a:spcPts val="700"/>
-              </a:spcBef>
-              <a:buFont typeface="Arial"/>
-              <a:buChar char="•"/>
-            </a:pPr>
-            <a:r>
-              <a:rPr lang="en-US" sz="1600" dirty="0">
-                <a:solidFill>
-                  <a:srgbClr val="9FB2CF"/>
-                </a:solidFill>
-                <a:latin typeface="Segoe UI"/>
+            <a:pPr marL="342900" indent="-342900">
+              <a:spcBef>
+                <a:spcPts val="760"/>
+              </a:spcBef>
+              <a:buClr>
+                <a:srgbClr val="8A1524"/>
+              </a:buClr>
+              <a:buFont typeface="Arial"/>
+              <a:buChar char="–"/>
+            </a:pPr>
+            <a:r>
+              <a:rPr lang="en-US" sz="1500" dirty="0">
+                <a:solidFill>
+                  <a:srgbClr val="3F3F4A"/>
+                </a:solidFill>
+                <a:latin typeface="Georgia"/>
               </a:rPr>
               <a:t>Cardiologist — rhythm, ischemia, hemodynamics, structure</a:t>
             </a:r>
           </a:p>
           <a:p>
-            <a:pPr marL="285750" indent="-285750">
-              <a:spcBef>
-                <a:spcPts val="700"/>
-              </a:spcBef>
-              <a:buFont typeface="Arial"/>
-              <a:buChar char="•"/>
-            </a:pPr>
-            <a:r>
-              <a:rPr lang="en-US" sz="1600" dirty="0">
-                <a:solidFill>
-                  <a:srgbClr val="9FB2CF"/>
-                </a:solidFill>
-                <a:latin typeface="Segoe UI"/>
+            <a:pPr marL="342900" indent="-342900">
+              <a:spcBef>
+                <a:spcPts val="760"/>
+              </a:spcBef>
+              <a:buClr>
+                <a:srgbClr val="8A1524"/>
+              </a:buClr>
+              <a:buFont typeface="Arial"/>
+              <a:buChar char="–"/>
+            </a:pPr>
+            <a:r>
+              <a:rPr lang="en-US" sz="1500" dirty="0">
+                <a:solidFill>
+                  <a:srgbClr val="3F3F4A"/>
+                </a:solidFill>
+                <a:latin typeface="Georgia"/>
               </a:rPr>
               <a:t>Oncologist — tissue of origin, staging, biomarkers</a:t>
             </a:r>
           </a:p>
           <a:p>
-            <a:pPr marL="285750" indent="-285750">
-              <a:spcBef>
-                <a:spcPts val="700"/>
-              </a:spcBef>
-              <a:buFont typeface="Arial"/>
-              <a:buChar char="•"/>
-            </a:pPr>
-            <a:r>
-              <a:rPr lang="en-US" sz="1600" dirty="0">
-                <a:solidFill>
-                  <a:srgbClr val="9FB2CF"/>
-                </a:solidFill>
-                <a:latin typeface="Segoe UI"/>
+            <a:pPr marL="342900" indent="-342900">
+              <a:spcBef>
+                <a:spcPts val="760"/>
+              </a:spcBef>
+              <a:buClr>
+                <a:srgbClr val="8A1524"/>
+              </a:buClr>
+              <a:buFont typeface="Arial"/>
+              <a:buChar char="–"/>
+            </a:pPr>
+            <a:r>
+              <a:rPr lang="en-US" sz="1500" dirty="0">
+                <a:solidFill>
+                  <a:srgbClr val="3F3F4A"/>
+                </a:solidFill>
+                <a:latin typeface="Georgia"/>
               </a:rPr>
               <a:t>Generalist — guards the 'whole patient'</a:t>
             </a:r>
           </a:p>
           <a:p>
-            <a:pPr marL="285750" indent="-285750">
-              <a:spcBef>
-                <a:spcPts val="700"/>
-              </a:spcBef>
-              <a:buFont typeface="Arial"/>
-              <a:buChar char="•"/>
-            </a:pPr>
-            <a:r>
-              <a:rPr lang="en-US" sz="1600" dirty="0">
-                <a:solidFill>
-                  <a:srgbClr val="9FB2CF"/>
-                </a:solidFill>
-                <a:latin typeface="Segoe UI"/>
+            <a:pPr marL="342900" indent="-342900">
+              <a:spcBef>
+                <a:spcPts val="760"/>
+              </a:spcBef>
+              <a:buClr>
+                <a:srgbClr val="8A1524"/>
+              </a:buClr>
+              <a:buFont typeface="Arial"/>
+              <a:buChar char="–"/>
+            </a:pPr>
+            <a:r>
+              <a:rPr lang="en-US" sz="1500" dirty="0">
+                <a:solidFill>
+                  <a:srgbClr val="3F3F4A"/>
+                </a:solidFill>
+                <a:latin typeface="Georgia"/>
               </a:rPr>
               <a:t>Scoped retrieval preserves diversity; plug-in registry for new specialties</a:t>
             </a:r>
@@ -4560,16 +4378,16 @@
       </p:sp>
       <p:sp>
         <p:nvSpPr>
-          <p:cNvPr id="15" name="footer"/>
-          <p:cNvSpPr>
-            <a:spLocks noGrp="1"/>
-          </p:cNvSpPr>
-          <p:nvPr/>
-        </p:nvSpPr>
-        <p:spPr>
-          <a:xfrm>
-            <a:off x="640000" y="6400000"/>
-            <a:ext cx="9000000" cy="380000"/>
+          <p:cNvPr id="14" name="footer"/>
+          <p:cNvSpPr>
+            <a:spLocks noGrp="1"/>
+          </p:cNvSpPr>
+          <p:nvPr/>
+        </p:nvSpPr>
+        <p:spPr>
+          <a:xfrm>
+            <a:off x="640000" y="6420000"/>
+            <a:ext cx="10000000" cy="360000"/>
           </a:xfrm>
           <a:prstGeom prst="rect">
             <a:avLst/>
@@ -4587,13 +4405,13 @@
               </a:spcBef>
             </a:pPr>
             <a:r>
-              <a:rPr lang="en-US" sz="1000" dirty="0">
-                <a:solidFill>
-                  <a:srgbClr val="65799A"/>
+              <a:rPr lang="en-US" sz="950" dirty="0">
+                <a:solidFill>
+                  <a:srgbClr val="8A8A96"/>
                 </a:solidFill>
                 <a:latin typeface="Consolas"/>
               </a:rPr>
-              <a:t>MedJar  ·  05 / 18  ·  assistive decision-support — not autonomous</a:t>
+              <a:t>MedJar   ·   05 / 18   ·   assistive decision-support, not an autonomous device</a:t>
             </a:r>
           </a:p>
         </p:txBody>
@@ -4612,7 +4430,7 @@
     <p:bg>
       <p:bgPr>
         <a:solidFill>
-          <a:srgbClr val="070B14"/>
+          <a:srgbClr val="F6F4EE"/>
         </a:solidFill>
         <a:effectLst/>
       </p:bgPr>
@@ -4633,14 +4451,14 @@
       </p:grpSpPr>
       <p:sp>
         <p:nvSpPr>
-          <p:cNvPr id="10" name="accent"/>
+          <p:cNvPr id="10" name="rule"/>
           <p:cNvSpPr/>
           <p:nvPr/>
         </p:nvSpPr>
         <p:spPr>
           <a:xfrm>
-            <a:off x="0" y="0"/>
-            <a:ext cx="12192000" cy="68580"/>
+            <a:off x="640000" y="1030000"/>
+            <a:ext cx="620000" cy="34000"/>
           </a:xfrm>
           <a:prstGeom prst="roundRect">
             <a:avLst>
@@ -4648,7 +4466,7 @@
             </a:avLst>
           </a:prstGeom>
           <a:solidFill>
-            <a:srgbClr val="2FE0C8"/>
+            <a:srgbClr val="8A1524"/>
           </a:solidFill>
           <a:ln>
             <a:noFill/>
@@ -4662,45 +4480,16 @@
       </p:sp>
       <p:sp>
         <p:nvSpPr>
-          <p:cNvPr id="11" name="sidebar"/>
-          <p:cNvSpPr/>
-          <p:nvPr/>
-        </p:nvSpPr>
-        <p:spPr>
-          <a:xfrm>
-            <a:off x="11330000" y="500000"/>
-            <a:ext cx="45720" cy="5800000"/>
-          </a:xfrm>
-          <a:prstGeom prst="roundRect">
-            <a:avLst>
-              <a:gd name="adj" fmla="val 6000"/>
-            </a:avLst>
-          </a:prstGeom>
-          <a:solidFill>
-            <a:srgbClr val="4C8DFF"/>
-          </a:solidFill>
-          <a:ln>
-            <a:noFill/>
-          </a:ln>
-        </p:spPr>
-        <p:txBody>
-          <a:bodyPr/>
-          <a:lstStyle/>
-          <a:p/>
-        </p:txBody>
-      </p:sp>
-      <p:sp>
-        <p:nvSpPr>
-          <p:cNvPr id="12" name="kicker"/>
-          <p:cNvSpPr>
-            <a:spLocks noGrp="1"/>
-          </p:cNvSpPr>
-          <p:nvPr/>
-        </p:nvSpPr>
-        <p:spPr>
-          <a:xfrm>
-            <a:off x="640000" y="520000"/>
-            <a:ext cx="9000000" cy="500000"/>
+          <p:cNvPr id="11" name="kicker"/>
+          <p:cNvSpPr>
+            <a:spLocks noGrp="1"/>
+          </p:cNvSpPr>
+          <p:nvPr/>
+        </p:nvSpPr>
+        <p:spPr>
+          <a:xfrm>
+            <a:off x="640000" y="540000"/>
+            <a:ext cx="10000000" cy="460000"/>
           </a:xfrm>
           <a:prstGeom prst="rect">
             <a:avLst/>
@@ -4718,9 +4507,9 @@
               </a:spcBef>
             </a:pPr>
             <a:r>
-              <a:rPr lang="en-US" sz="1300" b="1" dirty="0">
-                <a:solidFill>
-                  <a:srgbClr val="2FE0C8"/>
+              <a:rPr lang="en-US" sz="1150" b="1" dirty="0">
+                <a:solidFill>
+                  <a:srgbClr val="8A1524"/>
                 </a:solidFill>
                 <a:latin typeface="Consolas"/>
               </a:rPr>
@@ -4731,16 +4520,16 @@
       </p:sp>
       <p:sp>
         <p:nvSpPr>
-          <p:cNvPr id="13" name="title"/>
-          <p:cNvSpPr>
-            <a:spLocks noGrp="1"/>
-          </p:cNvSpPr>
-          <p:nvPr/>
-        </p:nvSpPr>
-        <p:spPr>
-          <a:xfrm>
-            <a:off x="640000" y="980000"/>
-            <a:ext cx="10600000" cy="1300000"/>
+          <p:cNvPr id="12" name="title"/>
+          <p:cNvSpPr>
+            <a:spLocks noGrp="1"/>
+          </p:cNvSpPr>
+          <p:nvPr/>
+        </p:nvSpPr>
+        <p:spPr>
+          <a:xfrm>
+            <a:off x="630000" y="1120000"/>
+            <a:ext cx="10800000" cy="1200000"/>
           </a:xfrm>
           <a:prstGeom prst="rect">
             <a:avLst/>
@@ -4758,11 +4547,11 @@
               </a:spcBef>
             </a:pPr>
             <a:r>
-              <a:rPr lang="en-US" sz="3200" b="1" dirty="0">
-                <a:solidFill>
-                  <a:srgbClr val="E9F1FF"/>
-                </a:solidFill>
-                <a:latin typeface="Segoe UI"/>
+              <a:rPr lang="en-US" sz="3000" b="1" dirty="0">
+                <a:solidFill>
+                  <a:srgbClr val="1B1B22"/>
+                </a:solidFill>
+                <a:latin typeface="Georgia"/>
               </a:rPr>
               <a:t>Every turn is structured, never free prose</a:t>
             </a:r>
@@ -4771,7 +4560,7 @@
       </p:sp>
       <p:sp>
         <p:nvSpPr>
-          <p:cNvPr id="14" name="body"/>
+          <p:cNvPr id="13" name="body"/>
           <p:cNvSpPr>
             <a:spLocks noGrp="1"/>
           </p:cNvSpPr>
@@ -4780,103 +4569,118 @@
         <p:spPr>
           <a:xfrm>
             <a:off x="700000" y="2650000"/>
-            <a:ext cx="10400000" cy="3600000"/>
-          </a:xfrm>
-          <a:prstGeom prst="rect">
-            <a:avLst/>
-          </a:prstGeom>
-        </p:spPr>
-        <p:txBody>
-          <a:bodyPr wrap="square" rtlCol="0">
-            <a:normAutofit/>
-          </a:bodyPr>
-          <a:lstStyle/>
-          <a:p>
-            <a:pPr marL="285750" indent="-285750">
-              <a:spcBef>
-                <a:spcPts val="700"/>
-              </a:spcBef>
-              <a:buFont typeface="Arial"/>
-              <a:buChar char="•"/>
-            </a:pPr>
-            <a:r>
-              <a:rPr lang="en-US" sz="1600" dirty="0">
-                <a:solidFill>
-                  <a:srgbClr val="9FB2CF"/>
-                </a:solidFill>
-                <a:latin typeface="Segoe UI"/>
+            <a:ext cx="10600000" cy="3400000"/>
+          </a:xfrm>
+          <a:prstGeom prst="rect">
+            <a:avLst/>
+          </a:prstGeom>
+        </p:spPr>
+        <p:txBody>
+          <a:bodyPr wrap="square" rtlCol="0">
+            <a:normAutofit/>
+          </a:bodyPr>
+          <a:lstStyle/>
+          <a:p>
+            <a:pPr marL="342900" indent="-342900">
+              <a:spcBef>
+                <a:spcPts val="760"/>
+              </a:spcBef>
+              <a:buClr>
+                <a:srgbClr val="8A1524"/>
+              </a:buClr>
+              <a:buFont typeface="Arial"/>
+              <a:buChar char="–"/>
+            </a:pPr>
+            <a:r>
+              <a:rPr lang="en-US" sz="1500" dirty="0">
+                <a:solidFill>
+                  <a:srgbClr val="3F3F4A"/>
+                </a:solidFill>
+                <a:latin typeface="Georgia"/>
               </a:rPr>
               <a:t>Agents return: differential[] with likelihood + cited evidence</a:t>
             </a:r>
           </a:p>
           <a:p>
-            <a:pPr marL="285750" indent="-285750">
-              <a:spcBef>
-                <a:spcPts val="700"/>
-              </a:spcBef>
-              <a:buFont typeface="Arial"/>
-              <a:buChar char="•"/>
-            </a:pPr>
-            <a:r>
-              <a:rPr lang="en-US" sz="1600" dirty="0">
-                <a:solidFill>
-                  <a:srgbClr val="9FB2CF"/>
-                </a:solidFill>
-                <a:latin typeface="Segoe UI"/>
+            <a:pPr marL="342900" indent="-342900">
+              <a:spcBef>
+                <a:spcPts val="760"/>
+              </a:spcBef>
+              <a:buClr>
+                <a:srgbClr val="8A1524"/>
+              </a:buClr>
+              <a:buFont typeface="Arial"/>
+              <a:buChar char="–"/>
+            </a:pPr>
+            <a:r>
+              <a:rPr lang="en-US" sz="1500" dirty="0">
+                <a:solidFill>
+                  <a:srgbClr val="3F3F4A"/>
+                </a:solidFill>
+                <a:latin typeface="Georgia"/>
               </a:rPr>
               <a:t>supporting_evidence / refuting_evidence -&gt; citation_id</a:t>
             </a:r>
           </a:p>
           <a:p>
-            <a:pPr marL="285750" indent="-285750">
-              <a:spcBef>
-                <a:spcPts val="700"/>
-              </a:spcBef>
-              <a:buFont typeface="Arial"/>
-              <a:buChar char="•"/>
-            </a:pPr>
-            <a:r>
-              <a:rPr lang="en-US" sz="1600" dirty="0">
-                <a:solidFill>
-                  <a:srgbClr val="9FB2CF"/>
-                </a:solidFill>
-                <a:latin typeface="Segoe UI"/>
+            <a:pPr marL="342900" indent="-342900">
+              <a:spcBef>
+                <a:spcPts val="760"/>
+              </a:spcBef>
+              <a:buClr>
+                <a:srgbClr val="8A1524"/>
+              </a:buClr>
+              <a:buFont typeface="Arial"/>
+              <a:buChar char="–"/>
+            </a:pPr>
+            <a:r>
+              <a:rPr lang="en-US" sz="1500" dirty="0">
+                <a:solidFill>
+                  <a:srgbClr val="3F3F4A"/>
+                </a:solidFill>
+                <a:latin typeface="Georgia"/>
               </a:rPr>
               <a:t>discriminating_test — what most changes the probabilities</a:t>
             </a:r>
           </a:p>
           <a:p>
-            <a:pPr marL="285750" indent="-285750">
-              <a:spcBef>
-                <a:spcPts val="700"/>
-              </a:spcBef>
-              <a:buFont typeface="Arial"/>
-              <a:buChar char="•"/>
-            </a:pPr>
-            <a:r>
-              <a:rPr lang="en-US" sz="1600" dirty="0">
-                <a:solidFill>
-                  <a:srgbClr val="9FB2CF"/>
-                </a:solidFill>
-                <a:latin typeface="Segoe UI"/>
+            <a:pPr marL="342900" indent="-342900">
+              <a:spcBef>
+                <a:spcPts val="760"/>
+              </a:spcBef>
+              <a:buClr>
+                <a:srgbClr val="8A1524"/>
+              </a:buClr>
+              <a:buFont typeface="Arial"/>
+              <a:buChar char="–"/>
+            </a:pPr>
+            <a:r>
+              <a:rPr lang="en-US" sz="1500" dirty="0">
+                <a:solidFill>
+                  <a:srgbClr val="3F3F4A"/>
+                </a:solidFill>
+                <a:latin typeface="Georgia"/>
               </a:rPr>
               <a:t>red_flags[], calibrated confidence, requests[] (retrieve / ask-human)</a:t>
             </a:r>
           </a:p>
           <a:p>
-            <a:pPr marL="285750" indent="-285750">
-              <a:spcBef>
-                <a:spcPts val="700"/>
-              </a:spcBef>
-              <a:buFont typeface="Arial"/>
-              <a:buChar char="•"/>
-            </a:pPr>
-            <a:r>
-              <a:rPr lang="en-US" sz="1600" dirty="0">
-                <a:solidFill>
-                  <a:srgbClr val="9FB2CF"/>
-                </a:solidFill>
-                <a:latin typeface="Segoe UI"/>
+            <a:pPr marL="342900" indent="-342900">
+              <a:spcBef>
+                <a:spcPts val="760"/>
+              </a:spcBef>
+              <a:buClr>
+                <a:srgbClr val="8A1524"/>
+              </a:buClr>
+              <a:buFont typeface="Arial"/>
+              <a:buChar char="–"/>
+            </a:pPr>
+            <a:r>
+              <a:rPr lang="en-US" sz="1500" dirty="0">
+                <a:solidFill>
+                  <a:srgbClr val="3F3F4A"/>
+                </a:solidFill>
+                <a:latin typeface="Georgia"/>
               </a:rPr>
               <a:t>Groundedness verifier rejects ungrounded claims before the debate</a:t>
             </a:r>
@@ -4885,16 +4689,16 @@
       </p:sp>
       <p:sp>
         <p:nvSpPr>
-          <p:cNvPr id="15" name="footer"/>
-          <p:cNvSpPr>
-            <a:spLocks noGrp="1"/>
-          </p:cNvSpPr>
-          <p:nvPr/>
-        </p:nvSpPr>
-        <p:spPr>
-          <a:xfrm>
-            <a:off x="640000" y="6400000"/>
-            <a:ext cx="9000000" cy="380000"/>
+          <p:cNvPr id="14" name="footer"/>
+          <p:cNvSpPr>
+            <a:spLocks noGrp="1"/>
+          </p:cNvSpPr>
+          <p:nvPr/>
+        </p:nvSpPr>
+        <p:spPr>
+          <a:xfrm>
+            <a:off x="640000" y="6420000"/>
+            <a:ext cx="10000000" cy="360000"/>
           </a:xfrm>
           <a:prstGeom prst="rect">
             <a:avLst/>
@@ -4912,13 +4716,13 @@
               </a:spcBef>
             </a:pPr>
             <a:r>
-              <a:rPr lang="en-US" sz="1000" dirty="0">
-                <a:solidFill>
-                  <a:srgbClr val="65799A"/>
+              <a:rPr lang="en-US" sz="950" dirty="0">
+                <a:solidFill>
+                  <a:srgbClr val="8A8A96"/>
                 </a:solidFill>
                 <a:latin typeface="Consolas"/>
               </a:rPr>
-              <a:t>MedJar  ·  06 / 18  ·  assistive decision-support — not autonomous</a:t>
+              <a:t>MedJar   ·   06 / 18   ·   assistive decision-support, not an autonomous device</a:t>
             </a:r>
           </a:p>
         </p:txBody>
@@ -4937,7 +4741,7 @@
     <p:bg>
       <p:bgPr>
         <a:solidFill>
-          <a:srgbClr val="070B14"/>
+          <a:srgbClr val="F6F4EE"/>
         </a:solidFill>
         <a:effectLst/>
       </p:bgPr>
@@ -4958,14 +4762,14 @@
       </p:grpSpPr>
       <p:sp>
         <p:nvSpPr>
-          <p:cNvPr id="10" name="accent"/>
+          <p:cNvPr id="10" name="rule"/>
           <p:cNvSpPr/>
           <p:nvPr/>
         </p:nvSpPr>
         <p:spPr>
           <a:xfrm>
-            <a:off x="0" y="0"/>
-            <a:ext cx="12192000" cy="68580"/>
+            <a:off x="640000" y="1030000"/>
+            <a:ext cx="620000" cy="34000"/>
           </a:xfrm>
           <a:prstGeom prst="roundRect">
             <a:avLst>
@@ -4973,7 +4777,7 @@
             </a:avLst>
           </a:prstGeom>
           <a:solidFill>
-            <a:srgbClr val="2FE0C8"/>
+            <a:srgbClr val="8A1524"/>
           </a:solidFill>
           <a:ln>
             <a:noFill/>
@@ -4987,45 +4791,16 @@
       </p:sp>
       <p:sp>
         <p:nvSpPr>
-          <p:cNvPr id="11" name="sidebar"/>
-          <p:cNvSpPr/>
-          <p:nvPr/>
-        </p:nvSpPr>
-        <p:spPr>
-          <a:xfrm>
-            <a:off x="11330000" y="500000"/>
-            <a:ext cx="45720" cy="5800000"/>
-          </a:xfrm>
-          <a:prstGeom prst="roundRect">
-            <a:avLst>
-              <a:gd name="adj" fmla="val 6000"/>
-            </a:avLst>
-          </a:prstGeom>
-          <a:solidFill>
-            <a:srgbClr val="4C8DFF"/>
-          </a:solidFill>
-          <a:ln>
-            <a:noFill/>
-          </a:ln>
-        </p:spPr>
-        <p:txBody>
-          <a:bodyPr/>
-          <a:lstStyle/>
-          <a:p/>
-        </p:txBody>
-      </p:sp>
-      <p:sp>
-        <p:nvSpPr>
-          <p:cNvPr id="12" name="kicker"/>
-          <p:cNvSpPr>
-            <a:spLocks noGrp="1"/>
-          </p:cNvSpPr>
-          <p:nvPr/>
-        </p:nvSpPr>
-        <p:spPr>
-          <a:xfrm>
-            <a:off x="640000" y="520000"/>
-            <a:ext cx="9000000" cy="500000"/>
+          <p:cNvPr id="11" name="kicker"/>
+          <p:cNvSpPr>
+            <a:spLocks noGrp="1"/>
+          </p:cNvSpPr>
+          <p:nvPr/>
+        </p:nvSpPr>
+        <p:spPr>
+          <a:xfrm>
+            <a:off x="640000" y="540000"/>
+            <a:ext cx="10000000" cy="460000"/>
           </a:xfrm>
           <a:prstGeom prst="rect">
             <a:avLst/>
@@ -5043,9 +4818,9 @@
               </a:spcBef>
             </a:pPr>
             <a:r>
-              <a:rPr lang="en-US" sz="1300" b="1" dirty="0">
-                <a:solidFill>
-                  <a:srgbClr val="2FE0C8"/>
+              <a:rPr lang="en-US" sz="1150" b="1" dirty="0">
+                <a:solidFill>
+                  <a:srgbClr val="8A1524"/>
                 </a:solidFill>
                 <a:latin typeface="Consolas"/>
               </a:rPr>
@@ -5056,16 +4831,16 @@
       </p:sp>
       <p:sp>
         <p:nvSpPr>
-          <p:cNvPr id="13" name="title"/>
-          <p:cNvSpPr>
-            <a:spLocks noGrp="1"/>
-          </p:cNvSpPr>
-          <p:nvPr/>
-        </p:nvSpPr>
-        <p:spPr>
-          <a:xfrm>
-            <a:off x="640000" y="980000"/>
-            <a:ext cx="10600000" cy="1300000"/>
+          <p:cNvPr id="12" name="title"/>
+          <p:cNvSpPr>
+            <a:spLocks noGrp="1"/>
+          </p:cNvSpPr>
+          <p:nvPr/>
+        </p:nvSpPr>
+        <p:spPr>
+          <a:xfrm>
+            <a:off x="630000" y="1120000"/>
+            <a:ext cx="10800000" cy="1200000"/>
           </a:xfrm>
           <a:prstGeom prst="rect">
             <a:avLst/>
@@ -5083,11 +4858,11 @@
               </a:spcBef>
             </a:pPr>
             <a:r>
-              <a:rPr lang="en-US" sz="3200" b="1" dirty="0">
-                <a:solidFill>
-                  <a:srgbClr val="E9F1FF"/>
-                </a:solidFill>
-                <a:latin typeface="Segoe UI"/>
+              <a:rPr lang="en-US" sz="3000" b="1" dirty="0">
+                <a:solidFill>
+                  <a:srgbClr val="1B1B22"/>
+                </a:solidFill>
+                <a:latin typeface="Georgia"/>
               </a:rPr>
               <a:t>Hybrid retrieval -&gt; re-rank -&gt; cite</a:t>
             </a:r>
@@ -5096,7 +4871,7 @@
       </p:sp>
       <p:sp>
         <p:nvSpPr>
-          <p:cNvPr id="14" name="body"/>
+          <p:cNvPr id="13" name="body"/>
           <p:cNvSpPr>
             <a:spLocks noGrp="1"/>
           </p:cNvSpPr>
@@ -5105,103 +4880,118 @@
         <p:spPr>
           <a:xfrm>
             <a:off x="700000" y="2650000"/>
-            <a:ext cx="10400000" cy="3600000"/>
-          </a:xfrm>
-          <a:prstGeom prst="rect">
-            <a:avLst/>
-          </a:prstGeom>
-        </p:spPr>
-        <p:txBody>
-          <a:bodyPr wrap="square" rtlCol="0">
-            <a:normAutofit/>
-          </a:bodyPr>
-          <a:lstStyle/>
-          <a:p>
-            <a:pPr marL="285750" indent="-285750">
-              <a:spcBef>
-                <a:spcPts val="700"/>
-              </a:spcBef>
-              <a:buFont typeface="Arial"/>
-              <a:buChar char="•"/>
-            </a:pPr>
-            <a:r>
-              <a:rPr lang="en-US" sz="1600" dirty="0">
-                <a:solidFill>
-                  <a:srgbClr val="9FB2CF"/>
-                </a:solidFill>
-                <a:latin typeface="Segoe UI"/>
+            <a:ext cx="10600000" cy="3400000"/>
+          </a:xfrm>
+          <a:prstGeom prst="rect">
+            <a:avLst/>
+          </a:prstGeom>
+        </p:spPr>
+        <p:txBody>
+          <a:bodyPr wrap="square" rtlCol="0">
+            <a:normAutofit/>
+          </a:bodyPr>
+          <a:lstStyle/>
+          <a:p>
+            <a:pPr marL="342900" indent="-342900">
+              <a:spcBef>
+                <a:spcPts val="760"/>
+              </a:spcBef>
+              <a:buClr>
+                <a:srgbClr val="8A1524"/>
+              </a:buClr>
+              <a:buFont typeface="Arial"/>
+              <a:buChar char="–"/>
+            </a:pPr>
+            <a:r>
+              <a:rPr lang="en-US" sz="1500" dirty="0">
+                <a:solidFill>
+                  <a:srgbClr val="3F3F4A"/>
+                </a:solidFill>
+                <a:latin typeface="Georgia"/>
               </a:rPr>
               <a:t>Dense (vector, cosine) + Sparse (BM25 exact terms, drugs, genes)</a:t>
             </a:r>
           </a:p>
           <a:p>
-            <a:pPr marL="285750" indent="-285750">
-              <a:spcBef>
-                <a:spcPts val="700"/>
-              </a:spcBef>
-              <a:buFont typeface="Arial"/>
-              <a:buChar char="•"/>
-            </a:pPr>
-            <a:r>
-              <a:rPr lang="en-US" sz="1600" dirty="0">
-                <a:solidFill>
-                  <a:srgbClr val="9FB2CF"/>
-                </a:solidFill>
-                <a:latin typeface="Segoe UI"/>
+            <a:pPr marL="342900" indent="-342900">
+              <a:spcBef>
+                <a:spcPts val="760"/>
+              </a:spcBef>
+              <a:buClr>
+                <a:srgbClr val="8A1524"/>
+              </a:buClr>
+              <a:buFont typeface="Arial"/>
+              <a:buChar char="–"/>
+            </a:pPr>
+            <a:r>
+              <a:rPr lang="en-US" sz="1500" dirty="0">
+                <a:solidFill>
+                  <a:srgbClr val="3F3F4A"/>
+                </a:solidFill>
+                <a:latin typeface="Georgia"/>
               </a:rPr>
               <a:t>Reciprocal Rank Fusion:  RRF(d) = Sum 1 / (k + rank_r(d)),  k ~ 60</a:t>
             </a:r>
           </a:p>
           <a:p>
-            <a:pPr marL="285750" indent="-285750">
-              <a:spcBef>
-                <a:spcPts val="700"/>
-              </a:spcBef>
-              <a:buFont typeface="Arial"/>
-              <a:buChar char="•"/>
-            </a:pPr>
-            <a:r>
-              <a:rPr lang="en-US" sz="1600" dirty="0">
-                <a:solidFill>
-                  <a:srgbClr val="9FB2CF"/>
-                </a:solidFill>
-                <a:latin typeface="Segoe UI"/>
+            <a:pPr marL="342900" indent="-342900">
+              <a:spcBef>
+                <a:spcPts val="760"/>
+              </a:spcBef>
+              <a:buClr>
+                <a:srgbClr val="8A1524"/>
+              </a:buClr>
+              <a:buFont typeface="Arial"/>
+              <a:buChar char="–"/>
+            </a:pPr>
+            <a:r>
+              <a:rPr lang="en-US" sz="1500" dirty="0">
+                <a:solidFill>
+                  <a:srgbClr val="3F3F4A"/>
+                </a:solidFill>
+                <a:latin typeface="Georgia"/>
               </a:rPr>
               <a:t>Cross-encoder re-ranking for precision on top-N</a:t>
             </a:r>
           </a:p>
           <a:p>
-            <a:pPr marL="285750" indent="-285750">
-              <a:spcBef>
-                <a:spcPts val="700"/>
-              </a:spcBef>
-              <a:buFont typeface="Arial"/>
-              <a:buChar char="•"/>
-            </a:pPr>
-            <a:r>
-              <a:rPr lang="en-US" sz="1600" dirty="0">
-                <a:solidFill>
-                  <a:srgbClr val="9FB2CF"/>
-                </a:solidFill>
-                <a:latin typeface="Segoe UI"/>
+            <a:pPr marL="342900" indent="-342900">
+              <a:spcBef>
+                <a:spcPts val="760"/>
+              </a:spcBef>
+              <a:buClr>
+                <a:srgbClr val="8A1524"/>
+              </a:buClr>
+              <a:buFont typeface="Arial"/>
+              <a:buChar char="–"/>
+            </a:pPr>
+            <a:r>
+              <a:rPr lang="en-US" sz="1500" dirty="0">
+                <a:solidFill>
+                  <a:srgbClr val="3F3F4A"/>
+                </a:solidFill>
+                <a:latin typeface="Georgia"/>
               </a:rPr>
               <a:t>NLI groundedness check; provenance -&gt; Evidence Ledger</a:t>
             </a:r>
           </a:p>
           <a:p>
-            <a:pPr marL="285750" indent="-285750">
-              <a:spcBef>
-                <a:spcPts val="700"/>
-              </a:spcBef>
-              <a:buFont typeface="Arial"/>
-              <a:buChar char="•"/>
-            </a:pPr>
-            <a:r>
-              <a:rPr lang="en-US" sz="1600" dirty="0">
-                <a:solidFill>
-                  <a:srgbClr val="9FB2CF"/>
-                </a:solidFill>
-                <a:latin typeface="Segoe UI"/>
+            <a:pPr marL="342900" indent="-342900">
+              <a:spcBef>
+                <a:spcPts val="760"/>
+              </a:spcBef>
+              <a:buClr>
+                <a:srgbClr val="8A1524"/>
+              </a:buClr>
+              <a:buFont typeface="Arial"/>
+              <a:buChar char="–"/>
+            </a:pPr>
+            <a:r>
+              <a:rPr lang="en-US" sz="1500" dirty="0">
+                <a:solidFill>
+                  <a:srgbClr val="3F3F4A"/>
+                </a:solidFill>
+                <a:latin typeface="Georgia"/>
               </a:rPr>
               <a:t>Versioned corpus + ICD-10 / SNOMED CT / LOINC / RxNorm</a:t>
             </a:r>
@@ -5210,16 +5000,16 @@
       </p:sp>
       <p:sp>
         <p:nvSpPr>
-          <p:cNvPr id="15" name="footer"/>
-          <p:cNvSpPr>
-            <a:spLocks noGrp="1"/>
-          </p:cNvSpPr>
-          <p:nvPr/>
-        </p:nvSpPr>
-        <p:spPr>
-          <a:xfrm>
-            <a:off x="640000" y="6400000"/>
-            <a:ext cx="9000000" cy="380000"/>
+          <p:cNvPr id="14" name="footer"/>
+          <p:cNvSpPr>
+            <a:spLocks noGrp="1"/>
+          </p:cNvSpPr>
+          <p:nvPr/>
+        </p:nvSpPr>
+        <p:spPr>
+          <a:xfrm>
+            <a:off x="640000" y="6420000"/>
+            <a:ext cx="10000000" cy="360000"/>
           </a:xfrm>
           <a:prstGeom prst="rect">
             <a:avLst/>
@@ -5237,13 +5027,13 @@
               </a:spcBef>
             </a:pPr>
             <a:r>
-              <a:rPr lang="en-US" sz="1000" dirty="0">
-                <a:solidFill>
-                  <a:srgbClr val="65799A"/>
+              <a:rPr lang="en-US" sz="950" dirty="0">
+                <a:solidFill>
+                  <a:srgbClr val="8A8A96"/>
                 </a:solidFill>
                 <a:latin typeface="Consolas"/>
               </a:rPr>
-              <a:t>MedJar  ·  07 / 18  ·  assistive decision-support — not autonomous</a:t>
+              <a:t>MedJar   ·   07 / 18   ·   assistive decision-support, not an autonomous device</a:t>
             </a:r>
           </a:p>
         </p:txBody>
@@ -5262,7 +5052,7 @@
     <p:bg>
       <p:bgPr>
         <a:solidFill>
-          <a:srgbClr val="070B14"/>
+          <a:srgbClr val="F6F4EE"/>
         </a:solidFill>
         <a:effectLst/>
       </p:bgPr>
@@ -5283,14 +5073,14 @@
       </p:grpSpPr>
       <p:sp>
         <p:nvSpPr>
-          <p:cNvPr id="10" name="accent"/>
+          <p:cNvPr id="10" name="rule"/>
           <p:cNvSpPr/>
           <p:nvPr/>
         </p:nvSpPr>
         <p:spPr>
           <a:xfrm>
-            <a:off x="0" y="0"/>
-            <a:ext cx="12192000" cy="68580"/>
+            <a:off x="640000" y="1030000"/>
+            <a:ext cx="620000" cy="34000"/>
           </a:xfrm>
           <a:prstGeom prst="roundRect">
             <a:avLst>
@@ -5298,7 +5088,7 @@
             </a:avLst>
           </a:prstGeom>
           <a:solidFill>
-            <a:srgbClr val="2FE0C8"/>
+            <a:srgbClr val="8A1524"/>
           </a:solidFill>
           <a:ln>
             <a:noFill/>
@@ -5312,45 +5102,16 @@
       </p:sp>
       <p:sp>
         <p:nvSpPr>
-          <p:cNvPr id="11" name="sidebar"/>
-          <p:cNvSpPr/>
-          <p:nvPr/>
-        </p:nvSpPr>
-        <p:spPr>
-          <a:xfrm>
-            <a:off x="11330000" y="500000"/>
-            <a:ext cx="45720" cy="5800000"/>
-          </a:xfrm>
-          <a:prstGeom prst="roundRect">
-            <a:avLst>
-              <a:gd name="adj" fmla="val 6000"/>
-            </a:avLst>
-          </a:prstGeom>
-          <a:solidFill>
-            <a:srgbClr val="4C8DFF"/>
-          </a:solidFill>
-          <a:ln>
-            <a:noFill/>
-          </a:ln>
-        </p:spPr>
-        <p:txBody>
-          <a:bodyPr/>
-          <a:lstStyle/>
-          <a:p/>
-        </p:txBody>
-      </p:sp>
-      <p:sp>
-        <p:nvSpPr>
-          <p:cNvPr id="12" name="kicker"/>
-          <p:cNvSpPr>
-            <a:spLocks noGrp="1"/>
-          </p:cNvSpPr>
-          <p:nvPr/>
-        </p:nvSpPr>
-        <p:spPr>
-          <a:xfrm>
-            <a:off x="640000" y="520000"/>
-            <a:ext cx="9000000" cy="500000"/>
+          <p:cNvPr id="11" name="kicker"/>
+          <p:cNvSpPr>
+            <a:spLocks noGrp="1"/>
+          </p:cNvSpPr>
+          <p:nvPr/>
+        </p:nvSpPr>
+        <p:spPr>
+          <a:xfrm>
+            <a:off x="640000" y="540000"/>
+            <a:ext cx="10000000" cy="460000"/>
           </a:xfrm>
           <a:prstGeom prst="rect">
             <a:avLst/>
@@ -5368,9 +5129,9 @@
               </a:spcBef>
             </a:pPr>
             <a:r>
-              <a:rPr lang="en-US" sz="1300" b="1" dirty="0">
-                <a:solidFill>
-                  <a:srgbClr val="2FE0C8"/>
+              <a:rPr lang="en-US" sz="1150" b="1" dirty="0">
+                <a:solidFill>
+                  <a:srgbClr val="8A1524"/>
                 </a:solidFill>
                 <a:latin typeface="Consolas"/>
               </a:rPr>
@@ -5381,16 +5142,16 @@
       </p:sp>
       <p:sp>
         <p:nvSpPr>
-          <p:cNvPr id="13" name="title"/>
-          <p:cNvSpPr>
-            <a:spLocks noGrp="1"/>
-          </p:cNvSpPr>
-          <p:nvPr/>
-        </p:nvSpPr>
-        <p:spPr>
-          <a:xfrm>
-            <a:off x="640000" y="980000"/>
-            <a:ext cx="10600000" cy="1300000"/>
+          <p:cNvPr id="12" name="title"/>
+          <p:cNvSpPr>
+            <a:spLocks noGrp="1"/>
+          </p:cNvSpPr>
+          <p:nvPr/>
+        </p:nvSpPr>
+        <p:spPr>
+          <a:xfrm>
+            <a:off x="630000" y="1120000"/>
+            <a:ext cx="10800000" cy="1200000"/>
           </a:xfrm>
           <a:prstGeom prst="rect">
             <a:avLst/>
@@ -5408,11 +5169,11 @@
               </a:spcBef>
             </a:pPr>
             <a:r>
-              <a:rPr lang="en-US" sz="3200" b="1" dirty="0">
-                <a:solidFill>
-                  <a:srgbClr val="E9F1FF"/>
-                </a:solidFill>
-                <a:latin typeface="Segoe UI"/>
+              <a:rPr lang="en-US" sz="3000" b="1" dirty="0">
+                <a:solidFill>
+                  <a:srgbClr val="1B1B22"/>
+                </a:solidFill>
+                <a:latin typeface="Georgia"/>
               </a:rPr>
               <a:t>Propose -&gt; Critique -&gt; Rebut -&gt; Converge</a:t>
             </a:r>
@@ -5421,7 +5182,7 @@
       </p:sp>
       <p:sp>
         <p:nvSpPr>
-          <p:cNvPr id="14" name="body"/>
+          <p:cNvPr id="13" name="body"/>
           <p:cNvSpPr>
             <a:spLocks noGrp="1"/>
           </p:cNvSpPr>
@@ -5430,103 +5191,118 @@
         <p:spPr>
           <a:xfrm>
             <a:off x="700000" y="2650000"/>
-            <a:ext cx="10400000" cy="3600000"/>
-          </a:xfrm>
-          <a:prstGeom prst="rect">
-            <a:avLst/>
-          </a:prstGeom>
-        </p:spPr>
-        <p:txBody>
-          <a:bodyPr wrap="square" rtlCol="0">
-            <a:normAutofit/>
-          </a:bodyPr>
-          <a:lstStyle/>
-          <a:p>
-            <a:pPr marL="285750" indent="-285750">
-              <a:spcBef>
-                <a:spcPts val="700"/>
-              </a:spcBef>
-              <a:buFont typeface="Arial"/>
-              <a:buChar char="•"/>
-            </a:pPr>
-            <a:r>
-              <a:rPr lang="en-US" sz="1600" dirty="0">
-                <a:solidFill>
-                  <a:srgbClr val="9FB2CF"/>
-                </a:solidFill>
-                <a:latin typeface="Segoe UI"/>
+            <a:ext cx="10600000" cy="3400000"/>
+          </a:xfrm>
+          <a:prstGeom prst="rect">
+            <a:avLst/>
+          </a:prstGeom>
+        </p:spPr>
+        <p:txBody>
+          <a:bodyPr wrap="square" rtlCol="0">
+            <a:normAutofit/>
+          </a:bodyPr>
+          <a:lstStyle/>
+          <a:p>
+            <a:pPr marL="342900" indent="-342900">
+              <a:spcBef>
+                <a:spcPts val="760"/>
+              </a:spcBef>
+              <a:buClr>
+                <a:srgbClr val="8A1524"/>
+              </a:buClr>
+              <a:buFont typeface="Arial"/>
+              <a:buChar char="–"/>
+            </a:pPr>
+            <a:r>
+              <a:rPr lang="en-US" sz="1500" dirty="0">
+                <a:solidFill>
+                  <a:srgbClr val="3F3F4A"/>
+                </a:solidFill>
+                <a:latin typeface="Georgia"/>
               </a:rPr>
               <a:t>1 Propose — no cross-talk; independent differentials prevent anchoring</a:t>
             </a:r>
           </a:p>
           <a:p>
-            <a:pPr marL="285750" indent="-285750">
-              <a:spcBef>
-                <a:spcPts val="700"/>
-              </a:spcBef>
-              <a:buFont typeface="Arial"/>
-              <a:buChar char="•"/>
-            </a:pPr>
-            <a:r>
-              <a:rPr lang="en-US" sz="1600" dirty="0">
-                <a:solidFill>
-                  <a:srgbClr val="9FB2CF"/>
-                </a:solidFill>
-                <a:latin typeface="Segoe UI"/>
+            <a:pPr marL="342900" indent="-342900">
+              <a:spcBef>
+                <a:spcPts val="760"/>
+              </a:spcBef>
+              <a:buClr>
+                <a:srgbClr val="8A1524"/>
+              </a:buClr>
+              <a:buFont typeface="Arial"/>
+              <a:buChar char="–"/>
+            </a:pPr>
+            <a:r>
+              <a:rPr lang="en-US" sz="1500" dirty="0">
+                <a:solidFill>
+                  <a:srgbClr val="3F3F4A"/>
+                </a:solidFill>
+                <a:latin typeface="Georgia"/>
               </a:rPr>
               <a:t>2 Critique — anonymized, adversarial, grounded attacks</a:t>
             </a:r>
           </a:p>
           <a:p>
-            <a:pPr marL="285750" indent="-285750">
-              <a:spcBef>
-                <a:spcPts val="700"/>
-              </a:spcBef>
-              <a:buFont typeface="Arial"/>
-              <a:buChar char="•"/>
-            </a:pPr>
-            <a:r>
-              <a:rPr lang="en-US" sz="1600" dirty="0">
-                <a:solidFill>
-                  <a:srgbClr val="9FB2CF"/>
-                </a:solidFill>
-                <a:latin typeface="Segoe UI"/>
+            <a:pPr marL="342900" indent="-342900">
+              <a:spcBef>
+                <a:spcPts val="760"/>
+              </a:spcBef>
+              <a:buClr>
+                <a:srgbClr val="8A1524"/>
+              </a:buClr>
+              <a:buFont typeface="Arial"/>
+              <a:buChar char="–"/>
+            </a:pPr>
+            <a:r>
+              <a:rPr lang="en-US" sz="1500" dirty="0">
+                <a:solidFill>
+                  <a:srgbClr val="3F3F4A"/>
+                </a:solidFill>
+                <a:latin typeface="Georgia"/>
               </a:rPr>
               <a:t>3 Rebut — revise; disagreement triggers targeted retrieval</a:t>
             </a:r>
           </a:p>
           <a:p>
-            <a:pPr marL="285750" indent="-285750">
-              <a:spcBef>
-                <a:spcPts val="700"/>
-              </a:spcBef>
-              <a:buFont typeface="Arial"/>
-              <a:buChar char="•"/>
-            </a:pPr>
-            <a:r>
-              <a:rPr lang="en-US" sz="1600" dirty="0">
-                <a:solidFill>
-                  <a:srgbClr val="9FB2CF"/>
-                </a:solidFill>
-                <a:latin typeface="Segoe UI"/>
+            <a:pPr marL="342900" indent="-342900">
+              <a:spcBef>
+                <a:spcPts val="760"/>
+              </a:spcBef>
+              <a:buClr>
+                <a:srgbClr val="8A1524"/>
+              </a:buClr>
+              <a:buFont typeface="Arial"/>
+              <a:buChar char="–"/>
+            </a:pPr>
+            <a:r>
+              <a:rPr lang="en-US" sz="1500" dirty="0">
+                <a:solidFill>
+                  <a:srgbClr val="3F3F4A"/>
+                </a:solidFill>
+                <a:latin typeface="Georgia"/>
               </a:rPr>
               <a:t>4 Converge — aggregate, loop, or escalate to a human</a:t>
             </a:r>
           </a:p>
           <a:p>
-            <a:pPr marL="285750" indent="-285750">
-              <a:spcBef>
-                <a:spcPts val="700"/>
-              </a:spcBef>
-              <a:buFont typeface="Arial"/>
-              <a:buChar char="•"/>
-            </a:pPr>
-            <a:r>
-              <a:rPr lang="en-US" sz="1600" dirty="0">
-                <a:solidFill>
-                  <a:srgbClr val="9FB2CF"/>
-                </a:solidFill>
-                <a:latin typeface="Segoe UI"/>
+            <a:pPr marL="342900" indent="-342900">
+              <a:spcBef>
+                <a:spcPts val="760"/>
+              </a:spcBef>
+              <a:buClr>
+                <a:srgbClr val="8A1524"/>
+              </a:buClr>
+              <a:buFont typeface="Arial"/>
+              <a:buChar char="–"/>
+            </a:pPr>
+            <a:r>
+              <a:rPr lang="en-US" sz="1500" dirty="0">
+                <a:solidFill>
+                  <a:srgbClr val="3F3F4A"/>
+                </a:solidFill>
+                <a:latin typeface="Georgia"/>
               </a:rPr>
               <a:t>Red-flag override: a minority can't-miss dx forces escalation</a:t>
             </a:r>
@@ -5535,16 +5311,16 @@
       </p:sp>
       <p:sp>
         <p:nvSpPr>
-          <p:cNvPr id="15" name="footer"/>
-          <p:cNvSpPr>
-            <a:spLocks noGrp="1"/>
-          </p:cNvSpPr>
-          <p:nvPr/>
-        </p:nvSpPr>
-        <p:spPr>
-          <a:xfrm>
-            <a:off x="640000" y="6400000"/>
-            <a:ext cx="9000000" cy="380000"/>
+          <p:cNvPr id="14" name="footer"/>
+          <p:cNvSpPr>
+            <a:spLocks noGrp="1"/>
+          </p:cNvSpPr>
+          <p:nvPr/>
+        </p:nvSpPr>
+        <p:spPr>
+          <a:xfrm>
+            <a:off x="640000" y="6420000"/>
+            <a:ext cx="10000000" cy="360000"/>
           </a:xfrm>
           <a:prstGeom prst="rect">
             <a:avLst/>
@@ -5562,13 +5338,13 @@
               </a:spcBef>
             </a:pPr>
             <a:r>
-              <a:rPr lang="en-US" sz="1000" dirty="0">
-                <a:solidFill>
-                  <a:srgbClr val="65799A"/>
+              <a:rPr lang="en-US" sz="950" dirty="0">
+                <a:solidFill>
+                  <a:srgbClr val="8A8A96"/>
                 </a:solidFill>
                 <a:latin typeface="Consolas"/>
               </a:rPr>
-              <a:t>MedJar  ·  08 / 18  ·  assistive decision-support — not autonomous</a:t>
+              <a:t>MedJar   ·   08 / 18   ·   assistive decision-support, not an autonomous device</a:t>
             </a:r>
           </a:p>
         </p:txBody>
@@ -5587,7 +5363,7 @@
     <p:bg>
       <p:bgPr>
         <a:solidFill>
-          <a:srgbClr val="070B14"/>
+          <a:srgbClr val="F6F4EE"/>
         </a:solidFill>
         <a:effectLst/>
       </p:bgPr>
@@ -5608,14 +5384,14 @@
       </p:grpSpPr>
       <p:sp>
         <p:nvSpPr>
-          <p:cNvPr id="10" name="accent"/>
+          <p:cNvPr id="10" name="rule"/>
           <p:cNvSpPr/>
           <p:nvPr/>
         </p:nvSpPr>
         <p:spPr>
           <a:xfrm>
-            <a:off x="0" y="0"/>
-            <a:ext cx="12192000" cy="68580"/>
+            <a:off x="640000" y="1030000"/>
+            <a:ext cx="620000" cy="34000"/>
           </a:xfrm>
           <a:prstGeom prst="roundRect">
             <a:avLst>
@@ -5623,7 +5399,7 @@
             </a:avLst>
           </a:prstGeom>
           <a:solidFill>
-            <a:srgbClr val="2FE0C8"/>
+            <a:srgbClr val="8A1524"/>
           </a:solidFill>
           <a:ln>
             <a:noFill/>
@@ -5637,45 +5413,16 @@
       </p:sp>
       <p:sp>
         <p:nvSpPr>
-          <p:cNvPr id="11" name="sidebar"/>
-          <p:cNvSpPr/>
-          <p:nvPr/>
-        </p:nvSpPr>
-        <p:spPr>
-          <a:xfrm>
-            <a:off x="11330000" y="500000"/>
-            <a:ext cx="45720" cy="5800000"/>
-          </a:xfrm>
-          <a:prstGeom prst="roundRect">
-            <a:avLst>
-              <a:gd name="adj" fmla="val 6000"/>
-            </a:avLst>
-          </a:prstGeom>
-          <a:solidFill>
-            <a:srgbClr val="4C8DFF"/>
-          </a:solidFill>
-          <a:ln>
-            <a:noFill/>
-          </a:ln>
-        </p:spPr>
-        <p:txBody>
-          <a:bodyPr/>
-          <a:lstStyle/>
-          <a:p/>
-        </p:txBody>
-      </p:sp>
-      <p:sp>
-        <p:nvSpPr>
-          <p:cNvPr id="12" name="kicker"/>
-          <p:cNvSpPr>
-            <a:spLocks noGrp="1"/>
-          </p:cNvSpPr>
-          <p:nvPr/>
-        </p:nvSpPr>
-        <p:spPr>
-          <a:xfrm>
-            <a:off x="640000" y="520000"/>
-            <a:ext cx="9000000" cy="500000"/>
+          <p:cNvPr id="11" name="kicker"/>
+          <p:cNvSpPr>
+            <a:spLocks noGrp="1"/>
+          </p:cNvSpPr>
+          <p:nvPr/>
+        </p:nvSpPr>
+        <p:spPr>
+          <a:xfrm>
+            <a:off x="640000" y="540000"/>
+            <a:ext cx="10000000" cy="460000"/>
           </a:xfrm>
           <a:prstGeom prst="rect">
             <a:avLst/>
@@ -5693,9 +5440,9 @@
               </a:spcBef>
             </a:pPr>
             <a:r>
-              <a:rPr lang="en-US" sz="1300" b="1" dirty="0">
-                <a:solidFill>
-                  <a:srgbClr val="2FE0C8"/>
+              <a:rPr lang="en-US" sz="1150" b="1" dirty="0">
+                <a:solidFill>
+                  <a:srgbClr val="8A1524"/>
                 </a:solidFill>
                 <a:latin typeface="Consolas"/>
               </a:rPr>
@@ -5706,16 +5453,16 @@
       </p:sp>
       <p:sp>
         <p:nvSpPr>
-          <p:cNvPr id="13" name="title"/>
-          <p:cNvSpPr>
-            <a:spLocks noGrp="1"/>
-          </p:cNvSpPr>
-          <p:nvPr/>
-        </p:nvSpPr>
-        <p:spPr>
-          <a:xfrm>
-            <a:off x="640000" y="980000"/>
-            <a:ext cx="10600000" cy="1300000"/>
+          <p:cNvPr id="12" name="title"/>
+          <p:cNvSpPr>
+            <a:spLocks noGrp="1"/>
+          </p:cNvSpPr>
+          <p:nvPr/>
+        </p:nvSpPr>
+        <p:spPr>
+          <a:xfrm>
+            <a:off x="630000" y="1120000"/>
+            <a:ext cx="10800000" cy="1200000"/>
           </a:xfrm>
           <a:prstGeom prst="rect">
             <a:avLst/>
@@ -5733,11 +5480,11 @@
               </a:spcBef>
             </a:pPr>
             <a:r>
-              <a:rPr lang="en-US" sz="3200" b="1" dirty="0">
-                <a:solidFill>
-                  <a:srgbClr val="E9F1FF"/>
-                </a:solidFill>
-                <a:latin typeface="Segoe UI"/>
+              <a:rPr lang="en-US" sz="3000" b="1" dirty="0">
+                <a:solidFill>
+                  <a:srgbClr val="1B1B22"/>
+                </a:solidFill>
+                <a:latin typeface="Georgia"/>
               </a:rPr>
               <a:t>Confidence-weighted, evidence-adjusted aggregation</a:t>
             </a:r>
@@ -5746,7 +5493,7 @@
       </p:sp>
       <p:sp>
         <p:nvSpPr>
-          <p:cNvPr id="14" name="body"/>
+          <p:cNvPr id="13" name="body"/>
           <p:cNvSpPr>
             <a:spLocks noGrp="1"/>
           </p:cNvSpPr>
@@ -5755,103 +5502,118 @@
         <p:spPr>
           <a:xfrm>
             <a:off x="700000" y="2650000"/>
-            <a:ext cx="10400000" cy="3600000"/>
-          </a:xfrm>
-          <a:prstGeom prst="rect">
-            <a:avLst/>
-          </a:prstGeom>
-        </p:spPr>
-        <p:txBody>
-          <a:bodyPr wrap="square" rtlCol="0">
-            <a:normAutofit/>
-          </a:bodyPr>
-          <a:lstStyle/>
-          <a:p>
-            <a:pPr marL="285750" indent="-285750">
-              <a:spcBef>
-                <a:spcPts val="700"/>
-              </a:spcBef>
-              <a:buFont typeface="Arial"/>
-              <a:buChar char="•"/>
-            </a:pPr>
-            <a:r>
-              <a:rPr lang="en-US" sz="1600" dirty="0">
-                <a:solidFill>
-                  <a:srgbClr val="9FB2CF"/>
-                </a:solidFill>
-                <a:latin typeface="Segoe UI"/>
+            <a:ext cx="10600000" cy="3400000"/>
+          </a:xfrm>
+          <a:prstGeom prst="rect">
+            <a:avLst/>
+          </a:prstGeom>
+        </p:spPr>
+        <p:txBody>
+          <a:bodyPr wrap="square" rtlCol="0">
+            <a:normAutofit/>
+          </a:bodyPr>
+          <a:lstStyle/>
+          <a:p>
+            <a:pPr marL="342900" indent="-342900">
+              <a:spcBef>
+                <a:spcPts val="760"/>
+              </a:spcBef>
+              <a:buClr>
+                <a:srgbClr val="8A1524"/>
+              </a:buClr>
+              <a:buFont typeface="Arial"/>
+              <a:buChar char="–"/>
+            </a:pPr>
+            <a:r>
+              <a:rPr lang="en-US" sz="1500" dirty="0">
+                <a:solidFill>
+                  <a:srgbClr val="3F3F4A"/>
+                </a:solidFill>
+                <a:latin typeface="Georgia"/>
               </a:rPr>
               <a:t>Ensemble score:  S(h) = Sum w_i(h) c_i p_i(h) / Sum w_i(h) c_i</a:t>
             </a:r>
           </a:p>
           <a:p>
-            <a:pPr marL="285750" indent="-285750">
-              <a:spcBef>
-                <a:spcPts val="700"/>
-              </a:spcBef>
-              <a:buFont typeface="Arial"/>
-              <a:buChar char="•"/>
-            </a:pPr>
-            <a:r>
-              <a:rPr lang="en-US" sz="1600" dirty="0">
-                <a:solidFill>
-                  <a:srgbClr val="9FB2CF"/>
-                </a:solidFill>
-                <a:latin typeface="Segoe UI"/>
+            <a:pPr marL="342900" indent="-342900">
+              <a:spcBef>
+                <a:spcPts val="760"/>
+              </a:spcBef>
+              <a:buClr>
+                <a:srgbClr val="8A1524"/>
+              </a:buClr>
+              <a:buFont typeface="Arial"/>
+              <a:buChar char="–"/>
+            </a:pPr>
+            <a:r>
+              <a:rPr lang="en-US" sz="1500" dirty="0">
+                <a:solidFill>
+                  <a:srgbClr val="3F3F4A"/>
+                </a:solidFill>
+                <a:latin typeface="Georgia"/>
               </a:rPr>
               <a:t>w_i(h): soft specialty weight   c_i: calibrated confidence</a:t>
             </a:r>
           </a:p>
           <a:p>
-            <a:pPr marL="285750" indent="-285750">
-              <a:spcBef>
-                <a:spcPts val="700"/>
-              </a:spcBef>
-              <a:buFont typeface="Arial"/>
-              <a:buChar char="•"/>
-            </a:pPr>
-            <a:r>
-              <a:rPr lang="en-US" sz="1600" dirty="0">
-                <a:solidFill>
-                  <a:srgbClr val="9FB2CF"/>
-                </a:solidFill>
-                <a:latin typeface="Segoe UI"/>
+            <a:pPr marL="342900" indent="-342900">
+              <a:spcBef>
+                <a:spcPts val="760"/>
+              </a:spcBef>
+              <a:buClr>
+                <a:srgbClr val="8A1524"/>
+              </a:buClr>
+              <a:buFont typeface="Arial"/>
+              <a:buChar char="–"/>
+            </a:pPr>
+            <a:r>
+              <a:rPr lang="en-US" sz="1500" dirty="0">
+                <a:solidFill>
+                  <a:srgbClr val="3F3F4A"/>
+                </a:solidFill>
+                <a:latin typeface="Georgia"/>
               </a:rPr>
               <a:t>Disagreement (weighted variance) D-bar is the control signal</a:t>
             </a:r>
           </a:p>
           <a:p>
-            <a:pPr marL="285750" indent="-285750">
-              <a:spcBef>
-                <a:spcPts val="700"/>
-              </a:spcBef>
-              <a:buFont typeface="Arial"/>
-              <a:buChar char="•"/>
-            </a:pPr>
-            <a:r>
-              <a:rPr lang="en-US" sz="1600" dirty="0">
-                <a:solidFill>
-                  <a:srgbClr val="9FB2CF"/>
-                </a:solidFill>
-                <a:latin typeface="Segoe UI"/>
+            <a:pPr marL="342900" indent="-342900">
+              <a:spcBef>
+                <a:spcPts val="760"/>
+              </a:spcBef>
+              <a:buClr>
+                <a:srgbClr val="8A1524"/>
+              </a:buClr>
+              <a:buFont typeface="Arial"/>
+              <a:buChar char="–"/>
+            </a:pPr>
+            <a:r>
+              <a:rPr lang="en-US" sz="1500" dirty="0">
+                <a:solidFill>
+                  <a:srgbClr val="3F3F4A"/>
+                </a:solidFill>
+                <a:latin typeface="Georgia"/>
               </a:rPr>
               <a:t>Evidence adjust:  S*(h) = sigma( a·logit S(h) + b·E(h) )</a:t>
             </a:r>
           </a:p>
           <a:p>
-            <a:pPr marL="285750" indent="-285750">
-              <a:spcBef>
-                <a:spcPts val="700"/>
-              </a:spcBef>
-              <a:buFont typeface="Arial"/>
-              <a:buChar char="•"/>
-            </a:pPr>
-            <a:r>
-              <a:rPr lang="en-US" sz="1600" dirty="0">
-                <a:solidFill>
-                  <a:srgbClr val="9FB2CF"/>
-                </a:solidFill>
-                <a:latin typeface="Segoe UI"/>
+            <a:pPr marL="342900" indent="-342900">
+              <a:spcBef>
+                <a:spcPts val="760"/>
+              </a:spcBef>
+              <a:buClr>
+                <a:srgbClr val="8A1524"/>
+              </a:buClr>
+              <a:buFont typeface="Arial"/>
+              <a:buChar char="–"/>
+            </a:pPr>
+            <a:r>
+              <a:rPr lang="en-US" sz="1500" dirty="0">
+                <a:solidFill>
+                  <a:srgbClr val="3F3F4A"/>
+                </a:solidFill>
+                <a:latin typeface="Georgia"/>
               </a:rPr>
               <a:t>Stop when: D-bar &lt;= t_agree  |  r = R_max  |  red-flag &gt; t_flag</a:t>
             </a:r>
@@ -5860,16 +5622,16 @@
       </p:sp>
       <p:sp>
         <p:nvSpPr>
-          <p:cNvPr id="15" name="footer"/>
-          <p:cNvSpPr>
-            <a:spLocks noGrp="1"/>
-          </p:cNvSpPr>
-          <p:nvPr/>
-        </p:nvSpPr>
-        <p:spPr>
-          <a:xfrm>
-            <a:off x="640000" y="6400000"/>
-            <a:ext cx="9000000" cy="380000"/>
+          <p:cNvPr id="14" name="footer"/>
+          <p:cNvSpPr>
+            <a:spLocks noGrp="1"/>
+          </p:cNvSpPr>
+          <p:nvPr/>
+        </p:nvSpPr>
+        <p:spPr>
+          <a:xfrm>
+            <a:off x="640000" y="6420000"/>
+            <a:ext cx="10000000" cy="360000"/>
           </a:xfrm>
           <a:prstGeom prst="rect">
             <a:avLst/>
@@ -5887,13 +5649,13 @@
               </a:spcBef>
             </a:pPr>
             <a:r>
-              <a:rPr lang="en-US" sz="1000" dirty="0">
-                <a:solidFill>
-                  <a:srgbClr val="65799A"/>
+              <a:rPr lang="en-US" sz="950" dirty="0">
+                <a:solidFill>
+                  <a:srgbClr val="8A8A96"/>
                 </a:solidFill>
                 <a:latin typeface="Consolas"/>
               </a:rPr>
-              <a:t>MedJar  ·  09 / 18  ·  assistive decision-support — not autonomous</a:t>
+              <a:t>MedJar   ·   09 / 18   ·   assistive decision-support, not an autonomous device</a:t>
             </a:r>
           </a:p>
         </p:txBody>
